--- a/Agent4Cryptol_images/1.pptx
+++ b/Agent4Cryptol_images/1.pptx
@@ -5,15 +5,18 @@
     <p:sldMasterId id="2147483648" r:id="rId1"/>
   </p:sldMasterIdLst>
   <p:notesMasterIdLst>
-    <p:notesMasterId r:id="rId6"/>
+    <p:notesMasterId r:id="rId9"/>
   </p:notesMasterIdLst>
   <p:handoutMasterIdLst>
-    <p:handoutMasterId r:id="rId7"/>
+    <p:handoutMasterId r:id="rId10"/>
   </p:handoutMasterIdLst>
   <p:sldIdLst>
     <p:sldId id="256" r:id="rId3"/>
-    <p:sldId id="257" r:id="rId4"/>
-    <p:sldId id="258" r:id="rId5"/>
+    <p:sldId id="260" r:id="rId4"/>
+    <p:sldId id="261" r:id="rId5"/>
+    <p:sldId id="257" r:id="rId6"/>
+    <p:sldId id="258" r:id="rId7"/>
+    <p:sldId id="259" r:id="rId8"/>
   </p:sldIdLst>
   <p:sldSz cx="12192000" cy="6858000"/>
   <p:notesSz cx="7103745" cy="10234295"/>
@@ -115,12 +118,12 @@
   <p:extLst>
     <p:ext uri="{EFAFB233-063F-42B5-8137-9DF3F51BA10A}">
       <p15:sldGuideLst xmlns:p15="http://schemas.microsoft.com/office/powerpoint/2012/main">
-        <p15:guide id="1" orient="horz" pos="2207" userDrawn="1">
+        <p15:guide id="1" orient="horz" pos="2298" userDrawn="1">
           <p15:clr>
             <a:srgbClr val="A4A3A4"/>
           </p15:clr>
         </p15:guide>
-        <p15:guide id="2" pos="3840" userDrawn="1">
+        <p15:guide id="2" pos="3826" userDrawn="1">
           <p15:clr>
             <a:srgbClr val="A4A3A4"/>
           </p15:clr>
@@ -3530,7 +3533,7 @@
         <p:spPr>
           <a:xfrm>
             <a:off x="3834765" y="460375"/>
-            <a:ext cx="7754620" cy="5187950"/>
+            <a:ext cx="7754620" cy="5777865"/>
           </a:xfrm>
           <a:prstGeom prst="roundRect">
             <a:avLst>
@@ -3582,8 +3585,8 @@
         </p:nvSpPr>
         <p:spPr>
           <a:xfrm>
-            <a:off x="4067810" y="3197225"/>
-            <a:ext cx="2153285" cy="2200275"/>
+            <a:off x="4113530" y="3469640"/>
+            <a:ext cx="1893570" cy="2463165"/>
           </a:xfrm>
           <a:prstGeom prst="roundRect">
             <a:avLst>
@@ -3634,8 +3637,8 @@
         </p:nvSpPr>
         <p:spPr>
           <a:xfrm>
-            <a:off x="6572250" y="732790"/>
-            <a:ext cx="4618355" cy="4353560"/>
+            <a:off x="6572250" y="560070"/>
+            <a:ext cx="4618355" cy="5372100"/>
           </a:xfrm>
           <a:prstGeom prst="roundRect">
             <a:avLst>
@@ -3680,48 +3683,13 @@
       </p:sp>
       <p:sp>
         <p:nvSpPr>
-          <p:cNvPr id="12" name="文本框 11"/>
-          <p:cNvSpPr txBox="1"/>
-          <p:nvPr/>
-        </p:nvSpPr>
-        <p:spPr>
-          <a:xfrm>
-            <a:off x="4575175" y="3197225"/>
-            <a:ext cx="1828165" cy="275590"/>
-          </a:xfrm>
-          <a:prstGeom prst="rect">
-            <a:avLst/>
-          </a:prstGeom>
-          <a:noFill/>
-        </p:spPr>
-        <p:txBody>
-          <a:bodyPr wrap="square" rtlCol="0">
-            <a:spAutoFit/>
-          </a:bodyPr>
-          <a:p>
-            <a:r>
-              <a:rPr lang="en-US" altLang="zh-CN" sz="1200">
-                <a:latin typeface="Times New Roman" panose="02020603050405020304" charset="0"/>
-                <a:cs typeface="Times New Roman" panose="02020603050405020304" charset="0"/>
-              </a:rPr>
-              <a:t>IR2Cryptol Agent</a:t>
-            </a:r>
-            <a:endParaRPr lang="en-US" altLang="zh-CN" sz="1200">
-              <a:latin typeface="Times New Roman" panose="02020603050405020304" charset="0"/>
-              <a:cs typeface="Times New Roman" panose="02020603050405020304" charset="0"/>
-            </a:endParaRPr>
-          </a:p>
-        </p:txBody>
-      </p:sp>
-      <p:sp>
-        <p:nvSpPr>
           <p:cNvPr id="13" name="文本框 12"/>
           <p:cNvSpPr txBox="1"/>
           <p:nvPr/>
         </p:nvSpPr>
         <p:spPr>
           <a:xfrm>
-            <a:off x="7527925" y="1050290"/>
+            <a:off x="7372985" y="1028065"/>
             <a:ext cx="3430905" cy="306705"/>
           </a:xfrm>
           <a:prstGeom prst="rect">
@@ -3736,13 +3704,21 @@
           <a:p>
             <a:pPr algn="ctr"/>
             <a:r>
-              <a:rPr lang="en-US" altLang="zh-CN" sz="1400">
+              <a:rPr lang="en-US" altLang="zh-CN" sz="1400" u="sng">
+                <a:solidFill>
+                  <a:schemeClr val="tx1"/>
+                </a:solidFill>
+                <a:uFillTx/>
                 <a:latin typeface="Times New Roman" panose="02020603050405020304" charset="0"/>
                 <a:cs typeface="Times New Roman" panose="02020603050405020304" charset="0"/>
               </a:rPr>
               <a:t>Compilation &amp; Fixing Agent</a:t>
             </a:r>
-            <a:endParaRPr lang="en-US" altLang="zh-CN" sz="1400">
+            <a:endParaRPr lang="en-US" altLang="zh-CN" sz="1400" u="sng">
+              <a:solidFill>
+                <a:schemeClr val="tx1"/>
+              </a:solidFill>
+              <a:uFillTx/>
               <a:latin typeface="Times New Roman" panose="02020603050405020304" charset="0"/>
               <a:cs typeface="Times New Roman" panose="02020603050405020304" charset="0"/>
             </a:endParaRPr>
@@ -4138,30 +4114,92 @@
           </a:p>
         </p:txBody>
       </p:sp>
-      <p:pic>
-        <p:nvPicPr>
-          <p:cNvPr id="19" name="图片 18"/>
-          <p:cNvPicPr>
-            <a:picLocks noChangeAspect="1"/>
-          </p:cNvPicPr>
-          <p:nvPr/>
-        </p:nvPicPr>
-        <p:blipFill>
-          <a:blip r:embed="rId2"/>
-          <a:stretch>
-            <a:fillRect/>
-          </a:stretch>
-        </p:blipFill>
-        <p:spPr>
+      <p:grpSp>
+        <p:nvGrpSpPr>
+          <p:cNvPr id="24" name="组合 23"/>
+          <p:cNvGrpSpPr/>
+          <p:nvPr>
+            <p:custDataLst>
+              <p:tags r:id="rId2"/>
+            </p:custDataLst>
+          </p:nvPr>
+        </p:nvGrpSpPr>
+        <p:grpSpPr>
           <a:xfrm>
-            <a:off x="4113530" y="3224530"/>
-            <a:ext cx="426720" cy="279400"/>
+            <a:off x="4133850" y="3561715"/>
+            <a:ext cx="2289810" cy="306705"/>
+            <a:chOff x="6478" y="5035"/>
+            <a:chExt cx="3606" cy="483"/>
           </a:xfrm>
-          <a:prstGeom prst="rect">
-            <a:avLst/>
-          </a:prstGeom>
-        </p:spPr>
-      </p:pic>
+        </p:grpSpPr>
+        <p:sp>
+          <p:nvSpPr>
+            <p:cNvPr id="12" name="文本框 11"/>
+            <p:cNvSpPr txBox="1"/>
+            <p:nvPr>
+              <p:custDataLst>
+                <p:tags r:id="rId3"/>
+              </p:custDataLst>
+            </p:nvPr>
+          </p:nvSpPr>
+          <p:spPr>
+            <a:xfrm>
+              <a:off x="7205" y="5035"/>
+              <a:ext cx="2879" cy="434"/>
+            </a:xfrm>
+            <a:prstGeom prst="rect">
+              <a:avLst/>
+            </a:prstGeom>
+            <a:noFill/>
+          </p:spPr>
+          <p:txBody>
+            <a:bodyPr wrap="square" rtlCol="0">
+              <a:spAutoFit/>
+            </a:bodyPr>
+            <a:p>
+              <a:r>
+                <a:rPr lang="en-US" altLang="zh-CN" sz="1200" u="sng">
+                  <a:latin typeface="Times New Roman" panose="02020603050405020304" charset="0"/>
+                  <a:cs typeface="Times New Roman" panose="02020603050405020304" charset="0"/>
+                </a:rPr>
+                <a:t>IR2Cryptol Agent</a:t>
+              </a:r>
+              <a:endParaRPr lang="en-US" altLang="zh-CN" sz="1200" u="sng">
+                <a:latin typeface="Times New Roman" panose="02020603050405020304" charset="0"/>
+                <a:cs typeface="Times New Roman" panose="02020603050405020304" charset="0"/>
+              </a:endParaRPr>
+            </a:p>
+          </p:txBody>
+        </p:sp>
+        <p:pic>
+          <p:nvPicPr>
+            <p:cNvPr id="19" name="图片 18"/>
+            <p:cNvPicPr>
+              <a:picLocks noChangeAspect="1"/>
+            </p:cNvPicPr>
+            <p:nvPr>
+              <p:custDataLst>
+                <p:tags r:id="rId4"/>
+              </p:custDataLst>
+            </p:nvPr>
+          </p:nvPicPr>
+          <p:blipFill>
+            <a:blip r:embed="rId5"/>
+            <a:stretch>
+              <a:fillRect/>
+            </a:stretch>
+          </p:blipFill>
+          <p:spPr>
+            <a:xfrm>
+              <a:off x="6478" y="5078"/>
+              <a:ext cx="672" cy="440"/>
+            </a:xfrm>
+            <a:prstGeom prst="rect">
+              <a:avLst/>
+            </a:prstGeom>
+          </p:spPr>
+        </p:pic>
+      </p:grpSp>
       <p:pic>
         <p:nvPicPr>
           <p:cNvPr id="20" name="图片 19"/>
@@ -4171,14 +4209,14 @@
           <p:nvPr/>
         </p:nvPicPr>
         <p:blipFill>
-          <a:blip r:embed="rId3"/>
+          <a:blip r:embed="rId6"/>
           <a:stretch>
             <a:fillRect/>
           </a:stretch>
         </p:blipFill>
         <p:spPr>
           <a:xfrm>
-            <a:off x="6795135" y="1050290"/>
+            <a:off x="7430135" y="952500"/>
             <a:ext cx="563880" cy="457200"/>
           </a:xfrm>
           <a:prstGeom prst="rect">
@@ -4190,7 +4228,11 @@
         <p:nvGrpSpPr>
           <p:cNvPr id="51" name="组合 50"/>
           <p:cNvGrpSpPr/>
-          <p:nvPr/>
+          <p:nvPr>
+            <p:custDataLst>
+              <p:tags r:id="rId7"/>
+            </p:custDataLst>
+          </p:nvPr>
         </p:nvGrpSpPr>
         <p:grpSpPr>
           <a:xfrm>
@@ -4204,7 +4246,11 @@
           <p:nvSpPr>
             <p:cNvPr id="7" name="圆角矩形 6"/>
             <p:cNvSpPr/>
-            <p:nvPr/>
+            <p:nvPr>
+              <p:custDataLst>
+                <p:tags r:id="rId8"/>
+              </p:custDataLst>
+            </p:nvPr>
           </p:nvSpPr>
           <p:spPr>
             <a:xfrm>
@@ -4256,7 +4302,11 @@
           <p:nvSpPr>
             <p:cNvPr id="11" name="文本框 10"/>
             <p:cNvSpPr txBox="1"/>
-            <p:nvPr/>
+            <p:nvPr>
+              <p:custDataLst>
+                <p:tags r:id="rId9"/>
+              </p:custDataLst>
+            </p:nvPr>
           </p:nvSpPr>
           <p:spPr>
             <a:xfrm>
@@ -4293,10 +4343,14 @@
             <p:cNvPicPr>
               <a:picLocks noChangeAspect="1"/>
             </p:cNvPicPr>
-            <p:nvPr/>
+            <p:nvPr>
+              <p:custDataLst>
+                <p:tags r:id="rId10"/>
+              </p:custDataLst>
+            </p:nvPr>
           </p:nvPicPr>
           <p:blipFill>
-            <a:blip r:embed="rId4"/>
+            <a:blip r:embed="rId11"/>
             <a:stretch>
               <a:fillRect/>
             </a:stretch>
@@ -4331,7 +4385,7 @@
               <p:cNvSpPr/>
               <p:nvPr>
                 <p:custDataLst>
-                  <p:tags r:id="rId5"/>
+                  <p:tags r:id="rId12"/>
                 </p:custDataLst>
               </p:nvPr>
             </p:nvSpPr>
@@ -4398,15 +4452,15 @@
                 </p:cNvPicPr>
                 <p:nvPr>
                   <p:custDataLst>
-                    <p:tags r:id="rId6"/>
+                    <p:tags r:id="rId13"/>
                   </p:custDataLst>
                 </p:nvPr>
               </p:nvPicPr>
               <p:blipFill>
-                <a:blip r:embed="rId7">
+                <a:blip r:embed="rId14">
                   <a:extLst>
                     <a:ext uri="{96DAC541-7B7A-43D3-8B79-37D633B846F1}">
-                      <asvg:svgBlip xmlns:asvg="http://schemas.microsoft.com/office/drawing/2016/SVG/main" r:embed="rId8"/>
+                      <asvg:svgBlip xmlns:asvg="http://schemas.microsoft.com/office/drawing/2016/SVG/main" r:embed="rId15"/>
                     </a:ext>
                   </a:extLst>
                 </a:blip>
@@ -4432,15 +4486,15 @@
                 </p:cNvPicPr>
                 <p:nvPr>
                   <p:custDataLst>
-                    <p:tags r:id="rId9"/>
+                    <p:tags r:id="rId16"/>
                   </p:custDataLst>
                 </p:nvPr>
               </p:nvPicPr>
               <p:blipFill>
-                <a:blip r:embed="rId10">
+                <a:blip r:embed="rId17">
                   <a:extLst>
                     <a:ext uri="{96DAC541-7B7A-43D3-8B79-37D633B846F1}">
-                      <asvg:svgBlip xmlns:asvg="http://schemas.microsoft.com/office/drawing/2016/SVG/main" r:embed="rId11"/>
+                      <asvg:svgBlip xmlns:asvg="http://schemas.microsoft.com/office/drawing/2016/SVG/main" r:embed="rId18"/>
                     </a:ext>
                   </a:extLst>
                 </a:blip>
@@ -4465,7 +4519,7 @@
               <p:cNvSpPr txBox="1"/>
               <p:nvPr>
                 <p:custDataLst>
-                  <p:tags r:id="rId12"/>
+                  <p:tags r:id="rId19"/>
                 </p:custDataLst>
               </p:nvPr>
             </p:nvSpPr>
@@ -4520,7 +4574,7 @@
               <p:cNvSpPr/>
               <p:nvPr>
                 <p:custDataLst>
-                  <p:tags r:id="rId13"/>
+                  <p:tags r:id="rId20"/>
                 </p:custDataLst>
               </p:nvPr>
             </p:nvSpPr>
@@ -4571,7 +4625,7 @@
               <p:cNvSpPr txBox="1"/>
               <p:nvPr>
                 <p:custDataLst>
-                  <p:tags r:id="rId14"/>
+                  <p:tags r:id="rId21"/>
                 </p:custDataLst>
               </p:nvPr>
             </p:nvSpPr>
@@ -4634,15 +4688,15 @@
                 </p:cNvPicPr>
                 <p:nvPr>
                   <p:custDataLst>
-                    <p:tags r:id="rId15"/>
+                    <p:tags r:id="rId22"/>
                   </p:custDataLst>
                 </p:nvPr>
               </p:nvPicPr>
               <p:blipFill>
-                <a:blip r:embed="rId16">
+                <a:blip r:embed="rId23">
                   <a:extLst>
                     <a:ext uri="{96DAC541-7B7A-43D3-8B79-37D633B846F1}">
-                      <asvg:svgBlip xmlns:asvg="http://schemas.microsoft.com/office/drawing/2016/SVG/main" r:embed="rId17"/>
+                      <asvg:svgBlip xmlns:asvg="http://schemas.microsoft.com/office/drawing/2016/SVG/main" r:embed="rId24"/>
                     </a:ext>
                   </a:extLst>
                 </a:blip>
@@ -4668,15 +4722,15 @@
                 </p:cNvPicPr>
                 <p:nvPr>
                   <p:custDataLst>
-                    <p:tags r:id="rId18"/>
+                    <p:tags r:id="rId25"/>
                   </p:custDataLst>
                 </p:nvPr>
               </p:nvPicPr>
               <p:blipFill>
-                <a:blip r:embed="rId19">
+                <a:blip r:embed="rId26">
                   <a:extLst>
                     <a:ext uri="{96DAC541-7B7A-43D3-8B79-37D633B846F1}">
-                      <asvg:svgBlip xmlns:asvg="http://schemas.microsoft.com/office/drawing/2016/SVG/main" r:embed="rId20"/>
+                      <asvg:svgBlip xmlns:asvg="http://schemas.microsoft.com/office/drawing/2016/SVG/main" r:embed="rId27"/>
                     </a:ext>
                   </a:extLst>
                 </a:blip>
@@ -4700,7 +4754,11 @@
           <p:nvCxnSpPr>
             <p:cNvPr id="50" name="直接箭头连接符 49"/>
             <p:cNvCxnSpPr/>
-            <p:nvPr/>
+            <p:nvPr>
+              <p:custDataLst>
+                <p:tags r:id="rId28"/>
+              </p:custDataLst>
+            </p:nvPr>
           </p:nvCxnSpPr>
           <p:spPr>
             <a:xfrm>
@@ -4733,6 +4791,305 @@
           </p:style>
         </p:cxnSp>
       </p:grpSp>
+      <p:grpSp>
+        <p:nvGrpSpPr>
+          <p:cNvPr id="21" name="组合 20"/>
+          <p:cNvGrpSpPr/>
+          <p:nvPr/>
+        </p:nvGrpSpPr>
+        <p:grpSpPr>
+          <a:xfrm>
+            <a:off x="4244975" y="4045585"/>
+            <a:ext cx="1625600" cy="1751330"/>
+            <a:chOff x="6741" y="2025"/>
+            <a:chExt cx="2560" cy="2758"/>
+          </a:xfrm>
+        </p:grpSpPr>
+        <p:sp>
+          <p:nvSpPr>
+            <p:cNvPr id="2" name="矩形 1"/>
+            <p:cNvSpPr/>
+            <p:nvPr>
+              <p:custDataLst>
+                <p:tags r:id="rId29"/>
+              </p:custDataLst>
+            </p:nvPr>
+          </p:nvSpPr>
+          <p:spPr>
+            <a:xfrm>
+              <a:off x="6742" y="2025"/>
+              <a:ext cx="2558" cy="1115"/>
+            </a:xfrm>
+            <a:prstGeom prst="rect">
+              <a:avLst/>
+            </a:prstGeom>
+            <a:solidFill>
+              <a:schemeClr val="bg1"/>
+            </a:solidFill>
+            <a:ln>
+              <a:solidFill>
+                <a:schemeClr val="tx1"/>
+              </a:solidFill>
+            </a:ln>
+          </p:spPr>
+          <p:style>
+            <a:lnRef idx="2">
+              <a:schemeClr val="accent1">
+                <a:lumMod val="75000"/>
+              </a:schemeClr>
+            </a:lnRef>
+            <a:fillRef idx="1">
+              <a:schemeClr val="accent1"/>
+            </a:fillRef>
+            <a:effectRef idx="0">
+              <a:srgbClr val="FFFFFF"/>
+            </a:effectRef>
+            <a:fontRef idx="minor">
+              <a:schemeClr val="lt1"/>
+            </a:fontRef>
+          </p:style>
+          <p:txBody>
+            <a:bodyPr rtlCol="0" anchor="ctr"/>
+            <a:p>
+              <a:pPr algn="ctr"/>
+              <a:endParaRPr lang="zh-CN" altLang="en-US"/>
+            </a:p>
+          </p:txBody>
+        </p:sp>
+        <p:pic>
+          <p:nvPicPr>
+            <p:cNvPr id="4" name="图片 3" descr="json输入"/>
+            <p:cNvPicPr>
+              <a:picLocks noChangeAspect="1"/>
+            </p:cNvPicPr>
+            <p:nvPr>
+              <p:custDataLst>
+                <p:tags r:id="rId30"/>
+              </p:custDataLst>
+            </p:nvPr>
+          </p:nvPicPr>
+          <p:blipFill>
+            <a:blip r:embed="rId31">
+              <a:extLst>
+                <a:ext uri="{96DAC541-7B7A-43D3-8B79-37D633B846F1}">
+                  <asvg:svgBlip xmlns:asvg="http://schemas.microsoft.com/office/drawing/2016/SVG/main" r:embed="rId32"/>
+                </a:ext>
+              </a:extLst>
+            </a:blip>
+            <a:stretch>
+              <a:fillRect/>
+            </a:stretch>
+          </p:blipFill>
+          <p:spPr>
+            <a:xfrm>
+              <a:off x="7721" y="2143"/>
+              <a:ext cx="600" cy="600"/>
+            </a:xfrm>
+            <a:prstGeom prst="rect">
+              <a:avLst/>
+            </a:prstGeom>
+          </p:spPr>
+        </p:pic>
+        <p:sp>
+          <p:nvSpPr>
+            <p:cNvPr id="10" name="文本框 9"/>
+            <p:cNvSpPr txBox="1"/>
+            <p:nvPr>
+              <p:custDataLst>
+                <p:tags r:id="rId33"/>
+              </p:custDataLst>
+            </p:nvPr>
+          </p:nvSpPr>
+          <p:spPr>
+            <a:xfrm>
+              <a:off x="7410" y="2803"/>
+              <a:ext cx="1221" cy="337"/>
+            </a:xfrm>
+            <a:prstGeom prst="rect">
+              <a:avLst/>
+            </a:prstGeom>
+            <a:noFill/>
+          </p:spPr>
+          <p:txBody>
+            <a:bodyPr wrap="square" rtlCol="0">
+              <a:spAutoFit/>
+            </a:bodyPr>
+            <a:p>
+              <a:pPr algn="ctr"/>
+              <a:r>
+                <a:rPr lang="en-US" altLang="zh-CN" sz="800">
+                  <a:latin typeface="Times New Roman" panose="02020603050405020304" charset="0"/>
+                  <a:cs typeface="Times New Roman" panose="02020603050405020304" charset="0"/>
+                </a:rPr>
+                <a:t>Retrieved IR</a:t>
+              </a:r>
+              <a:endParaRPr lang="en-US" altLang="zh-CN" sz="800">
+                <a:latin typeface="Times New Roman" panose="02020603050405020304" charset="0"/>
+                <a:cs typeface="Times New Roman" panose="02020603050405020304" charset="0"/>
+              </a:endParaRPr>
+            </a:p>
+          </p:txBody>
+        </p:sp>
+        <p:sp>
+          <p:nvSpPr>
+            <p:cNvPr id="5" name="矩形 4"/>
+            <p:cNvSpPr/>
+            <p:nvPr/>
+          </p:nvSpPr>
+          <p:spPr>
+            <a:xfrm>
+              <a:off x="6741" y="3669"/>
+              <a:ext cx="2560" cy="1115"/>
+            </a:xfrm>
+            <a:prstGeom prst="rect">
+              <a:avLst/>
+            </a:prstGeom>
+            <a:solidFill>
+              <a:schemeClr val="bg1"/>
+            </a:solidFill>
+            <a:ln>
+              <a:solidFill>
+                <a:schemeClr val="tx1"/>
+              </a:solidFill>
+            </a:ln>
+          </p:spPr>
+          <p:style>
+            <a:lnRef idx="2">
+              <a:schemeClr val="accent1">
+                <a:lumMod val="75000"/>
+              </a:schemeClr>
+            </a:lnRef>
+            <a:fillRef idx="1">
+              <a:schemeClr val="accent1"/>
+            </a:fillRef>
+            <a:effectRef idx="0">
+              <a:srgbClr val="FFFFFF"/>
+            </a:effectRef>
+            <a:fontRef idx="minor">
+              <a:schemeClr val="lt1"/>
+            </a:fontRef>
+          </p:style>
+          <p:txBody>
+            <a:bodyPr rtlCol="0" anchor="ctr"/>
+            <a:p>
+              <a:pPr algn="ctr"/>
+              <a:endParaRPr lang="zh-CN" altLang="en-US"/>
+            </a:p>
+          </p:txBody>
+        </p:sp>
+        <p:sp>
+          <p:nvSpPr>
+            <p:cNvPr id="15" name="文本框 14"/>
+            <p:cNvSpPr txBox="1"/>
+            <p:nvPr/>
+          </p:nvSpPr>
+          <p:spPr>
+            <a:xfrm>
+              <a:off x="6741" y="4443"/>
+              <a:ext cx="2560" cy="337"/>
+            </a:xfrm>
+            <a:prstGeom prst="rect">
+              <a:avLst/>
+            </a:prstGeom>
+            <a:noFill/>
+          </p:spPr>
+          <p:txBody>
+            <a:bodyPr wrap="square" rtlCol="0">
+              <a:spAutoFit/>
+            </a:bodyPr>
+            <a:p>
+              <a:pPr algn="ctr"/>
+              <a:r>
+                <a:rPr lang="en-US" altLang="zh-CN" sz="800">
+                  <a:latin typeface="Times New Roman" panose="02020603050405020304" charset="0"/>
+                  <a:cs typeface="Times New Roman" panose="02020603050405020304" charset="0"/>
+                </a:rPr>
+                <a:t>Generated Cryptol </a:t>
+              </a:r>
+              <a:r>
+                <a:rPr lang="en-US" altLang="zh-CN" sz="800">
+                  <a:latin typeface="Times New Roman" panose="02020603050405020304" charset="0"/>
+                  <a:cs typeface="Times New Roman" panose="02020603050405020304" charset="0"/>
+                </a:rPr>
+                <a:t>Code</a:t>
+              </a:r>
+              <a:endParaRPr lang="en-US" altLang="zh-CN" sz="800">
+                <a:latin typeface="Times New Roman" panose="02020603050405020304" charset="0"/>
+                <a:cs typeface="Times New Roman" panose="02020603050405020304" charset="0"/>
+              </a:endParaRPr>
+            </a:p>
+          </p:txBody>
+        </p:sp>
+        <p:pic>
+          <p:nvPicPr>
+            <p:cNvPr id="16" name="图片 15" descr="代码文件"/>
+            <p:cNvPicPr>
+              <a:picLocks noChangeAspect="1"/>
+            </p:cNvPicPr>
+            <p:nvPr/>
+          </p:nvPicPr>
+          <p:blipFill>
+            <a:blip r:embed="rId34">
+              <a:extLst>
+                <a:ext uri="{96DAC541-7B7A-43D3-8B79-37D633B846F1}">
+                  <asvg:svgBlip xmlns:asvg="http://schemas.microsoft.com/office/drawing/2016/SVG/main" r:embed="rId35"/>
+                </a:ext>
+              </a:extLst>
+            </a:blip>
+            <a:stretch>
+              <a:fillRect/>
+            </a:stretch>
+          </p:blipFill>
+          <p:spPr>
+            <a:xfrm>
+              <a:off x="7697" y="3780"/>
+              <a:ext cx="647" cy="647"/>
+            </a:xfrm>
+            <a:prstGeom prst="rect">
+              <a:avLst/>
+            </a:prstGeom>
+          </p:spPr>
+        </p:pic>
+        <p:cxnSp>
+          <p:nvCxnSpPr>
+            <p:cNvPr id="23" name="直接箭头连接符 22"/>
+            <p:cNvCxnSpPr>
+              <a:stCxn id="10" idx="2"/>
+              <a:endCxn id="5" idx="0"/>
+            </p:cNvCxnSpPr>
+            <p:nvPr/>
+          </p:nvCxnSpPr>
+          <p:spPr>
+            <a:xfrm>
+              <a:off x="8021" y="3140"/>
+              <a:ext cx="0" cy="529"/>
+            </a:xfrm>
+            <a:prstGeom prst="straightConnector1">
+              <a:avLst/>
+            </a:prstGeom>
+            <a:ln w="15875">
+              <a:solidFill>
+                <a:srgbClr val="202020"/>
+              </a:solidFill>
+              <a:tailEnd type="arrow"/>
+            </a:ln>
+          </p:spPr>
+          <p:style>
+            <a:lnRef idx="2">
+              <a:schemeClr val="accent1"/>
+            </a:lnRef>
+            <a:fillRef idx="0">
+              <a:srgbClr val="FFFFFF"/>
+            </a:fillRef>
+            <a:effectRef idx="0">
+              <a:srgbClr val="FFFFFF"/>
+            </a:effectRef>
+            <a:fontRef idx="minor">
+              <a:schemeClr val="tx1"/>
+            </a:fontRef>
+          </p:style>
+        </p:cxnSp>
+      </p:grpSp>
     </p:spTree>
   </p:cSld>
   <p:clrMapOvr>
@@ -4742,6 +5099,4883 @@
 </file>
 
 <file path=ppt/slides/slide2.xml><?xml version="1.0" encoding="utf-8"?>
+<p:sld xmlns:a="http://schemas.openxmlformats.org/drawingml/2006/main" xmlns:r="http://schemas.openxmlformats.org/officeDocument/2006/relationships" xmlns:p="http://schemas.openxmlformats.org/presentationml/2006/main">
+  <p:cSld>
+    <p:spTree>
+      <p:nvGrpSpPr>
+        <p:cNvPr id="1" name=""/>
+        <p:cNvGrpSpPr/>
+        <p:nvPr/>
+      </p:nvGrpSpPr>
+      <p:grpSpPr>
+        <a:xfrm>
+          <a:off x="0" y="0"/>
+          <a:ext cx="0" cy="0"/>
+          <a:chOff x="0" y="0"/>
+          <a:chExt cx="0" cy="0"/>
+        </a:xfrm>
+      </p:grpSpPr>
+      <p:sp>
+        <p:nvSpPr>
+          <p:cNvPr id="59" name="圆角矩形 58"/>
+          <p:cNvSpPr/>
+          <p:nvPr/>
+        </p:nvSpPr>
+        <p:spPr>
+          <a:xfrm>
+            <a:off x="9554210" y="2374265"/>
+            <a:ext cx="1903095" cy="1102995"/>
+          </a:xfrm>
+          <a:prstGeom prst="roundRect">
+            <a:avLst/>
+          </a:prstGeom>
+          <a:solidFill>
+            <a:schemeClr val="accent3">
+              <a:lumMod val="20000"/>
+              <a:lumOff val="80000"/>
+            </a:schemeClr>
+          </a:solidFill>
+          <a:ln>
+            <a:solidFill>
+              <a:schemeClr val="accent2">
+                <a:lumMod val="60000"/>
+                <a:lumOff val="40000"/>
+              </a:schemeClr>
+            </a:solidFill>
+          </a:ln>
+        </p:spPr>
+        <p:style>
+          <a:lnRef idx="2">
+            <a:schemeClr val="accent1">
+              <a:lumMod val="75000"/>
+            </a:schemeClr>
+          </a:lnRef>
+          <a:fillRef idx="1">
+            <a:schemeClr val="accent1"/>
+          </a:fillRef>
+          <a:effectRef idx="0">
+            <a:srgbClr val="FFFFFF"/>
+          </a:effectRef>
+          <a:fontRef idx="minor">
+            <a:schemeClr val="lt1"/>
+          </a:fontRef>
+        </p:style>
+        <p:txBody>
+          <a:bodyPr rtlCol="0" anchor="ctr"/>
+          <a:p>
+            <a:pPr algn="ctr"/>
+            <a:endParaRPr lang="zh-CN" altLang="en-US"/>
+          </a:p>
+        </p:txBody>
+      </p:sp>
+      <p:sp>
+        <p:nvSpPr>
+          <p:cNvPr id="3" name="圆角矩形 2"/>
+          <p:cNvSpPr/>
+          <p:nvPr/>
+        </p:nvSpPr>
+        <p:spPr>
+          <a:xfrm>
+            <a:off x="243205" y="829310"/>
+            <a:ext cx="1595755" cy="2647950"/>
+          </a:xfrm>
+          <a:prstGeom prst="roundRect">
+            <a:avLst>
+              <a:gd name="adj" fmla="val 6639"/>
+            </a:avLst>
+          </a:prstGeom>
+          <a:solidFill>
+            <a:srgbClr val="E8E8E8"/>
+          </a:solidFill>
+          <a:ln w="9525">
+            <a:solidFill>
+              <a:schemeClr val="tx1"/>
+            </a:solidFill>
+          </a:ln>
+        </p:spPr>
+        <p:style>
+          <a:lnRef idx="2">
+            <a:schemeClr val="accent1">
+              <a:lumMod val="75000"/>
+            </a:schemeClr>
+          </a:lnRef>
+          <a:fillRef idx="1">
+            <a:schemeClr val="accent1"/>
+          </a:fillRef>
+          <a:effectRef idx="0">
+            <a:srgbClr val="FFFFFF"/>
+          </a:effectRef>
+          <a:fontRef idx="minor">
+            <a:schemeClr val="lt1"/>
+          </a:fontRef>
+        </p:style>
+        <p:txBody>
+          <a:bodyPr rtlCol="0" anchor="ctr"/>
+          <a:p>
+            <a:pPr algn="ctr"/>
+            <a:endParaRPr lang="zh-CN" altLang="en-US"/>
+          </a:p>
+        </p:txBody>
+      </p:sp>
+      <p:pic>
+        <p:nvPicPr>
+          <p:cNvPr id="14" name="图片 13"/>
+          <p:cNvPicPr>
+            <a:picLocks noChangeAspect="1"/>
+          </p:cNvPicPr>
+          <p:nvPr/>
+        </p:nvPicPr>
+        <p:blipFill>
+          <a:blip r:embed="rId1"/>
+          <a:stretch>
+            <a:fillRect/>
+          </a:stretch>
+        </p:blipFill>
+        <p:spPr>
+          <a:xfrm>
+            <a:off x="276860" y="1334770"/>
+            <a:ext cx="528320" cy="551815"/>
+          </a:xfrm>
+          <a:prstGeom prst="rect">
+            <a:avLst/>
+          </a:prstGeom>
+        </p:spPr>
+      </p:pic>
+      <p:sp>
+        <p:nvSpPr>
+          <p:cNvPr id="17" name="文本框 16"/>
+          <p:cNvSpPr txBox="1"/>
+          <p:nvPr/>
+        </p:nvSpPr>
+        <p:spPr>
+          <a:xfrm>
+            <a:off x="772795" y="1429385"/>
+            <a:ext cx="1064260" cy="363220"/>
+          </a:xfrm>
+          <a:prstGeom prst="rect">
+            <a:avLst/>
+          </a:prstGeom>
+          <a:noFill/>
+        </p:spPr>
+        <p:txBody>
+          <a:bodyPr wrap="square" rtlCol="0">
+            <a:noAutofit/>
+          </a:bodyPr>
+          <a:p>
+            <a:r>
+              <a:rPr lang="en-US" altLang="zh-CN" sz="1000" b="1">
+                <a:latin typeface="Times New Roman" panose="02020603050405020304" charset="0"/>
+                <a:cs typeface="Times New Roman" panose="02020603050405020304" charset="0"/>
+              </a:rPr>
+              <a:t>Specification </a:t>
+            </a:r>
+            <a:endParaRPr lang="en-US" altLang="zh-CN" sz="1000" b="1">
+              <a:latin typeface="Times New Roman" panose="02020603050405020304" charset="0"/>
+              <a:cs typeface="Times New Roman" panose="02020603050405020304" charset="0"/>
+            </a:endParaRPr>
+          </a:p>
+          <a:p>
+            <a:r>
+              <a:rPr lang="en-US" altLang="zh-CN" sz="1000" b="1">
+                <a:latin typeface="Times New Roman" panose="02020603050405020304" charset="0"/>
+                <a:cs typeface="Times New Roman" panose="02020603050405020304" charset="0"/>
+              </a:rPr>
+              <a:t>Document</a:t>
+            </a:r>
+            <a:endParaRPr lang="zh-CN" altLang="en-US" sz="1000" b="1"/>
+          </a:p>
+        </p:txBody>
+      </p:sp>
+      <p:sp>
+        <p:nvSpPr>
+          <p:cNvPr id="18" name="文本框 17"/>
+          <p:cNvSpPr txBox="1"/>
+          <p:nvPr/>
+        </p:nvSpPr>
+        <p:spPr>
+          <a:xfrm>
+            <a:off x="286385" y="1978025"/>
+            <a:ext cx="1510030" cy="1332230"/>
+          </a:xfrm>
+          <a:prstGeom prst="rect">
+            <a:avLst/>
+          </a:prstGeom>
+          <a:noFill/>
+        </p:spPr>
+        <p:txBody>
+          <a:bodyPr wrap="square" rtlCol="0">
+            <a:noAutofit/>
+          </a:bodyPr>
+          <a:p>
+            <a:r>
+              <a:rPr lang="en-US" altLang="zh-CN" sz="800" i="1">
+                <a:latin typeface="Times New Roman" panose="02020603050405020304" charset="0"/>
+                <a:cs typeface="Times New Roman" panose="02020603050405020304" charset="0"/>
+              </a:rPr>
+              <a:t>e.g., Algorithm 1 ForExample():</a:t>
+            </a:r>
+            <a:endParaRPr lang="en-US" altLang="zh-CN" sz="800" i="1">
+              <a:latin typeface="Times New Roman" panose="02020603050405020304" charset="0"/>
+              <a:cs typeface="Times New Roman" panose="02020603050405020304" charset="0"/>
+            </a:endParaRPr>
+          </a:p>
+          <a:p>
+            <a:r>
+              <a:rPr lang="en-US" altLang="zh-CN" sz="800" i="1">
+                <a:latin typeface="Times New Roman" panose="02020603050405020304" charset="0"/>
+                <a:cs typeface="Times New Roman" panose="02020603050405020304" charset="0"/>
+              </a:rPr>
+              <a:t>Performs two simple for loops. </a:t>
+            </a:r>
+            <a:endParaRPr lang="en-US" altLang="zh-CN" sz="800" i="1">
+              <a:latin typeface="Times New Roman" panose="02020603050405020304" charset="0"/>
+              <a:cs typeface="Times New Roman" panose="02020603050405020304" charset="0"/>
+            </a:endParaRPr>
+          </a:p>
+          <a:p>
+            <a:r>
+              <a:rPr lang="en-US" altLang="zh-CN" sz="800" i="1">
+                <a:latin typeface="Times New Roman" panose="02020603050405020304" charset="0"/>
+                <a:cs typeface="Times New Roman" panose="02020603050405020304" charset="0"/>
+              </a:rPr>
+              <a:t>1: for (i</a:t>
+            </a:r>
+            <a:r>
+              <a:rPr lang="en-US" altLang="en-US" sz="800" i="1">
+                <a:latin typeface="Times New Roman" panose="02020603050405020304" charset="0"/>
+                <a:cs typeface="Times New Roman" panose="02020603050405020304" charset="0"/>
+              </a:rPr>
+              <a:t>←</a:t>
+            </a:r>
+            <a:r>
+              <a:rPr lang="en-US" altLang="zh-CN" sz="800" i="1">
+                <a:latin typeface="Times New Roman" panose="02020603050405020304" charset="0"/>
+                <a:cs typeface="Times New Roman" panose="02020603050405020304" charset="0"/>
+              </a:rPr>
+              <a:t> 0; i&lt; 10;</a:t>
+            </a:r>
+            <a:r>
+              <a:rPr lang="en-US" sz="800" i="1">
+                <a:latin typeface="Times New Roman" panose="02020603050405020304" charset="0"/>
+                <a:cs typeface="Times New Roman" panose="02020603050405020304" charset="0"/>
+              </a:rPr>
+              <a:t>i</a:t>
+            </a:r>
+            <a:r>
+              <a:rPr lang="en-US" altLang="zh-CN" sz="800" i="1">
+                <a:latin typeface="Times New Roman" panose="02020603050405020304" charset="0"/>
+                <a:cs typeface="Times New Roman" panose="02020603050405020304" charset="0"/>
+              </a:rPr>
+              <a:t>++) </a:t>
+            </a:r>
+            <a:endParaRPr lang="en-US" altLang="zh-CN" sz="800" i="1">
+              <a:latin typeface="Times New Roman" panose="02020603050405020304" charset="0"/>
+              <a:cs typeface="Times New Roman" panose="02020603050405020304" charset="0"/>
+            </a:endParaRPr>
+          </a:p>
+          <a:p>
+            <a:r>
+              <a:rPr lang="en-US" altLang="zh-CN" sz="800" i="1">
+                <a:latin typeface="Times New Roman" panose="02020603050405020304" charset="0"/>
+                <a:cs typeface="Times New Roman" panose="02020603050405020304" charset="0"/>
+              </a:rPr>
+              <a:t>2: </a:t>
+            </a:r>
+            <a:r>
+              <a:rPr lang="zh-CN" altLang="en-US" sz="800" i="1">
+                <a:latin typeface="Times New Roman" panose="02020603050405020304" charset="0"/>
+                <a:cs typeface="Times New Roman" panose="02020603050405020304" charset="0"/>
+              </a:rPr>
+              <a:t>𝐴</a:t>
+            </a:r>
+            <a:r>
+              <a:rPr lang="en-US" altLang="zh-CN" sz="800" i="1">
+                <a:latin typeface="Times New Roman" panose="02020603050405020304" charset="0"/>
+                <a:cs typeface="Times New Roman" panose="02020603050405020304" charset="0"/>
+              </a:rPr>
+              <a:t>[i] </a:t>
+            </a:r>
+            <a:r>
+              <a:rPr lang="en-US" altLang="en-US" sz="800" i="1">
+                <a:latin typeface="Times New Roman" panose="02020603050405020304" charset="0"/>
+                <a:cs typeface="Times New Roman" panose="02020603050405020304" charset="0"/>
+              </a:rPr>
+              <a:t>←</a:t>
+            </a:r>
+            <a:r>
+              <a:rPr lang="en-US" altLang="zh-CN" sz="800" i="1">
+                <a:latin typeface="Times New Roman" panose="02020603050405020304" charset="0"/>
+                <a:cs typeface="Times New Roman" panose="02020603050405020304" charset="0"/>
+              </a:rPr>
+              <a:t> i </a:t>
+            </a:r>
+            <a:endParaRPr lang="en-US" altLang="zh-CN" sz="800" i="1">
+              <a:latin typeface="Times New Roman" panose="02020603050405020304" charset="0"/>
+              <a:cs typeface="Times New Roman" panose="02020603050405020304" charset="0"/>
+            </a:endParaRPr>
+          </a:p>
+          <a:p>
+            <a:r>
+              <a:rPr lang="en-US" altLang="zh-CN" sz="800" i="1">
+                <a:latin typeface="Times New Roman" panose="02020603050405020304" charset="0"/>
+                <a:cs typeface="Times New Roman" panose="02020603050405020304" charset="0"/>
+              </a:rPr>
+              <a:t>3: end for </a:t>
+            </a:r>
+            <a:endParaRPr lang="en-US" altLang="zh-CN" sz="800" i="1">
+              <a:latin typeface="Times New Roman" panose="02020603050405020304" charset="0"/>
+              <a:cs typeface="Times New Roman" panose="02020603050405020304" charset="0"/>
+            </a:endParaRPr>
+          </a:p>
+          <a:p>
+            <a:r>
+              <a:rPr lang="en-US" altLang="zh-CN" sz="800" i="1">
+                <a:latin typeface="Times New Roman" panose="02020603050405020304" charset="0"/>
+                <a:cs typeface="Times New Roman" panose="02020603050405020304" charset="0"/>
+              </a:rPr>
+              <a:t>4:</a:t>
+            </a:r>
+            <a:r>
+              <a:rPr lang="en-US" sz="800" i="1">
+                <a:latin typeface="Times New Roman" panose="02020603050405020304" charset="0"/>
+                <a:cs typeface="Times New Roman" panose="02020603050405020304" charset="0"/>
+              </a:rPr>
+              <a:t>j</a:t>
+            </a:r>
+            <a:r>
+              <a:rPr lang="en-US" altLang="en-US" sz="800" i="1">
+                <a:latin typeface="Times New Roman" panose="02020603050405020304" charset="0"/>
+                <a:cs typeface="Times New Roman" panose="02020603050405020304" charset="0"/>
+              </a:rPr>
+              <a:t>←</a:t>
+            </a:r>
+            <a:r>
+              <a:rPr lang="en-US" altLang="zh-CN" sz="800" i="1">
+                <a:latin typeface="Times New Roman" panose="02020603050405020304" charset="0"/>
+                <a:cs typeface="Times New Roman" panose="02020603050405020304" charset="0"/>
+              </a:rPr>
+              <a:t>0</a:t>
+            </a:r>
+            <a:endParaRPr lang="en-US" altLang="zh-CN" sz="800" i="1">
+              <a:latin typeface="Times New Roman" panose="02020603050405020304" charset="0"/>
+              <a:cs typeface="Times New Roman" panose="02020603050405020304" charset="0"/>
+            </a:endParaRPr>
+          </a:p>
+          <a:p>
+            <a:r>
+              <a:rPr lang="en-US" altLang="zh-CN" sz="800" i="1">
+                <a:latin typeface="Times New Roman" panose="02020603050405020304" charset="0"/>
+                <a:cs typeface="Times New Roman" panose="02020603050405020304" charset="0"/>
+              </a:rPr>
+              <a:t>5: for (k </a:t>
+            </a:r>
+            <a:r>
+              <a:rPr lang="en-US" altLang="en-US" sz="800" i="1">
+                <a:latin typeface="Times New Roman" panose="02020603050405020304" charset="0"/>
+                <a:cs typeface="Times New Roman" panose="02020603050405020304" charset="0"/>
+              </a:rPr>
+              <a:t>←</a:t>
+            </a:r>
+            <a:r>
+              <a:rPr lang="en-US" altLang="zh-CN" sz="800" i="1">
+                <a:latin typeface="Times New Roman" panose="02020603050405020304" charset="0"/>
+                <a:cs typeface="Times New Roman" panose="02020603050405020304" charset="0"/>
+              </a:rPr>
+              <a:t> 256; k &gt; 1; k </a:t>
+            </a:r>
+            <a:r>
+              <a:rPr lang="en-US" altLang="en-US" sz="800" i="1">
+                <a:latin typeface="Times New Roman" panose="02020603050405020304" charset="0"/>
+                <a:cs typeface="Times New Roman" panose="02020603050405020304" charset="0"/>
+              </a:rPr>
+              <a:t>←</a:t>
+            </a:r>
+            <a:r>
+              <a:rPr lang="en-US" altLang="zh-CN" sz="800" i="1">
+                <a:latin typeface="Times New Roman" panose="02020603050405020304" charset="0"/>
+                <a:cs typeface="Times New Roman" panose="02020603050405020304" charset="0"/>
+              </a:rPr>
+              <a:t> k/2) </a:t>
+            </a:r>
+            <a:endParaRPr lang="en-US" altLang="zh-CN" sz="800" i="1">
+              <a:latin typeface="Times New Roman" panose="02020603050405020304" charset="0"/>
+              <a:cs typeface="Times New Roman" panose="02020603050405020304" charset="0"/>
+            </a:endParaRPr>
+          </a:p>
+          <a:p>
+            <a:r>
+              <a:rPr lang="en-US" altLang="zh-CN" sz="800" i="1">
+                <a:latin typeface="Times New Roman" panose="02020603050405020304" charset="0"/>
+                <a:cs typeface="Times New Roman" panose="02020603050405020304" charset="0"/>
+              </a:rPr>
+              <a:t>6: </a:t>
+            </a:r>
+            <a:r>
+              <a:rPr lang="zh-CN" altLang="en-US" sz="800" i="1">
+                <a:latin typeface="Times New Roman" panose="02020603050405020304" charset="0"/>
+                <a:cs typeface="Times New Roman" panose="02020603050405020304" charset="0"/>
+              </a:rPr>
+              <a:t>𝐵</a:t>
+            </a:r>
+            <a:r>
+              <a:rPr lang="en-US" altLang="zh-CN" sz="800" i="1">
+                <a:latin typeface="Times New Roman" panose="02020603050405020304" charset="0"/>
+                <a:cs typeface="Times New Roman" panose="02020603050405020304" charset="0"/>
+              </a:rPr>
+              <a:t>[j] </a:t>
+            </a:r>
+            <a:r>
+              <a:rPr lang="en-US" altLang="en-US" sz="800" i="1">
+                <a:latin typeface="Times New Roman" panose="02020603050405020304" charset="0"/>
+                <a:cs typeface="Times New Roman" panose="02020603050405020304" charset="0"/>
+              </a:rPr>
+              <a:t>←</a:t>
+            </a:r>
+            <a:r>
+              <a:rPr lang="en-US" sz="800" i="1">
+                <a:latin typeface="Times New Roman" panose="02020603050405020304" charset="0"/>
+                <a:cs typeface="Times New Roman" panose="02020603050405020304" charset="0"/>
+              </a:rPr>
+              <a:t>k</a:t>
+            </a:r>
+            <a:endParaRPr lang="en-US" altLang="zh-CN" sz="800" i="1">
+              <a:latin typeface="Times New Roman" panose="02020603050405020304" charset="0"/>
+              <a:cs typeface="Times New Roman" panose="02020603050405020304" charset="0"/>
+            </a:endParaRPr>
+          </a:p>
+          <a:p>
+            <a:r>
+              <a:rPr lang="en-US" altLang="zh-CN" sz="800" i="1">
+                <a:latin typeface="Times New Roman" panose="02020603050405020304" charset="0"/>
+                <a:cs typeface="Times New Roman" panose="02020603050405020304" charset="0"/>
+              </a:rPr>
+              <a:t>7: </a:t>
+            </a:r>
+            <a:r>
+              <a:rPr lang="en-US" sz="800" i="1">
+                <a:latin typeface="Times New Roman" panose="02020603050405020304" charset="0"/>
+                <a:cs typeface="Times New Roman" panose="02020603050405020304" charset="0"/>
+              </a:rPr>
+              <a:t>j</a:t>
+            </a:r>
+            <a:r>
+              <a:rPr lang="en-US" altLang="en-US" sz="800" i="1">
+                <a:latin typeface="Times New Roman" panose="02020603050405020304" charset="0"/>
+                <a:cs typeface="Times New Roman" panose="02020603050405020304" charset="0"/>
+              </a:rPr>
+              <a:t>←</a:t>
+            </a:r>
+            <a:r>
+              <a:rPr lang="en-US" altLang="zh-CN" sz="800" i="1">
+                <a:latin typeface="Times New Roman" panose="02020603050405020304" charset="0"/>
+                <a:cs typeface="Times New Roman" panose="02020603050405020304" charset="0"/>
+              </a:rPr>
+              <a:t> </a:t>
+            </a:r>
+            <a:r>
+              <a:rPr lang="en-US" sz="800" i="1">
+                <a:latin typeface="Times New Roman" panose="02020603050405020304" charset="0"/>
+                <a:cs typeface="Times New Roman" panose="02020603050405020304" charset="0"/>
+              </a:rPr>
+              <a:t>j</a:t>
+            </a:r>
+            <a:r>
+              <a:rPr lang="en-US" altLang="zh-CN" sz="800" i="1">
+                <a:latin typeface="Times New Roman" panose="02020603050405020304" charset="0"/>
+                <a:cs typeface="Times New Roman" panose="02020603050405020304" charset="0"/>
+              </a:rPr>
+              <a:t>+ 1 </a:t>
+            </a:r>
+            <a:endParaRPr lang="en-US" altLang="zh-CN" sz="800" i="1">
+              <a:latin typeface="Times New Roman" panose="02020603050405020304" charset="0"/>
+              <a:cs typeface="Times New Roman" panose="02020603050405020304" charset="0"/>
+            </a:endParaRPr>
+          </a:p>
+          <a:p>
+            <a:r>
+              <a:rPr lang="en-US" altLang="zh-CN" sz="800" i="1">
+                <a:latin typeface="Times New Roman" panose="02020603050405020304" charset="0"/>
+                <a:cs typeface="Times New Roman" panose="02020603050405020304" charset="0"/>
+              </a:rPr>
+              <a:t>8: end for </a:t>
+            </a:r>
+            <a:endParaRPr lang="zh-CN" altLang="en-US" sz="800" i="1">
+              <a:latin typeface="Times New Roman" panose="02020603050405020304" charset="0"/>
+              <a:cs typeface="Times New Roman" panose="02020603050405020304" charset="0"/>
+            </a:endParaRPr>
+          </a:p>
+        </p:txBody>
+      </p:sp>
+      <p:sp>
+        <p:nvSpPr>
+          <p:cNvPr id="7" name="圆角矩形 6"/>
+          <p:cNvSpPr/>
+          <p:nvPr>
+            <p:custDataLst>
+              <p:tags r:id="rId2"/>
+            </p:custDataLst>
+          </p:nvPr>
+        </p:nvSpPr>
+        <p:spPr>
+          <a:xfrm>
+            <a:off x="2131695" y="607695"/>
+            <a:ext cx="1892935" cy="2869565"/>
+          </a:xfrm>
+          <a:prstGeom prst="roundRect">
+            <a:avLst>
+              <a:gd name="adj" fmla="val 4082"/>
+            </a:avLst>
+          </a:prstGeom>
+          <a:solidFill>
+            <a:srgbClr val="F8EFFF"/>
+          </a:solidFill>
+          <a:ln>
+            <a:solidFill>
+              <a:schemeClr val="accent6">
+                <a:lumMod val="20000"/>
+                <a:lumOff val="80000"/>
+              </a:schemeClr>
+            </a:solidFill>
+          </a:ln>
+        </p:spPr>
+        <p:style>
+          <a:lnRef idx="2">
+            <a:schemeClr val="accent1">
+              <a:lumMod val="75000"/>
+            </a:schemeClr>
+          </a:lnRef>
+          <a:fillRef idx="1">
+            <a:schemeClr val="accent1"/>
+          </a:fillRef>
+          <a:effectRef idx="0">
+            <a:srgbClr val="FFFFFF"/>
+          </a:effectRef>
+          <a:fontRef idx="minor">
+            <a:schemeClr val="lt1"/>
+          </a:fontRef>
+        </p:style>
+        <p:txBody>
+          <a:bodyPr rtlCol="0" anchor="ctr"/>
+          <a:p>
+            <a:pPr algn="ctr"/>
+            <a:endParaRPr lang="zh-CN" altLang="en-US"/>
+          </a:p>
+        </p:txBody>
+      </p:sp>
+      <p:sp>
+        <p:nvSpPr>
+          <p:cNvPr id="11" name="文本框 10"/>
+          <p:cNvSpPr txBox="1"/>
+          <p:nvPr>
+            <p:custDataLst>
+              <p:tags r:id="rId3"/>
+            </p:custDataLst>
+          </p:nvPr>
+        </p:nvSpPr>
+        <p:spPr>
+          <a:xfrm>
+            <a:off x="2656840" y="676910"/>
+            <a:ext cx="1410335" cy="275590"/>
+          </a:xfrm>
+          <a:prstGeom prst="rect">
+            <a:avLst/>
+          </a:prstGeom>
+          <a:noFill/>
+        </p:spPr>
+        <p:txBody>
+          <a:bodyPr wrap="square" rtlCol="0">
+            <a:spAutoFit/>
+          </a:bodyPr>
+          <a:p>
+            <a:r>
+              <a:rPr lang="en-US" altLang="zh-CN" sz="1200" u="sng">
+                <a:latin typeface="Times New Roman" panose="02020603050405020304" charset="0"/>
+                <a:cs typeface="Times New Roman" panose="02020603050405020304" charset="0"/>
+              </a:rPr>
+              <a:t>Spec2IR Agent</a:t>
+            </a:r>
+            <a:endParaRPr lang="en-US" altLang="zh-CN" sz="1200" u="sng">
+              <a:latin typeface="Times New Roman" panose="02020603050405020304" charset="0"/>
+              <a:cs typeface="Times New Roman" panose="02020603050405020304" charset="0"/>
+            </a:endParaRPr>
+          </a:p>
+        </p:txBody>
+      </p:sp>
+      <p:pic>
+        <p:nvPicPr>
+          <p:cNvPr id="22" name="图片 21"/>
+          <p:cNvPicPr>
+            <a:picLocks noChangeAspect="1"/>
+          </p:cNvPicPr>
+          <p:nvPr>
+            <p:custDataLst>
+              <p:tags r:id="rId4"/>
+            </p:custDataLst>
+          </p:nvPr>
+        </p:nvPicPr>
+        <p:blipFill>
+          <a:blip r:embed="rId5"/>
+          <a:stretch>
+            <a:fillRect/>
+          </a:stretch>
+        </p:blipFill>
+        <p:spPr>
+          <a:xfrm>
+            <a:off x="2263140" y="701675"/>
+            <a:ext cx="393700" cy="226695"/>
+          </a:xfrm>
+          <a:prstGeom prst="rect">
+            <a:avLst/>
+          </a:prstGeom>
+        </p:spPr>
+      </p:pic>
+      <p:sp>
+        <p:nvSpPr>
+          <p:cNvPr id="39" name="矩形 38"/>
+          <p:cNvSpPr/>
+          <p:nvPr>
+            <p:custDataLst>
+              <p:tags r:id="rId6"/>
+            </p:custDataLst>
+          </p:nvPr>
+        </p:nvSpPr>
+        <p:spPr>
+          <a:xfrm>
+            <a:off x="2263140" y="1139825"/>
+            <a:ext cx="1624330" cy="708025"/>
+          </a:xfrm>
+          <a:prstGeom prst="rect">
+            <a:avLst/>
+          </a:prstGeom>
+          <a:solidFill>
+            <a:schemeClr val="bg1"/>
+          </a:solidFill>
+          <a:ln>
+            <a:solidFill>
+              <a:schemeClr val="tx1"/>
+            </a:solidFill>
+          </a:ln>
+        </p:spPr>
+        <p:style>
+          <a:lnRef idx="2">
+            <a:schemeClr val="accent1">
+              <a:lumMod val="75000"/>
+            </a:schemeClr>
+          </a:lnRef>
+          <a:fillRef idx="1">
+            <a:schemeClr val="accent1"/>
+          </a:fillRef>
+          <a:effectRef idx="0">
+            <a:srgbClr val="FFFFFF"/>
+          </a:effectRef>
+          <a:fontRef idx="minor">
+            <a:schemeClr val="lt1"/>
+          </a:fontRef>
+        </p:style>
+        <p:txBody>
+          <a:bodyPr rtlCol="0" anchor="ctr"/>
+          <a:p>
+            <a:pPr algn="ctr"/>
+            <a:endParaRPr lang="zh-CN" altLang="en-US"/>
+          </a:p>
+        </p:txBody>
+      </p:sp>
+      <p:grpSp>
+        <p:nvGrpSpPr>
+          <p:cNvPr id="40" name="组合 39"/>
+          <p:cNvGrpSpPr/>
+          <p:nvPr/>
+        </p:nvGrpSpPr>
+        <p:grpSpPr>
+          <a:xfrm rot="0">
+            <a:off x="2481580" y="1215390"/>
+            <a:ext cx="1188085" cy="418465"/>
+            <a:chOff x="3914" y="1016"/>
+            <a:chExt cx="7486" cy="2602"/>
+          </a:xfrm>
+        </p:grpSpPr>
+        <p:pic>
+          <p:nvPicPr>
+            <p:cNvPr id="41" name="图片 40" descr="file-pdf"/>
+            <p:cNvPicPr>
+              <a:picLocks noChangeAspect="1"/>
+            </p:cNvPicPr>
+            <p:nvPr>
+              <p:custDataLst>
+                <p:tags r:id="rId7"/>
+              </p:custDataLst>
+            </p:nvPr>
+          </p:nvPicPr>
+          <p:blipFill>
+            <a:blip r:embed="rId8">
+              <a:extLst>
+                <a:ext uri="{96DAC541-7B7A-43D3-8B79-37D633B846F1}">
+                  <asvg:svgBlip xmlns:asvg="http://schemas.microsoft.com/office/drawing/2016/SVG/main" r:embed="rId9"/>
+                </a:ext>
+              </a:extLst>
+            </a:blip>
+            <a:stretch>
+              <a:fillRect/>
+            </a:stretch>
+          </p:blipFill>
+          <p:spPr>
+            <a:xfrm>
+              <a:off x="3914" y="1016"/>
+              <a:ext cx="2603" cy="2603"/>
+            </a:xfrm>
+            <a:prstGeom prst="rect">
+              <a:avLst/>
+            </a:prstGeom>
+          </p:spPr>
+        </p:pic>
+        <p:pic>
+          <p:nvPicPr>
+            <p:cNvPr id="42" name="图片 41" descr="DOC"/>
+            <p:cNvPicPr>
+              <a:picLocks noChangeAspect="1"/>
+            </p:cNvPicPr>
+            <p:nvPr>
+              <p:custDataLst>
+                <p:tags r:id="rId10"/>
+              </p:custDataLst>
+            </p:nvPr>
+          </p:nvPicPr>
+          <p:blipFill>
+            <a:blip r:embed="rId11">
+              <a:extLst>
+                <a:ext uri="{96DAC541-7B7A-43D3-8B79-37D633B846F1}">
+                  <asvg:svgBlip xmlns:asvg="http://schemas.microsoft.com/office/drawing/2016/SVG/main" r:embed="rId12"/>
+                </a:ext>
+              </a:extLst>
+            </a:blip>
+            <a:stretch>
+              <a:fillRect/>
+            </a:stretch>
+          </p:blipFill>
+          <p:spPr>
+            <a:xfrm>
+              <a:off x="8846" y="1040"/>
+              <a:ext cx="2555" cy="2555"/>
+            </a:xfrm>
+            <a:prstGeom prst="rect">
+              <a:avLst/>
+            </a:prstGeom>
+          </p:spPr>
+        </p:pic>
+      </p:grpSp>
+      <p:sp>
+        <p:nvSpPr>
+          <p:cNvPr id="43" name="文本框 42"/>
+          <p:cNvSpPr txBox="1"/>
+          <p:nvPr>
+            <p:custDataLst>
+              <p:tags r:id="rId13"/>
+            </p:custDataLst>
+          </p:nvPr>
+        </p:nvSpPr>
+        <p:spPr>
+          <a:xfrm>
+            <a:off x="2263140" y="1633855"/>
+            <a:ext cx="1624965" cy="213995"/>
+          </a:xfrm>
+          <a:prstGeom prst="rect">
+            <a:avLst/>
+          </a:prstGeom>
+          <a:noFill/>
+        </p:spPr>
+        <p:txBody>
+          <a:bodyPr wrap="square" rtlCol="0">
+            <a:spAutoFit/>
+          </a:bodyPr>
+          <a:p>
+            <a:pPr algn="ctr"/>
+            <a:r>
+              <a:rPr lang="en-US" altLang="zh-CN" sz="800">
+                <a:latin typeface="Times New Roman" panose="02020603050405020304" charset="0"/>
+                <a:cs typeface="Times New Roman" panose="02020603050405020304" charset="0"/>
+              </a:rPr>
+              <a:t>Standard Specification Document</a:t>
+            </a:r>
+            <a:endParaRPr lang="en-US" altLang="zh-CN" sz="800">
+              <a:latin typeface="Times New Roman" panose="02020603050405020304" charset="0"/>
+              <a:cs typeface="Times New Roman" panose="02020603050405020304" charset="0"/>
+            </a:endParaRPr>
+          </a:p>
+        </p:txBody>
+      </p:sp>
+      <p:sp>
+        <p:nvSpPr>
+          <p:cNvPr id="45" name="矩形 44"/>
+          <p:cNvSpPr/>
+          <p:nvPr>
+            <p:custDataLst>
+              <p:tags r:id="rId14"/>
+            </p:custDataLst>
+          </p:nvPr>
+        </p:nvSpPr>
+        <p:spPr>
+          <a:xfrm>
+            <a:off x="2263775" y="2209800"/>
+            <a:ext cx="1624330" cy="708025"/>
+          </a:xfrm>
+          <a:prstGeom prst="rect">
+            <a:avLst/>
+          </a:prstGeom>
+          <a:solidFill>
+            <a:schemeClr val="bg1"/>
+          </a:solidFill>
+          <a:ln>
+            <a:solidFill>
+              <a:schemeClr val="tx1"/>
+            </a:solidFill>
+          </a:ln>
+        </p:spPr>
+        <p:style>
+          <a:lnRef idx="2">
+            <a:schemeClr val="accent1">
+              <a:lumMod val="75000"/>
+            </a:schemeClr>
+          </a:lnRef>
+          <a:fillRef idx="1">
+            <a:schemeClr val="accent1"/>
+          </a:fillRef>
+          <a:effectRef idx="0">
+            <a:srgbClr val="FFFFFF"/>
+          </a:effectRef>
+          <a:fontRef idx="minor">
+            <a:schemeClr val="lt1"/>
+          </a:fontRef>
+        </p:style>
+        <p:txBody>
+          <a:bodyPr rtlCol="0" anchor="ctr"/>
+          <a:p>
+            <a:pPr algn="ctr"/>
+            <a:endParaRPr lang="zh-CN" altLang="en-US"/>
+          </a:p>
+        </p:txBody>
+      </p:sp>
+      <p:sp>
+        <p:nvSpPr>
+          <p:cNvPr id="46" name="文本框 45"/>
+          <p:cNvSpPr txBox="1"/>
+          <p:nvPr>
+            <p:custDataLst>
+              <p:tags r:id="rId15"/>
+            </p:custDataLst>
+          </p:nvPr>
+        </p:nvSpPr>
+        <p:spPr>
+          <a:xfrm>
+            <a:off x="2263775" y="2703830"/>
+            <a:ext cx="1624965" cy="213995"/>
+          </a:xfrm>
+          <a:prstGeom prst="rect">
+            <a:avLst/>
+          </a:prstGeom>
+          <a:noFill/>
+        </p:spPr>
+        <p:txBody>
+          <a:bodyPr wrap="square" rtlCol="0">
+            <a:spAutoFit/>
+          </a:bodyPr>
+          <a:p>
+            <a:pPr algn="ctr"/>
+            <a:r>
+              <a:rPr lang="en-US" altLang="zh-CN" sz="800">
+                <a:latin typeface="Times New Roman" panose="02020603050405020304" charset="0"/>
+                <a:cs typeface="Times New Roman" panose="02020603050405020304" charset="0"/>
+              </a:rPr>
+              <a:t>Intermediate Representation </a:t>
+            </a:r>
+            <a:r>
+              <a:rPr lang="en-US" altLang="zh-CN" sz="800">
+                <a:latin typeface="Times New Roman" panose="02020603050405020304" charset="0"/>
+                <a:cs typeface="Times New Roman" panose="02020603050405020304" charset="0"/>
+              </a:rPr>
+              <a:t>Json</a:t>
+            </a:r>
+            <a:endParaRPr lang="en-US" altLang="zh-CN" sz="800">
+              <a:latin typeface="Times New Roman" panose="02020603050405020304" charset="0"/>
+              <a:cs typeface="Times New Roman" panose="02020603050405020304" charset="0"/>
+            </a:endParaRPr>
+          </a:p>
+        </p:txBody>
+      </p:sp>
+      <p:grpSp>
+        <p:nvGrpSpPr>
+          <p:cNvPr id="47" name="组合 46"/>
+          <p:cNvGrpSpPr/>
+          <p:nvPr/>
+        </p:nvGrpSpPr>
+        <p:grpSpPr>
+          <a:xfrm rot="0">
+            <a:off x="2576195" y="2249170"/>
+            <a:ext cx="951865" cy="421640"/>
+            <a:chOff x="11138" y="1583"/>
+            <a:chExt cx="1499" cy="664"/>
+          </a:xfrm>
+        </p:grpSpPr>
+        <p:pic>
+          <p:nvPicPr>
+            <p:cNvPr id="48" name="图片 47" descr="json输出"/>
+            <p:cNvPicPr>
+              <a:picLocks noChangeAspect="1"/>
+            </p:cNvPicPr>
+            <p:nvPr>
+              <p:custDataLst>
+                <p:tags r:id="rId16"/>
+              </p:custDataLst>
+            </p:nvPr>
+          </p:nvPicPr>
+          <p:blipFill>
+            <a:blip r:embed="rId17">
+              <a:extLst>
+                <a:ext uri="{96DAC541-7B7A-43D3-8B79-37D633B846F1}">
+                  <asvg:svgBlip xmlns:asvg="http://schemas.microsoft.com/office/drawing/2016/SVG/main" r:embed="rId18"/>
+                </a:ext>
+              </a:extLst>
+            </a:blip>
+            <a:stretch>
+              <a:fillRect/>
+            </a:stretch>
+          </p:blipFill>
+          <p:spPr>
+            <a:xfrm>
+              <a:off x="11138" y="1632"/>
+              <a:ext cx="528" cy="528"/>
+            </a:xfrm>
+            <a:prstGeom prst="rect">
+              <a:avLst/>
+            </a:prstGeom>
+          </p:spPr>
+        </p:pic>
+        <p:pic>
+          <p:nvPicPr>
+            <p:cNvPr id="49" name="图片 48" descr="jsonSchema"/>
+            <p:cNvPicPr>
+              <a:picLocks noChangeAspect="1"/>
+            </p:cNvPicPr>
+            <p:nvPr>
+              <p:custDataLst>
+                <p:tags r:id="rId19"/>
+              </p:custDataLst>
+            </p:nvPr>
+          </p:nvPicPr>
+          <p:blipFill>
+            <a:blip r:embed="rId20">
+              <a:extLst>
+                <a:ext uri="{96DAC541-7B7A-43D3-8B79-37D633B846F1}">
+                  <asvg:svgBlip xmlns:asvg="http://schemas.microsoft.com/office/drawing/2016/SVG/main" r:embed="rId21"/>
+                </a:ext>
+              </a:extLst>
+            </a:blip>
+            <a:stretch>
+              <a:fillRect/>
+            </a:stretch>
+          </p:blipFill>
+          <p:spPr>
+            <a:xfrm>
+              <a:off x="11973" y="1583"/>
+              <a:ext cx="664" cy="664"/>
+            </a:xfrm>
+            <a:prstGeom prst="rect">
+              <a:avLst/>
+            </a:prstGeom>
+          </p:spPr>
+        </p:pic>
+      </p:grpSp>
+      <p:cxnSp>
+        <p:nvCxnSpPr>
+          <p:cNvPr id="50" name="直接箭头连接符 49"/>
+          <p:cNvCxnSpPr/>
+          <p:nvPr>
+            <p:custDataLst>
+              <p:tags r:id="rId22"/>
+            </p:custDataLst>
+          </p:nvPr>
+        </p:nvCxnSpPr>
+        <p:spPr>
+          <a:xfrm>
+            <a:off x="3075305" y="1847850"/>
+            <a:ext cx="6350" cy="361950"/>
+          </a:xfrm>
+          <a:prstGeom prst="straightConnector1">
+            <a:avLst/>
+          </a:prstGeom>
+          <a:ln w="15875">
+            <a:solidFill>
+              <a:schemeClr val="tx1"/>
+            </a:solidFill>
+            <a:tailEnd type="arrow"/>
+          </a:ln>
+        </p:spPr>
+        <p:style>
+          <a:lnRef idx="2">
+            <a:schemeClr val="accent1"/>
+          </a:lnRef>
+          <a:fillRef idx="0">
+            <a:srgbClr val="FFFFFF"/>
+          </a:fillRef>
+          <a:effectRef idx="0">
+            <a:srgbClr val="FFFFFF"/>
+          </a:effectRef>
+          <a:fontRef idx="minor">
+            <a:schemeClr val="tx1"/>
+          </a:fontRef>
+        </p:style>
+      </p:cxnSp>
+      <p:sp>
+        <p:nvSpPr>
+          <p:cNvPr id="8" name="圆角矩形 7"/>
+          <p:cNvSpPr/>
+          <p:nvPr/>
+        </p:nvSpPr>
+        <p:spPr>
+          <a:xfrm>
+            <a:off x="4317365" y="637540"/>
+            <a:ext cx="1893570" cy="2839720"/>
+          </a:xfrm>
+          <a:prstGeom prst="roundRect">
+            <a:avLst>
+              <a:gd name="adj" fmla="val 6812"/>
+            </a:avLst>
+          </a:prstGeom>
+          <a:solidFill>
+            <a:srgbClr val="DEEFFE"/>
+          </a:solidFill>
+          <a:ln>
+            <a:solidFill>
+              <a:schemeClr val="accent1">
+                <a:lumMod val="60000"/>
+                <a:lumOff val="40000"/>
+              </a:schemeClr>
+            </a:solidFill>
+          </a:ln>
+        </p:spPr>
+        <p:style>
+          <a:lnRef idx="2">
+            <a:schemeClr val="accent1">
+              <a:lumMod val="75000"/>
+            </a:schemeClr>
+          </a:lnRef>
+          <a:fillRef idx="1">
+            <a:schemeClr val="accent1"/>
+          </a:fillRef>
+          <a:effectRef idx="0">
+            <a:srgbClr val="FFFFFF"/>
+          </a:effectRef>
+          <a:fontRef idx="minor">
+            <a:schemeClr val="lt1"/>
+          </a:fontRef>
+        </p:style>
+        <p:txBody>
+          <a:bodyPr rtlCol="0" anchor="ctr"/>
+          <a:p>
+            <a:pPr algn="ctr"/>
+            <a:endParaRPr lang="zh-CN" altLang="en-US"/>
+          </a:p>
+        </p:txBody>
+      </p:sp>
+      <p:sp>
+        <p:nvSpPr>
+          <p:cNvPr id="12" name="文本框 11"/>
+          <p:cNvSpPr txBox="1"/>
+          <p:nvPr>
+            <p:custDataLst>
+              <p:tags r:id="rId23"/>
+            </p:custDataLst>
+          </p:nvPr>
+        </p:nvSpPr>
+        <p:spPr>
+          <a:xfrm>
+            <a:off x="4799330" y="690880"/>
+            <a:ext cx="1828165" cy="275590"/>
+          </a:xfrm>
+          <a:prstGeom prst="rect">
+            <a:avLst/>
+          </a:prstGeom>
+          <a:noFill/>
+        </p:spPr>
+        <p:txBody>
+          <a:bodyPr wrap="square" rtlCol="0">
+            <a:spAutoFit/>
+          </a:bodyPr>
+          <a:p>
+            <a:r>
+              <a:rPr lang="en-US" altLang="zh-CN" sz="1200" u="sng">
+                <a:latin typeface="Times New Roman" panose="02020603050405020304" charset="0"/>
+                <a:cs typeface="Times New Roman" panose="02020603050405020304" charset="0"/>
+              </a:rPr>
+              <a:t>IR2Cryptol Agent</a:t>
+            </a:r>
+            <a:endParaRPr lang="en-US" altLang="zh-CN" sz="1200" u="sng">
+              <a:latin typeface="Times New Roman" panose="02020603050405020304" charset="0"/>
+              <a:cs typeface="Times New Roman" panose="02020603050405020304" charset="0"/>
+            </a:endParaRPr>
+          </a:p>
+        </p:txBody>
+      </p:sp>
+      <p:pic>
+        <p:nvPicPr>
+          <p:cNvPr id="19" name="图片 18"/>
+          <p:cNvPicPr>
+            <a:picLocks noChangeAspect="1"/>
+          </p:cNvPicPr>
+          <p:nvPr>
+            <p:custDataLst>
+              <p:tags r:id="rId24"/>
+            </p:custDataLst>
+          </p:nvPr>
+        </p:nvPicPr>
+        <p:blipFill>
+          <a:blip r:embed="rId25"/>
+          <a:stretch>
+            <a:fillRect/>
+          </a:stretch>
+        </p:blipFill>
+        <p:spPr>
+          <a:xfrm>
+            <a:off x="4337685" y="718185"/>
+            <a:ext cx="426720" cy="279400"/>
+          </a:xfrm>
+          <a:prstGeom prst="rect">
+            <a:avLst/>
+          </a:prstGeom>
+        </p:spPr>
+      </p:pic>
+      <p:sp>
+        <p:nvSpPr>
+          <p:cNvPr id="2" name="矩形 1"/>
+          <p:cNvSpPr/>
+          <p:nvPr>
+            <p:custDataLst>
+              <p:tags r:id="rId26"/>
+            </p:custDataLst>
+          </p:nvPr>
+        </p:nvSpPr>
+        <p:spPr>
+          <a:xfrm>
+            <a:off x="4449445" y="1174750"/>
+            <a:ext cx="1624330" cy="708025"/>
+          </a:xfrm>
+          <a:prstGeom prst="rect">
+            <a:avLst/>
+          </a:prstGeom>
+          <a:solidFill>
+            <a:schemeClr val="bg1"/>
+          </a:solidFill>
+          <a:ln>
+            <a:solidFill>
+              <a:schemeClr val="tx1"/>
+            </a:solidFill>
+          </a:ln>
+        </p:spPr>
+        <p:style>
+          <a:lnRef idx="2">
+            <a:schemeClr val="accent1">
+              <a:lumMod val="75000"/>
+            </a:schemeClr>
+          </a:lnRef>
+          <a:fillRef idx="1">
+            <a:schemeClr val="accent1"/>
+          </a:fillRef>
+          <a:effectRef idx="0">
+            <a:srgbClr val="FFFFFF"/>
+          </a:effectRef>
+          <a:fontRef idx="minor">
+            <a:schemeClr val="lt1"/>
+          </a:fontRef>
+        </p:style>
+        <p:txBody>
+          <a:bodyPr rtlCol="0" anchor="ctr"/>
+          <a:p>
+            <a:pPr algn="ctr"/>
+            <a:endParaRPr lang="zh-CN" altLang="en-US"/>
+          </a:p>
+        </p:txBody>
+      </p:sp>
+      <p:pic>
+        <p:nvPicPr>
+          <p:cNvPr id="4" name="图片 3" descr="json输入"/>
+          <p:cNvPicPr>
+            <a:picLocks noChangeAspect="1"/>
+          </p:cNvPicPr>
+          <p:nvPr>
+            <p:custDataLst>
+              <p:tags r:id="rId27"/>
+            </p:custDataLst>
+          </p:nvPr>
+        </p:nvPicPr>
+        <p:blipFill>
+          <a:blip r:embed="rId28">
+            <a:extLst>
+              <a:ext uri="{96DAC541-7B7A-43D3-8B79-37D633B846F1}">
+                <asvg:svgBlip xmlns:asvg="http://schemas.microsoft.com/office/drawing/2016/SVG/main" r:embed="rId29"/>
+              </a:ext>
+            </a:extLst>
+          </a:blip>
+          <a:stretch>
+            <a:fillRect/>
+          </a:stretch>
+        </p:blipFill>
+        <p:spPr>
+          <a:xfrm>
+            <a:off x="5071110" y="1249680"/>
+            <a:ext cx="381000" cy="381000"/>
+          </a:xfrm>
+          <a:prstGeom prst="rect">
+            <a:avLst/>
+          </a:prstGeom>
+        </p:spPr>
+      </p:pic>
+      <p:sp>
+        <p:nvSpPr>
+          <p:cNvPr id="10" name="文本框 9"/>
+          <p:cNvSpPr txBox="1"/>
+          <p:nvPr>
+            <p:custDataLst>
+              <p:tags r:id="rId30"/>
+            </p:custDataLst>
+          </p:nvPr>
+        </p:nvSpPr>
+        <p:spPr>
+          <a:xfrm>
+            <a:off x="4873625" y="1668780"/>
+            <a:ext cx="775335" cy="213995"/>
+          </a:xfrm>
+          <a:prstGeom prst="rect">
+            <a:avLst/>
+          </a:prstGeom>
+          <a:noFill/>
+        </p:spPr>
+        <p:txBody>
+          <a:bodyPr wrap="square" rtlCol="0">
+            <a:spAutoFit/>
+          </a:bodyPr>
+          <a:p>
+            <a:pPr algn="ctr"/>
+            <a:r>
+              <a:rPr lang="en-US" altLang="zh-CN" sz="800">
+                <a:latin typeface="Times New Roman" panose="02020603050405020304" charset="0"/>
+                <a:cs typeface="Times New Roman" panose="02020603050405020304" charset="0"/>
+              </a:rPr>
+              <a:t>Retrieved IR</a:t>
+            </a:r>
+            <a:endParaRPr lang="en-US" altLang="zh-CN" sz="800">
+              <a:latin typeface="Times New Roman" panose="02020603050405020304" charset="0"/>
+              <a:cs typeface="Times New Roman" panose="02020603050405020304" charset="0"/>
+            </a:endParaRPr>
+          </a:p>
+        </p:txBody>
+      </p:sp>
+      <p:sp>
+        <p:nvSpPr>
+          <p:cNvPr id="5" name="矩形 4"/>
+          <p:cNvSpPr/>
+          <p:nvPr/>
+        </p:nvSpPr>
+        <p:spPr>
+          <a:xfrm>
+            <a:off x="4448810" y="2218690"/>
+            <a:ext cx="1625600" cy="708025"/>
+          </a:xfrm>
+          <a:prstGeom prst="rect">
+            <a:avLst/>
+          </a:prstGeom>
+          <a:solidFill>
+            <a:schemeClr val="bg1"/>
+          </a:solidFill>
+          <a:ln>
+            <a:solidFill>
+              <a:schemeClr val="tx1"/>
+            </a:solidFill>
+          </a:ln>
+        </p:spPr>
+        <p:style>
+          <a:lnRef idx="2">
+            <a:schemeClr val="accent1">
+              <a:lumMod val="75000"/>
+            </a:schemeClr>
+          </a:lnRef>
+          <a:fillRef idx="1">
+            <a:schemeClr val="accent1"/>
+          </a:fillRef>
+          <a:effectRef idx="0">
+            <a:srgbClr val="FFFFFF"/>
+          </a:effectRef>
+          <a:fontRef idx="minor">
+            <a:schemeClr val="lt1"/>
+          </a:fontRef>
+        </p:style>
+        <p:txBody>
+          <a:bodyPr rtlCol="0" anchor="ctr"/>
+          <a:p>
+            <a:pPr algn="ctr"/>
+            <a:endParaRPr lang="zh-CN" altLang="en-US"/>
+          </a:p>
+        </p:txBody>
+      </p:sp>
+      <p:sp>
+        <p:nvSpPr>
+          <p:cNvPr id="15" name="文本框 14"/>
+          <p:cNvSpPr txBox="1"/>
+          <p:nvPr/>
+        </p:nvSpPr>
+        <p:spPr>
+          <a:xfrm>
+            <a:off x="4448810" y="2710180"/>
+            <a:ext cx="1625600" cy="213995"/>
+          </a:xfrm>
+          <a:prstGeom prst="rect">
+            <a:avLst/>
+          </a:prstGeom>
+          <a:noFill/>
+        </p:spPr>
+        <p:txBody>
+          <a:bodyPr wrap="square" rtlCol="0">
+            <a:spAutoFit/>
+          </a:bodyPr>
+          <a:p>
+            <a:pPr algn="ctr"/>
+            <a:r>
+              <a:rPr lang="en-US" altLang="zh-CN" sz="800">
+                <a:latin typeface="Times New Roman" panose="02020603050405020304" charset="0"/>
+                <a:cs typeface="Times New Roman" panose="02020603050405020304" charset="0"/>
+              </a:rPr>
+              <a:t>Generated Cryptol </a:t>
+            </a:r>
+            <a:r>
+              <a:rPr lang="en-US" altLang="zh-CN" sz="800">
+                <a:latin typeface="Times New Roman" panose="02020603050405020304" charset="0"/>
+                <a:cs typeface="Times New Roman" panose="02020603050405020304" charset="0"/>
+              </a:rPr>
+              <a:t>Code</a:t>
+            </a:r>
+            <a:endParaRPr lang="en-US" altLang="zh-CN" sz="800">
+              <a:latin typeface="Times New Roman" panose="02020603050405020304" charset="0"/>
+              <a:cs typeface="Times New Roman" panose="02020603050405020304" charset="0"/>
+            </a:endParaRPr>
+          </a:p>
+        </p:txBody>
+      </p:sp>
+      <p:pic>
+        <p:nvPicPr>
+          <p:cNvPr id="16" name="图片 15" descr="代码文件"/>
+          <p:cNvPicPr>
+            <a:picLocks noChangeAspect="1"/>
+          </p:cNvPicPr>
+          <p:nvPr/>
+        </p:nvPicPr>
+        <p:blipFill>
+          <a:blip r:embed="rId31">
+            <a:extLst>
+              <a:ext uri="{96DAC541-7B7A-43D3-8B79-37D633B846F1}">
+                <asvg:svgBlip xmlns:asvg="http://schemas.microsoft.com/office/drawing/2016/SVG/main" r:embed="rId32"/>
+              </a:ext>
+            </a:extLst>
+          </a:blip>
+          <a:stretch>
+            <a:fillRect/>
+          </a:stretch>
+        </p:blipFill>
+        <p:spPr>
+          <a:xfrm>
+            <a:off x="5055870" y="2289175"/>
+            <a:ext cx="410845" cy="410845"/>
+          </a:xfrm>
+          <a:prstGeom prst="rect">
+            <a:avLst/>
+          </a:prstGeom>
+        </p:spPr>
+      </p:pic>
+      <p:cxnSp>
+        <p:nvCxnSpPr>
+          <p:cNvPr id="23" name="直接箭头连接符 22"/>
+          <p:cNvCxnSpPr>
+            <a:stCxn id="10" idx="2"/>
+            <a:endCxn id="5" idx="0"/>
+          </p:cNvCxnSpPr>
+          <p:nvPr/>
+        </p:nvCxnSpPr>
+        <p:spPr>
+          <a:xfrm>
+            <a:off x="5261610" y="1882775"/>
+            <a:ext cx="0" cy="335915"/>
+          </a:xfrm>
+          <a:prstGeom prst="straightConnector1">
+            <a:avLst/>
+          </a:prstGeom>
+          <a:ln w="15875">
+            <a:solidFill>
+              <a:srgbClr val="202020"/>
+            </a:solidFill>
+            <a:tailEnd type="arrow"/>
+          </a:ln>
+        </p:spPr>
+        <p:style>
+          <a:lnRef idx="2">
+            <a:schemeClr val="accent1"/>
+          </a:lnRef>
+          <a:fillRef idx="0">
+            <a:srgbClr val="FFFFFF"/>
+          </a:fillRef>
+          <a:effectRef idx="0">
+            <a:srgbClr val="FFFFFF"/>
+          </a:effectRef>
+          <a:fontRef idx="minor">
+            <a:schemeClr val="tx1"/>
+          </a:fontRef>
+        </p:style>
+      </p:cxnSp>
+      <p:sp>
+        <p:nvSpPr>
+          <p:cNvPr id="29" name="圆角矩形 28"/>
+          <p:cNvSpPr/>
+          <p:nvPr/>
+        </p:nvSpPr>
+        <p:spPr>
+          <a:xfrm>
+            <a:off x="6503670" y="636270"/>
+            <a:ext cx="2757805" cy="2840990"/>
+          </a:xfrm>
+          <a:prstGeom prst="roundRect">
+            <a:avLst>
+              <a:gd name="adj" fmla="val 5717"/>
+            </a:avLst>
+          </a:prstGeom>
+          <a:solidFill>
+            <a:srgbClr val="EDFAF2"/>
+          </a:solidFill>
+          <a:ln>
+            <a:solidFill>
+              <a:schemeClr val="accent4">
+                <a:lumMod val="40000"/>
+                <a:lumOff val="60000"/>
+              </a:schemeClr>
+            </a:solidFill>
+          </a:ln>
+        </p:spPr>
+        <p:style>
+          <a:lnRef idx="2">
+            <a:schemeClr val="accent1">
+              <a:lumMod val="75000"/>
+            </a:schemeClr>
+          </a:lnRef>
+          <a:fillRef idx="1">
+            <a:schemeClr val="accent1"/>
+          </a:fillRef>
+          <a:effectRef idx="0">
+            <a:srgbClr val="FFFFFF"/>
+          </a:effectRef>
+          <a:fontRef idx="minor">
+            <a:schemeClr val="lt1"/>
+          </a:fontRef>
+        </p:style>
+        <p:txBody>
+          <a:bodyPr rtlCol="0" anchor="ctr"/>
+          <a:p>
+            <a:pPr algn="ctr"/>
+            <a:endParaRPr lang="zh-CN" altLang="en-US"/>
+          </a:p>
+        </p:txBody>
+      </p:sp>
+      <p:sp>
+        <p:nvSpPr>
+          <p:cNvPr id="31" name="文本框 30"/>
+          <p:cNvSpPr txBox="1"/>
+          <p:nvPr/>
+        </p:nvSpPr>
+        <p:spPr>
+          <a:xfrm>
+            <a:off x="6618605" y="755015"/>
+            <a:ext cx="2756535" cy="306705"/>
+          </a:xfrm>
+          <a:prstGeom prst="rect">
+            <a:avLst/>
+          </a:prstGeom>
+          <a:noFill/>
+        </p:spPr>
+        <p:txBody>
+          <a:bodyPr wrap="square" rtlCol="0">
+            <a:spAutoFit/>
+          </a:bodyPr>
+          <a:p>
+            <a:pPr algn="ctr"/>
+            <a:r>
+              <a:rPr lang="en-US" altLang="zh-CN" sz="1400" u="sng">
+                <a:solidFill>
+                  <a:schemeClr val="tx1"/>
+                </a:solidFill>
+                <a:uFillTx/>
+                <a:latin typeface="Times New Roman" panose="02020603050405020304" charset="0"/>
+                <a:cs typeface="Times New Roman" panose="02020603050405020304" charset="0"/>
+              </a:rPr>
+              <a:t>Compilation &amp; Fixing Agent</a:t>
+            </a:r>
+            <a:endParaRPr lang="en-US" altLang="zh-CN" sz="1400" u="sng">
+              <a:solidFill>
+                <a:schemeClr val="tx1"/>
+              </a:solidFill>
+              <a:uFillTx/>
+              <a:latin typeface="Times New Roman" panose="02020603050405020304" charset="0"/>
+              <a:cs typeface="Times New Roman" panose="02020603050405020304" charset="0"/>
+            </a:endParaRPr>
+          </a:p>
+        </p:txBody>
+      </p:sp>
+      <p:pic>
+        <p:nvPicPr>
+          <p:cNvPr id="32" name="图片 31"/>
+          <p:cNvPicPr>
+            <a:picLocks noChangeAspect="1"/>
+          </p:cNvPicPr>
+          <p:nvPr/>
+        </p:nvPicPr>
+        <p:blipFill>
+          <a:blip r:embed="rId33"/>
+          <a:srcRect l="4270" t="1620" r="10331" b="13844"/>
+          <a:stretch>
+            <a:fillRect/>
+          </a:stretch>
+        </p:blipFill>
+        <p:spPr>
+          <a:xfrm>
+            <a:off x="6618605" y="767080"/>
+            <a:ext cx="318135" cy="294640"/>
+          </a:xfrm>
+          <a:prstGeom prst="rect">
+            <a:avLst/>
+          </a:prstGeom>
+        </p:spPr>
+      </p:pic>
+      <p:sp>
+        <p:nvSpPr>
+          <p:cNvPr id="34" name="矩形 33"/>
+          <p:cNvSpPr/>
+          <p:nvPr>
+            <p:custDataLst>
+              <p:tags r:id="rId34"/>
+            </p:custDataLst>
+          </p:nvPr>
+        </p:nvSpPr>
+        <p:spPr>
+          <a:xfrm>
+            <a:off x="7070725" y="2228850"/>
+            <a:ext cx="1624330" cy="668020"/>
+          </a:xfrm>
+          <a:prstGeom prst="rect">
+            <a:avLst/>
+          </a:prstGeom>
+          <a:solidFill>
+            <a:schemeClr val="bg1"/>
+          </a:solidFill>
+          <a:ln>
+            <a:solidFill>
+              <a:schemeClr val="tx1"/>
+            </a:solidFill>
+          </a:ln>
+        </p:spPr>
+        <p:style>
+          <a:lnRef idx="2">
+            <a:schemeClr val="accent1">
+              <a:lumMod val="75000"/>
+            </a:schemeClr>
+          </a:lnRef>
+          <a:fillRef idx="1">
+            <a:schemeClr val="accent1"/>
+          </a:fillRef>
+          <a:effectRef idx="0">
+            <a:srgbClr val="FFFFFF"/>
+          </a:effectRef>
+          <a:fontRef idx="minor">
+            <a:schemeClr val="lt1"/>
+          </a:fontRef>
+        </p:style>
+        <p:txBody>
+          <a:bodyPr rtlCol="0" anchor="ctr"/>
+          <a:p>
+            <a:pPr algn="ctr"/>
+            <a:endParaRPr lang="zh-CN" altLang="en-US"/>
+          </a:p>
+        </p:txBody>
+      </p:sp>
+      <p:sp>
+        <p:nvSpPr>
+          <p:cNvPr id="35" name="矩形 34"/>
+          <p:cNvSpPr/>
+          <p:nvPr>
+            <p:custDataLst>
+              <p:tags r:id="rId35"/>
+            </p:custDataLst>
+          </p:nvPr>
+        </p:nvSpPr>
+        <p:spPr>
+          <a:xfrm>
+            <a:off x="7070725" y="1144270"/>
+            <a:ext cx="1624330" cy="668020"/>
+          </a:xfrm>
+          <a:prstGeom prst="rect">
+            <a:avLst/>
+          </a:prstGeom>
+          <a:solidFill>
+            <a:schemeClr val="bg1"/>
+          </a:solidFill>
+          <a:ln>
+            <a:solidFill>
+              <a:schemeClr val="tx1"/>
+            </a:solidFill>
+          </a:ln>
+        </p:spPr>
+        <p:style>
+          <a:lnRef idx="2">
+            <a:schemeClr val="accent1">
+              <a:lumMod val="75000"/>
+            </a:schemeClr>
+          </a:lnRef>
+          <a:fillRef idx="1">
+            <a:schemeClr val="accent1"/>
+          </a:fillRef>
+          <a:effectRef idx="0">
+            <a:srgbClr val="FFFFFF"/>
+          </a:effectRef>
+          <a:fontRef idx="minor">
+            <a:schemeClr val="lt1"/>
+          </a:fontRef>
+        </p:style>
+        <p:txBody>
+          <a:bodyPr rtlCol="0" anchor="ctr"/>
+          <a:p>
+            <a:pPr algn="ctr"/>
+            <a:endParaRPr lang="zh-CN" altLang="en-US"/>
+          </a:p>
+        </p:txBody>
+      </p:sp>
+      <p:pic>
+        <p:nvPicPr>
+          <p:cNvPr id="36" name="图片 35"/>
+          <p:cNvPicPr>
+            <a:picLocks noChangeAspect="1"/>
+          </p:cNvPicPr>
+          <p:nvPr>
+            <p:custDataLst>
+              <p:tags r:id="rId36"/>
+            </p:custDataLst>
+          </p:nvPr>
+        </p:nvPicPr>
+        <p:blipFill>
+          <a:blip r:embed="rId37"/>
+          <a:stretch>
+            <a:fillRect/>
+          </a:stretch>
+        </p:blipFill>
+        <p:spPr>
+          <a:xfrm>
+            <a:off x="7702550" y="1245870"/>
+            <a:ext cx="381533" cy="360000"/>
+          </a:xfrm>
+          <a:prstGeom prst="rect">
+            <a:avLst/>
+          </a:prstGeom>
+        </p:spPr>
+      </p:pic>
+      <p:pic>
+        <p:nvPicPr>
+          <p:cNvPr id="37" name="图片 36"/>
+          <p:cNvPicPr>
+            <a:picLocks noChangeAspect="1"/>
+          </p:cNvPicPr>
+          <p:nvPr>
+            <p:custDataLst>
+              <p:tags r:id="rId38"/>
+            </p:custDataLst>
+          </p:nvPr>
+        </p:nvPicPr>
+        <p:blipFill>
+          <a:blip r:embed="rId39"/>
+          <a:stretch>
+            <a:fillRect/>
+          </a:stretch>
+        </p:blipFill>
+        <p:spPr>
+          <a:xfrm>
+            <a:off x="7702550" y="2254250"/>
+            <a:ext cx="381533" cy="360000"/>
+          </a:xfrm>
+          <a:prstGeom prst="rect">
+            <a:avLst/>
+          </a:prstGeom>
+        </p:spPr>
+      </p:pic>
+      <p:pic>
+        <p:nvPicPr>
+          <p:cNvPr id="52" name="图片 51"/>
+          <p:cNvPicPr>
+            <a:picLocks noChangeAspect="1"/>
+          </p:cNvPicPr>
+          <p:nvPr>
+            <p:custDataLst>
+              <p:tags r:id="rId40"/>
+            </p:custDataLst>
+          </p:nvPr>
+        </p:nvPicPr>
+        <p:blipFill>
+          <a:blip r:embed="rId41"/>
+          <a:stretch>
+            <a:fillRect/>
+          </a:stretch>
+        </p:blipFill>
+        <p:spPr>
+          <a:xfrm rot="5400000" flipH="1">
+            <a:off x="7712754" y="1840866"/>
+            <a:ext cx="339682" cy="360000"/>
+          </a:xfrm>
+          <a:prstGeom prst="rect">
+            <a:avLst/>
+          </a:prstGeom>
+        </p:spPr>
+      </p:pic>
+      <p:sp>
+        <p:nvSpPr>
+          <p:cNvPr id="53" name="文本框 52"/>
+          <p:cNvSpPr txBox="1"/>
+          <p:nvPr>
+            <p:custDataLst>
+              <p:tags r:id="rId42"/>
+            </p:custDataLst>
+          </p:nvPr>
+        </p:nvSpPr>
+        <p:spPr>
+          <a:xfrm>
+            <a:off x="7061200" y="1557020"/>
+            <a:ext cx="1624330" cy="245110"/>
+          </a:xfrm>
+          <a:prstGeom prst="rect">
+            <a:avLst/>
+          </a:prstGeom>
+          <a:noFill/>
+        </p:spPr>
+        <p:txBody>
+          <a:bodyPr wrap="square" rtlCol="0">
+            <a:spAutoFit/>
+          </a:bodyPr>
+          <a:p>
+            <a:pPr algn="ctr"/>
+            <a:r>
+              <a:rPr lang="en-US" altLang="zh-CN" sz="1000">
+                <a:latin typeface="Times New Roman" panose="02020603050405020304" charset="0"/>
+                <a:cs typeface="Times New Roman" panose="02020603050405020304" charset="0"/>
+              </a:rPr>
+              <a:t>Iterative Compilation</a:t>
+            </a:r>
+            <a:endParaRPr lang="en-US" altLang="zh-CN" sz="1000">
+              <a:latin typeface="Times New Roman" panose="02020603050405020304" charset="0"/>
+              <a:cs typeface="Times New Roman" panose="02020603050405020304" charset="0"/>
+            </a:endParaRPr>
+          </a:p>
+        </p:txBody>
+      </p:sp>
+      <p:sp>
+        <p:nvSpPr>
+          <p:cNvPr id="54" name="文本框 53"/>
+          <p:cNvSpPr txBox="1"/>
+          <p:nvPr>
+            <p:custDataLst>
+              <p:tags r:id="rId43"/>
+            </p:custDataLst>
+          </p:nvPr>
+        </p:nvSpPr>
+        <p:spPr>
+          <a:xfrm>
+            <a:off x="7070725" y="2635885"/>
+            <a:ext cx="1623695" cy="245110"/>
+          </a:xfrm>
+          <a:prstGeom prst="rect">
+            <a:avLst/>
+          </a:prstGeom>
+          <a:noFill/>
+        </p:spPr>
+        <p:txBody>
+          <a:bodyPr wrap="square" rtlCol="0">
+            <a:spAutoFit/>
+          </a:bodyPr>
+          <a:p>
+            <a:pPr algn="ctr"/>
+            <a:r>
+              <a:rPr lang="en-US" altLang="zh-CN" sz="1000">
+                <a:latin typeface="Times New Roman" panose="02020603050405020304" charset="0"/>
+                <a:cs typeface="Times New Roman" panose="02020603050405020304" charset="0"/>
+              </a:rPr>
+              <a:t>Fixes Generated Code</a:t>
+            </a:r>
+            <a:endParaRPr lang="en-US" altLang="zh-CN" sz="1000">
+              <a:latin typeface="Times New Roman" panose="02020603050405020304" charset="0"/>
+              <a:cs typeface="Times New Roman" panose="02020603050405020304" charset="0"/>
+            </a:endParaRPr>
+          </a:p>
+        </p:txBody>
+      </p:sp>
+      <p:pic>
+        <p:nvPicPr>
+          <p:cNvPr id="57" name="图片 56"/>
+          <p:cNvPicPr>
+            <a:picLocks noChangeAspect="1"/>
+          </p:cNvPicPr>
+          <p:nvPr/>
+        </p:nvPicPr>
+        <p:blipFill>
+          <a:blip r:embed="rId44"/>
+          <a:stretch>
+            <a:fillRect/>
+          </a:stretch>
+        </p:blipFill>
+        <p:spPr>
+          <a:xfrm>
+            <a:off x="9631045" y="2896870"/>
+            <a:ext cx="297180" cy="297180"/>
+          </a:xfrm>
+          <a:prstGeom prst="rect">
+            <a:avLst/>
+          </a:prstGeom>
+        </p:spPr>
+      </p:pic>
+      <p:sp>
+        <p:nvSpPr>
+          <p:cNvPr id="58" name="文本框 57"/>
+          <p:cNvSpPr txBox="1"/>
+          <p:nvPr/>
+        </p:nvSpPr>
+        <p:spPr>
+          <a:xfrm>
+            <a:off x="513080" y="875665"/>
+            <a:ext cx="1047750" cy="368300"/>
+          </a:xfrm>
+          <a:prstGeom prst="rect">
+            <a:avLst/>
+          </a:prstGeom>
+          <a:noFill/>
+        </p:spPr>
+        <p:txBody>
+          <a:bodyPr wrap="square" rtlCol="0">
+            <a:spAutoFit/>
+          </a:bodyPr>
+          <a:p>
+            <a:pPr algn="ctr"/>
+            <a:r>
+              <a:rPr lang="en-US" altLang="zh-CN">
+                <a:latin typeface="Times New Roman" panose="02020603050405020304" charset="0"/>
+                <a:cs typeface="Times New Roman" panose="02020603050405020304" charset="0"/>
+              </a:rPr>
+              <a:t>Input</a:t>
+            </a:r>
+            <a:endParaRPr lang="en-US" altLang="zh-CN">
+              <a:latin typeface="Times New Roman" panose="02020603050405020304" charset="0"/>
+              <a:cs typeface="Times New Roman" panose="02020603050405020304" charset="0"/>
+            </a:endParaRPr>
+          </a:p>
+        </p:txBody>
+      </p:sp>
+      <p:sp>
+        <p:nvSpPr>
+          <p:cNvPr id="60" name="文本框 59"/>
+          <p:cNvSpPr txBox="1"/>
+          <p:nvPr/>
+        </p:nvSpPr>
+        <p:spPr>
+          <a:xfrm>
+            <a:off x="9627235" y="2374265"/>
+            <a:ext cx="1171575" cy="368300"/>
+          </a:xfrm>
+          <a:prstGeom prst="rect">
+            <a:avLst/>
+          </a:prstGeom>
+          <a:noFill/>
+        </p:spPr>
+        <p:txBody>
+          <a:bodyPr wrap="square" rtlCol="0">
+            <a:spAutoFit/>
+          </a:bodyPr>
+          <a:p>
+            <a:r>
+              <a:rPr lang="en-US" altLang="zh-CN">
+                <a:latin typeface="Times New Roman" panose="02020603050405020304" charset="0"/>
+                <a:cs typeface="Times New Roman" panose="02020603050405020304" charset="0"/>
+              </a:rPr>
+              <a:t>Output</a:t>
+            </a:r>
+            <a:endParaRPr lang="en-US" altLang="zh-CN">
+              <a:latin typeface="Times New Roman" panose="02020603050405020304" charset="0"/>
+              <a:cs typeface="Times New Roman" panose="02020603050405020304" charset="0"/>
+            </a:endParaRPr>
+          </a:p>
+        </p:txBody>
+      </p:sp>
+      <p:sp>
+        <p:nvSpPr>
+          <p:cNvPr id="61" name="文本框 60"/>
+          <p:cNvSpPr txBox="1"/>
+          <p:nvPr/>
+        </p:nvSpPr>
+        <p:spPr>
+          <a:xfrm>
+            <a:off x="9928225" y="2956560"/>
+            <a:ext cx="1764030" cy="245110"/>
+          </a:xfrm>
+          <a:prstGeom prst="rect">
+            <a:avLst/>
+          </a:prstGeom>
+          <a:noFill/>
+        </p:spPr>
+        <p:txBody>
+          <a:bodyPr wrap="square" rtlCol="0">
+            <a:spAutoFit/>
+          </a:bodyPr>
+          <a:p>
+            <a:r>
+              <a:rPr lang="en-US" altLang="zh-CN" sz="1000">
+                <a:latin typeface="Times New Roman" panose="02020603050405020304" charset="0"/>
+                <a:cs typeface="Times New Roman" panose="02020603050405020304" charset="0"/>
+              </a:rPr>
+              <a:t>Final Cryptol Code</a:t>
+            </a:r>
+            <a:endParaRPr lang="en-US" altLang="zh-CN" sz="1000">
+              <a:latin typeface="Times New Roman" panose="02020603050405020304" charset="0"/>
+              <a:cs typeface="Times New Roman" panose="02020603050405020304" charset="0"/>
+            </a:endParaRPr>
+          </a:p>
+        </p:txBody>
+      </p:sp>
+      <p:pic>
+        <p:nvPicPr>
+          <p:cNvPr id="9" name="图片 8"/>
+          <p:cNvPicPr>
+            <a:picLocks noChangeAspect="1"/>
+          </p:cNvPicPr>
+          <p:nvPr/>
+        </p:nvPicPr>
+        <p:blipFill>
+          <a:blip r:embed="rId45"/>
+          <a:stretch>
+            <a:fillRect/>
+          </a:stretch>
+        </p:blipFill>
+        <p:spPr>
+          <a:xfrm>
+            <a:off x="1838960" y="1940243"/>
+            <a:ext cx="292735" cy="292735"/>
+          </a:xfrm>
+          <a:prstGeom prst="rect">
+            <a:avLst/>
+          </a:prstGeom>
+        </p:spPr>
+      </p:pic>
+      <p:pic>
+        <p:nvPicPr>
+          <p:cNvPr id="13" name="图片 12"/>
+          <p:cNvPicPr>
+            <a:picLocks noChangeAspect="1"/>
+          </p:cNvPicPr>
+          <p:nvPr/>
+        </p:nvPicPr>
+        <p:blipFill>
+          <a:blip r:embed="rId45"/>
+          <a:stretch>
+            <a:fillRect/>
+          </a:stretch>
+        </p:blipFill>
+        <p:spPr>
+          <a:xfrm>
+            <a:off x="4024630" y="1940243"/>
+            <a:ext cx="292735" cy="292735"/>
+          </a:xfrm>
+          <a:prstGeom prst="rect">
+            <a:avLst/>
+          </a:prstGeom>
+        </p:spPr>
+      </p:pic>
+      <p:pic>
+        <p:nvPicPr>
+          <p:cNvPr id="20" name="图片 19"/>
+          <p:cNvPicPr>
+            <a:picLocks noChangeAspect="1"/>
+          </p:cNvPicPr>
+          <p:nvPr/>
+        </p:nvPicPr>
+        <p:blipFill>
+          <a:blip r:embed="rId45"/>
+          <a:stretch>
+            <a:fillRect/>
+          </a:stretch>
+        </p:blipFill>
+        <p:spPr>
+          <a:xfrm>
+            <a:off x="6210935" y="1940243"/>
+            <a:ext cx="292735" cy="292735"/>
+          </a:xfrm>
+          <a:prstGeom prst="rect">
+            <a:avLst/>
+          </a:prstGeom>
+        </p:spPr>
+      </p:pic>
+      <p:pic>
+        <p:nvPicPr>
+          <p:cNvPr id="21" name="图片 20"/>
+          <p:cNvPicPr>
+            <a:picLocks noChangeAspect="1"/>
+          </p:cNvPicPr>
+          <p:nvPr/>
+        </p:nvPicPr>
+        <p:blipFill>
+          <a:blip r:embed="rId45"/>
+          <a:stretch>
+            <a:fillRect/>
+          </a:stretch>
+        </p:blipFill>
+        <p:spPr>
+          <a:xfrm>
+            <a:off x="9261475" y="2742565"/>
+            <a:ext cx="292735" cy="292735"/>
+          </a:xfrm>
+          <a:prstGeom prst="rect">
+            <a:avLst/>
+          </a:prstGeom>
+        </p:spPr>
+      </p:pic>
+    </p:spTree>
+  </p:cSld>
+  <p:clrMapOvr>
+    <a:masterClrMapping/>
+  </p:clrMapOvr>
+</p:sld>
+</file>
+
+<file path=ppt/slides/slide3.xml><?xml version="1.0" encoding="utf-8"?>
+<p:sld xmlns:a="http://schemas.openxmlformats.org/drawingml/2006/main" xmlns:r="http://schemas.openxmlformats.org/officeDocument/2006/relationships" xmlns:p="http://schemas.openxmlformats.org/presentationml/2006/main">
+  <p:cSld>
+    <p:spTree>
+      <p:nvGrpSpPr>
+        <p:cNvPr id="1" name=""/>
+        <p:cNvGrpSpPr/>
+        <p:nvPr/>
+      </p:nvGrpSpPr>
+      <p:grpSpPr>
+        <a:xfrm>
+          <a:off x="0" y="0"/>
+          <a:ext cx="0" cy="0"/>
+          <a:chOff x="0" y="0"/>
+          <a:chExt cx="0" cy="0"/>
+        </a:xfrm>
+      </p:grpSpPr>
+      <p:sp>
+        <p:nvSpPr>
+          <p:cNvPr id="85" name="圆角矩形 84"/>
+          <p:cNvSpPr/>
+          <p:nvPr/>
+        </p:nvSpPr>
+        <p:spPr>
+          <a:xfrm>
+            <a:off x="43180" y="528955"/>
+            <a:ext cx="10801350" cy="5761355"/>
+          </a:xfrm>
+          <a:prstGeom prst="roundRect">
+            <a:avLst>
+              <a:gd name="adj" fmla="val 6072"/>
+            </a:avLst>
+          </a:prstGeom>
+          <a:solidFill>
+            <a:schemeClr val="bg1"/>
+          </a:solidFill>
+          <a:ln>
+            <a:solidFill>
+              <a:schemeClr val="tx1"/>
+            </a:solidFill>
+            <a:prstDash val="sysDot"/>
+          </a:ln>
+        </p:spPr>
+        <p:style>
+          <a:lnRef idx="2">
+            <a:schemeClr val="accent1">
+              <a:lumMod val="75000"/>
+            </a:schemeClr>
+          </a:lnRef>
+          <a:fillRef idx="1">
+            <a:schemeClr val="accent1"/>
+          </a:fillRef>
+          <a:effectRef idx="0">
+            <a:srgbClr val="FFFFFF"/>
+          </a:effectRef>
+          <a:fontRef idx="minor">
+            <a:schemeClr val="lt1"/>
+          </a:fontRef>
+        </p:style>
+        <p:txBody>
+          <a:bodyPr rtlCol="0" anchor="ctr"/>
+          <a:p>
+            <a:pPr algn="ctr"/>
+            <a:endParaRPr lang="zh-CN" altLang="en-US"/>
+          </a:p>
+        </p:txBody>
+      </p:sp>
+      <p:grpSp>
+        <p:nvGrpSpPr>
+          <p:cNvPr id="84" name="组合 83"/>
+          <p:cNvGrpSpPr/>
+          <p:nvPr/>
+        </p:nvGrpSpPr>
+        <p:grpSpPr>
+          <a:xfrm>
+            <a:off x="233680" y="735965"/>
+            <a:ext cx="1595120" cy="2091055"/>
+            <a:chOff x="383" y="1920"/>
+            <a:chExt cx="2512" cy="3293"/>
+          </a:xfrm>
+        </p:grpSpPr>
+        <p:sp>
+          <p:nvSpPr>
+            <p:cNvPr id="3" name="圆角矩形 2"/>
+            <p:cNvSpPr/>
+            <p:nvPr/>
+          </p:nvSpPr>
+          <p:spPr>
+            <a:xfrm>
+              <a:off x="383" y="1920"/>
+              <a:ext cx="2513" cy="3293"/>
+            </a:xfrm>
+            <a:prstGeom prst="roundRect">
+              <a:avLst>
+                <a:gd name="adj" fmla="val 6639"/>
+              </a:avLst>
+            </a:prstGeom>
+            <a:solidFill>
+              <a:srgbClr val="E8E8E8"/>
+            </a:solidFill>
+            <a:ln w="9525">
+              <a:solidFill>
+                <a:schemeClr val="tx1"/>
+              </a:solidFill>
+            </a:ln>
+          </p:spPr>
+          <p:style>
+            <a:lnRef idx="2">
+              <a:schemeClr val="accent1">
+                <a:lumMod val="75000"/>
+              </a:schemeClr>
+            </a:lnRef>
+            <a:fillRef idx="1">
+              <a:schemeClr val="accent1"/>
+            </a:fillRef>
+            <a:effectRef idx="0">
+              <a:srgbClr val="FFFFFF"/>
+            </a:effectRef>
+            <a:fontRef idx="minor">
+              <a:schemeClr val="lt1"/>
+            </a:fontRef>
+          </p:style>
+          <p:txBody>
+            <a:bodyPr rtlCol="0" anchor="ctr"/>
+            <a:p>
+              <a:pPr algn="ctr"/>
+              <a:endParaRPr lang="zh-CN" altLang="en-US"/>
+            </a:p>
+          </p:txBody>
+        </p:sp>
+        <p:pic>
+          <p:nvPicPr>
+            <p:cNvPr id="14" name="图片 13"/>
+            <p:cNvPicPr>
+              <a:picLocks noChangeAspect="1"/>
+            </p:cNvPicPr>
+            <p:nvPr/>
+          </p:nvPicPr>
+          <p:blipFill>
+            <a:blip r:embed="rId1"/>
+            <a:stretch>
+              <a:fillRect/>
+            </a:stretch>
+          </p:blipFill>
+          <p:spPr>
+            <a:xfrm>
+              <a:off x="436" y="2102"/>
+              <a:ext cx="832" cy="869"/>
+            </a:xfrm>
+            <a:prstGeom prst="rect">
+              <a:avLst/>
+            </a:prstGeom>
+          </p:spPr>
+        </p:pic>
+        <p:sp>
+          <p:nvSpPr>
+            <p:cNvPr id="17" name="文本框 16"/>
+            <p:cNvSpPr txBox="1"/>
+            <p:nvPr/>
+          </p:nvSpPr>
+          <p:spPr>
+            <a:xfrm>
+              <a:off x="1217" y="2251"/>
+              <a:ext cx="1676" cy="572"/>
+            </a:xfrm>
+            <a:prstGeom prst="rect">
+              <a:avLst/>
+            </a:prstGeom>
+            <a:noFill/>
+          </p:spPr>
+          <p:txBody>
+            <a:bodyPr wrap="square" rtlCol="0">
+              <a:noAutofit/>
+            </a:bodyPr>
+            <a:p>
+              <a:r>
+                <a:rPr lang="en-US" altLang="zh-CN" sz="1000" b="1">
+                  <a:latin typeface="Times New Roman" panose="02020603050405020304" charset="0"/>
+                  <a:cs typeface="Times New Roman" panose="02020603050405020304" charset="0"/>
+                </a:rPr>
+                <a:t>Specification </a:t>
+              </a:r>
+              <a:endParaRPr lang="en-US" altLang="zh-CN" sz="1000" b="1">
+                <a:latin typeface="Times New Roman" panose="02020603050405020304" charset="0"/>
+                <a:cs typeface="Times New Roman" panose="02020603050405020304" charset="0"/>
+              </a:endParaRPr>
+            </a:p>
+            <a:p>
+              <a:r>
+                <a:rPr lang="en-US" altLang="zh-CN" sz="1000" b="1">
+                  <a:latin typeface="Times New Roman" panose="02020603050405020304" charset="0"/>
+                  <a:cs typeface="Times New Roman" panose="02020603050405020304" charset="0"/>
+                </a:rPr>
+                <a:t>Document</a:t>
+              </a:r>
+              <a:endParaRPr lang="zh-CN" altLang="en-US" sz="1000" b="1"/>
+            </a:p>
+          </p:txBody>
+        </p:sp>
+        <p:sp>
+          <p:nvSpPr>
+            <p:cNvPr id="18" name="文本框 17"/>
+            <p:cNvSpPr txBox="1"/>
+            <p:nvPr/>
+          </p:nvSpPr>
+          <p:spPr>
+            <a:xfrm>
+              <a:off x="451" y="3115"/>
+              <a:ext cx="2378" cy="2098"/>
+            </a:xfrm>
+            <a:prstGeom prst="rect">
+              <a:avLst/>
+            </a:prstGeom>
+            <a:noFill/>
+          </p:spPr>
+          <p:txBody>
+            <a:bodyPr wrap="square" rtlCol="0">
+              <a:noAutofit/>
+            </a:bodyPr>
+            <a:p>
+              <a:r>
+                <a:rPr lang="en-US" altLang="zh-CN" sz="800" i="1">
+                  <a:latin typeface="Times New Roman" panose="02020603050405020304" charset="0"/>
+                  <a:cs typeface="Times New Roman" panose="02020603050405020304" charset="0"/>
+                </a:rPr>
+                <a:t>e.g., Algorithm 1 ForExample():</a:t>
+              </a:r>
+              <a:endParaRPr lang="en-US" altLang="zh-CN" sz="800" i="1">
+                <a:latin typeface="Times New Roman" panose="02020603050405020304" charset="0"/>
+                <a:cs typeface="Times New Roman" panose="02020603050405020304" charset="0"/>
+              </a:endParaRPr>
+            </a:p>
+            <a:p>
+              <a:r>
+                <a:rPr lang="en-US" altLang="zh-CN" sz="800" i="1">
+                  <a:latin typeface="Times New Roman" panose="02020603050405020304" charset="0"/>
+                  <a:cs typeface="Times New Roman" panose="02020603050405020304" charset="0"/>
+                </a:rPr>
+                <a:t>Performs two simple for loops. </a:t>
+              </a:r>
+              <a:endParaRPr lang="en-US" altLang="zh-CN" sz="800" i="1">
+                <a:latin typeface="Times New Roman" panose="02020603050405020304" charset="0"/>
+                <a:cs typeface="Times New Roman" panose="02020603050405020304" charset="0"/>
+              </a:endParaRPr>
+            </a:p>
+            <a:p>
+              <a:r>
+                <a:rPr lang="en-US" altLang="zh-CN" sz="800" i="1">
+                  <a:latin typeface="Times New Roman" panose="02020603050405020304" charset="0"/>
+                  <a:cs typeface="Times New Roman" panose="02020603050405020304" charset="0"/>
+                </a:rPr>
+                <a:t>1: for (i</a:t>
+              </a:r>
+              <a:r>
+                <a:rPr lang="en-US" altLang="en-US" sz="800" i="1">
+                  <a:latin typeface="Times New Roman" panose="02020603050405020304" charset="0"/>
+                  <a:cs typeface="Times New Roman" panose="02020603050405020304" charset="0"/>
+                </a:rPr>
+                <a:t>←</a:t>
+              </a:r>
+              <a:r>
+                <a:rPr lang="en-US" altLang="zh-CN" sz="800" i="1">
+                  <a:latin typeface="Times New Roman" panose="02020603050405020304" charset="0"/>
+                  <a:cs typeface="Times New Roman" panose="02020603050405020304" charset="0"/>
+                </a:rPr>
+                <a:t> 0; i&lt; 10;</a:t>
+              </a:r>
+              <a:r>
+                <a:rPr lang="en-US" sz="800" i="1">
+                  <a:latin typeface="Times New Roman" panose="02020603050405020304" charset="0"/>
+                  <a:cs typeface="Times New Roman" panose="02020603050405020304" charset="0"/>
+                </a:rPr>
+                <a:t>i</a:t>
+              </a:r>
+              <a:r>
+                <a:rPr lang="en-US" altLang="zh-CN" sz="800" i="1">
+                  <a:latin typeface="Times New Roman" panose="02020603050405020304" charset="0"/>
+                  <a:cs typeface="Times New Roman" panose="02020603050405020304" charset="0"/>
+                </a:rPr>
+                <a:t>++) </a:t>
+              </a:r>
+              <a:endParaRPr lang="en-US" altLang="zh-CN" sz="800" i="1">
+                <a:latin typeface="Times New Roman" panose="02020603050405020304" charset="0"/>
+                <a:cs typeface="Times New Roman" panose="02020603050405020304" charset="0"/>
+              </a:endParaRPr>
+            </a:p>
+            <a:p>
+              <a:r>
+                <a:rPr lang="en-US" altLang="zh-CN" sz="800" i="1">
+                  <a:latin typeface="Times New Roman" panose="02020603050405020304" charset="0"/>
+                  <a:cs typeface="Times New Roman" panose="02020603050405020304" charset="0"/>
+                </a:rPr>
+                <a:t>2: </a:t>
+              </a:r>
+              <a:r>
+                <a:rPr lang="zh-CN" altLang="en-US" sz="800" i="1">
+                  <a:latin typeface="Times New Roman" panose="02020603050405020304" charset="0"/>
+                  <a:cs typeface="Times New Roman" panose="02020603050405020304" charset="0"/>
+                </a:rPr>
+                <a:t>𝐴</a:t>
+              </a:r>
+              <a:r>
+                <a:rPr lang="en-US" altLang="zh-CN" sz="800" i="1">
+                  <a:latin typeface="Times New Roman" panose="02020603050405020304" charset="0"/>
+                  <a:cs typeface="Times New Roman" panose="02020603050405020304" charset="0"/>
+                </a:rPr>
+                <a:t>[i] </a:t>
+              </a:r>
+              <a:r>
+                <a:rPr lang="en-US" altLang="en-US" sz="800" i="1">
+                  <a:latin typeface="Times New Roman" panose="02020603050405020304" charset="0"/>
+                  <a:cs typeface="Times New Roman" panose="02020603050405020304" charset="0"/>
+                </a:rPr>
+                <a:t>←</a:t>
+              </a:r>
+              <a:r>
+                <a:rPr lang="en-US" altLang="zh-CN" sz="800" i="1">
+                  <a:latin typeface="Times New Roman" panose="02020603050405020304" charset="0"/>
+                  <a:cs typeface="Times New Roman" panose="02020603050405020304" charset="0"/>
+                </a:rPr>
+                <a:t> i </a:t>
+              </a:r>
+              <a:endParaRPr lang="en-US" altLang="zh-CN" sz="800" i="1">
+                <a:latin typeface="Times New Roman" panose="02020603050405020304" charset="0"/>
+                <a:cs typeface="Times New Roman" panose="02020603050405020304" charset="0"/>
+              </a:endParaRPr>
+            </a:p>
+            <a:p>
+              <a:r>
+                <a:rPr lang="en-US" altLang="zh-CN" sz="800" i="1">
+                  <a:latin typeface="Times New Roman" panose="02020603050405020304" charset="0"/>
+                  <a:cs typeface="Times New Roman" panose="02020603050405020304" charset="0"/>
+                </a:rPr>
+                <a:t>3: end for </a:t>
+              </a:r>
+              <a:endParaRPr lang="en-US" altLang="zh-CN" sz="800" i="1">
+                <a:latin typeface="Times New Roman" panose="02020603050405020304" charset="0"/>
+                <a:cs typeface="Times New Roman" panose="02020603050405020304" charset="0"/>
+              </a:endParaRPr>
+            </a:p>
+            <a:p>
+              <a:r>
+                <a:rPr lang="en-US" altLang="zh-CN" sz="800" i="1">
+                  <a:latin typeface="Times New Roman" panose="02020603050405020304" charset="0"/>
+                  <a:cs typeface="Times New Roman" panose="02020603050405020304" charset="0"/>
+                </a:rPr>
+                <a:t>4:</a:t>
+              </a:r>
+              <a:r>
+                <a:rPr lang="en-US" sz="800" i="1">
+                  <a:latin typeface="Times New Roman" panose="02020603050405020304" charset="0"/>
+                  <a:cs typeface="Times New Roman" panose="02020603050405020304" charset="0"/>
+                </a:rPr>
+                <a:t>j</a:t>
+              </a:r>
+              <a:r>
+                <a:rPr lang="en-US" altLang="en-US" sz="800" i="1">
+                  <a:latin typeface="Times New Roman" panose="02020603050405020304" charset="0"/>
+                  <a:cs typeface="Times New Roman" panose="02020603050405020304" charset="0"/>
+                </a:rPr>
+                <a:t>←</a:t>
+              </a:r>
+              <a:r>
+                <a:rPr lang="en-US" altLang="zh-CN" sz="800" i="1">
+                  <a:latin typeface="Times New Roman" panose="02020603050405020304" charset="0"/>
+                  <a:cs typeface="Times New Roman" panose="02020603050405020304" charset="0"/>
+                </a:rPr>
+                <a:t>0</a:t>
+              </a:r>
+              <a:endParaRPr lang="en-US" altLang="zh-CN" sz="800" i="1">
+                <a:latin typeface="Times New Roman" panose="02020603050405020304" charset="0"/>
+                <a:cs typeface="Times New Roman" panose="02020603050405020304" charset="0"/>
+              </a:endParaRPr>
+            </a:p>
+            <a:p>
+              <a:r>
+                <a:rPr lang="en-US" altLang="zh-CN" sz="800" i="1">
+                  <a:latin typeface="Times New Roman" panose="02020603050405020304" charset="0"/>
+                  <a:cs typeface="Times New Roman" panose="02020603050405020304" charset="0"/>
+                </a:rPr>
+                <a:t>5: for (k </a:t>
+              </a:r>
+              <a:r>
+                <a:rPr lang="en-US" altLang="en-US" sz="800" i="1">
+                  <a:latin typeface="Times New Roman" panose="02020603050405020304" charset="0"/>
+                  <a:cs typeface="Times New Roman" panose="02020603050405020304" charset="0"/>
+                </a:rPr>
+                <a:t>←</a:t>
+              </a:r>
+              <a:r>
+                <a:rPr lang="en-US" altLang="zh-CN" sz="800" i="1">
+                  <a:latin typeface="Times New Roman" panose="02020603050405020304" charset="0"/>
+                  <a:cs typeface="Times New Roman" panose="02020603050405020304" charset="0"/>
+                </a:rPr>
+                <a:t> 256; k &gt; 1; k </a:t>
+              </a:r>
+              <a:r>
+                <a:rPr lang="en-US" altLang="en-US" sz="800" i="1">
+                  <a:latin typeface="Times New Roman" panose="02020603050405020304" charset="0"/>
+                  <a:cs typeface="Times New Roman" panose="02020603050405020304" charset="0"/>
+                </a:rPr>
+                <a:t>←</a:t>
+              </a:r>
+              <a:r>
+                <a:rPr lang="en-US" altLang="zh-CN" sz="800" i="1">
+                  <a:latin typeface="Times New Roman" panose="02020603050405020304" charset="0"/>
+                  <a:cs typeface="Times New Roman" panose="02020603050405020304" charset="0"/>
+                </a:rPr>
+                <a:t> k/2) </a:t>
+              </a:r>
+              <a:endParaRPr lang="en-US" altLang="zh-CN" sz="800" i="1">
+                <a:latin typeface="Times New Roman" panose="02020603050405020304" charset="0"/>
+                <a:cs typeface="Times New Roman" panose="02020603050405020304" charset="0"/>
+              </a:endParaRPr>
+            </a:p>
+            <a:p>
+              <a:r>
+                <a:rPr lang="en-US" altLang="zh-CN" sz="800" i="1">
+                  <a:latin typeface="Times New Roman" panose="02020603050405020304" charset="0"/>
+                  <a:cs typeface="Times New Roman" panose="02020603050405020304" charset="0"/>
+                </a:rPr>
+                <a:t>6: </a:t>
+              </a:r>
+              <a:r>
+                <a:rPr lang="zh-CN" altLang="en-US" sz="800" i="1">
+                  <a:latin typeface="Times New Roman" panose="02020603050405020304" charset="0"/>
+                  <a:cs typeface="Times New Roman" panose="02020603050405020304" charset="0"/>
+                </a:rPr>
+                <a:t>𝐵</a:t>
+              </a:r>
+              <a:r>
+                <a:rPr lang="en-US" altLang="zh-CN" sz="800" i="1">
+                  <a:latin typeface="Times New Roman" panose="02020603050405020304" charset="0"/>
+                  <a:cs typeface="Times New Roman" panose="02020603050405020304" charset="0"/>
+                </a:rPr>
+                <a:t>[j] </a:t>
+              </a:r>
+              <a:r>
+                <a:rPr lang="en-US" altLang="en-US" sz="800" i="1">
+                  <a:latin typeface="Times New Roman" panose="02020603050405020304" charset="0"/>
+                  <a:cs typeface="Times New Roman" panose="02020603050405020304" charset="0"/>
+                </a:rPr>
+                <a:t>←</a:t>
+              </a:r>
+              <a:r>
+                <a:rPr lang="en-US" sz="800" i="1">
+                  <a:latin typeface="Times New Roman" panose="02020603050405020304" charset="0"/>
+                  <a:cs typeface="Times New Roman" panose="02020603050405020304" charset="0"/>
+                </a:rPr>
+                <a:t>k</a:t>
+              </a:r>
+              <a:endParaRPr lang="en-US" altLang="zh-CN" sz="800" i="1">
+                <a:latin typeface="Times New Roman" panose="02020603050405020304" charset="0"/>
+                <a:cs typeface="Times New Roman" panose="02020603050405020304" charset="0"/>
+              </a:endParaRPr>
+            </a:p>
+            <a:p>
+              <a:r>
+                <a:rPr lang="en-US" altLang="zh-CN" sz="800" i="1">
+                  <a:latin typeface="Times New Roman" panose="02020603050405020304" charset="0"/>
+                  <a:cs typeface="Times New Roman" panose="02020603050405020304" charset="0"/>
+                </a:rPr>
+                <a:t>7: </a:t>
+              </a:r>
+              <a:r>
+                <a:rPr lang="en-US" sz="800" i="1">
+                  <a:latin typeface="Times New Roman" panose="02020603050405020304" charset="0"/>
+                  <a:cs typeface="Times New Roman" panose="02020603050405020304" charset="0"/>
+                </a:rPr>
+                <a:t>j</a:t>
+              </a:r>
+              <a:r>
+                <a:rPr lang="en-US" altLang="en-US" sz="800" i="1">
+                  <a:latin typeface="Times New Roman" panose="02020603050405020304" charset="0"/>
+                  <a:cs typeface="Times New Roman" panose="02020603050405020304" charset="0"/>
+                </a:rPr>
+                <a:t>←</a:t>
+              </a:r>
+              <a:r>
+                <a:rPr lang="en-US" altLang="zh-CN" sz="800" i="1">
+                  <a:latin typeface="Times New Roman" panose="02020603050405020304" charset="0"/>
+                  <a:cs typeface="Times New Roman" panose="02020603050405020304" charset="0"/>
+                </a:rPr>
+                <a:t> </a:t>
+              </a:r>
+              <a:r>
+                <a:rPr lang="en-US" sz="800" i="1">
+                  <a:latin typeface="Times New Roman" panose="02020603050405020304" charset="0"/>
+                  <a:cs typeface="Times New Roman" panose="02020603050405020304" charset="0"/>
+                </a:rPr>
+                <a:t>j</a:t>
+              </a:r>
+              <a:r>
+                <a:rPr lang="en-US" altLang="zh-CN" sz="800" i="1">
+                  <a:latin typeface="Times New Roman" panose="02020603050405020304" charset="0"/>
+                  <a:cs typeface="Times New Roman" panose="02020603050405020304" charset="0"/>
+                </a:rPr>
+                <a:t>+ 1 </a:t>
+              </a:r>
+              <a:endParaRPr lang="en-US" altLang="zh-CN" sz="800" i="1">
+                <a:latin typeface="Times New Roman" panose="02020603050405020304" charset="0"/>
+                <a:cs typeface="Times New Roman" panose="02020603050405020304" charset="0"/>
+              </a:endParaRPr>
+            </a:p>
+            <a:p>
+              <a:r>
+                <a:rPr lang="en-US" altLang="zh-CN" sz="800" i="1">
+                  <a:latin typeface="Times New Roman" panose="02020603050405020304" charset="0"/>
+                  <a:cs typeface="Times New Roman" panose="02020603050405020304" charset="0"/>
+                </a:rPr>
+                <a:t>8: end for </a:t>
+              </a:r>
+              <a:endParaRPr lang="zh-CN" altLang="en-US" sz="800" i="1">
+                <a:latin typeface="Times New Roman" panose="02020603050405020304" charset="0"/>
+                <a:cs typeface="Times New Roman" panose="02020603050405020304" charset="0"/>
+              </a:endParaRPr>
+            </a:p>
+          </p:txBody>
+        </p:sp>
+      </p:grpSp>
+      <p:sp>
+        <p:nvSpPr>
+          <p:cNvPr id="7" name="圆角矩形 6"/>
+          <p:cNvSpPr/>
+          <p:nvPr>
+            <p:custDataLst>
+              <p:tags r:id="rId2"/>
+            </p:custDataLst>
+          </p:nvPr>
+        </p:nvSpPr>
+        <p:spPr>
+          <a:xfrm>
+            <a:off x="2131695" y="701675"/>
+            <a:ext cx="1892935" cy="2465070"/>
+          </a:xfrm>
+          <a:prstGeom prst="roundRect">
+            <a:avLst>
+              <a:gd name="adj" fmla="val 4082"/>
+            </a:avLst>
+          </a:prstGeom>
+          <a:solidFill>
+            <a:srgbClr val="F8EFFF"/>
+          </a:solidFill>
+          <a:ln>
+            <a:solidFill>
+              <a:schemeClr val="accent6">
+                <a:lumMod val="20000"/>
+                <a:lumOff val="80000"/>
+              </a:schemeClr>
+            </a:solidFill>
+          </a:ln>
+        </p:spPr>
+        <p:style>
+          <a:lnRef idx="2">
+            <a:schemeClr val="accent1">
+              <a:lumMod val="75000"/>
+            </a:schemeClr>
+          </a:lnRef>
+          <a:fillRef idx="1">
+            <a:schemeClr val="accent1"/>
+          </a:fillRef>
+          <a:effectRef idx="0">
+            <a:srgbClr val="FFFFFF"/>
+          </a:effectRef>
+          <a:fontRef idx="minor">
+            <a:schemeClr val="lt1"/>
+          </a:fontRef>
+        </p:style>
+        <p:txBody>
+          <a:bodyPr rtlCol="0" anchor="ctr"/>
+          <a:p>
+            <a:pPr algn="ctr"/>
+            <a:endParaRPr lang="zh-CN" altLang="en-US"/>
+          </a:p>
+        </p:txBody>
+      </p:sp>
+      <p:sp>
+        <p:nvSpPr>
+          <p:cNvPr id="11" name="文本框 10"/>
+          <p:cNvSpPr txBox="1"/>
+          <p:nvPr>
+            <p:custDataLst>
+              <p:tags r:id="rId3"/>
+            </p:custDataLst>
+          </p:nvPr>
+        </p:nvSpPr>
+        <p:spPr>
+          <a:xfrm>
+            <a:off x="2656840" y="676910"/>
+            <a:ext cx="1410335" cy="275590"/>
+          </a:xfrm>
+          <a:prstGeom prst="rect">
+            <a:avLst/>
+          </a:prstGeom>
+          <a:noFill/>
+        </p:spPr>
+        <p:txBody>
+          <a:bodyPr wrap="square" rtlCol="0">
+            <a:spAutoFit/>
+          </a:bodyPr>
+          <a:p>
+            <a:r>
+              <a:rPr lang="en-US" altLang="zh-CN" sz="1200" u="sng">
+                <a:latin typeface="Times New Roman" panose="02020603050405020304" charset="0"/>
+                <a:cs typeface="Times New Roman" panose="02020603050405020304" charset="0"/>
+              </a:rPr>
+              <a:t>Spec2IR Agent</a:t>
+            </a:r>
+            <a:endParaRPr lang="en-US" altLang="zh-CN" sz="1200" u="sng">
+              <a:latin typeface="Times New Roman" panose="02020603050405020304" charset="0"/>
+              <a:cs typeface="Times New Roman" panose="02020603050405020304" charset="0"/>
+            </a:endParaRPr>
+          </a:p>
+        </p:txBody>
+      </p:sp>
+      <p:pic>
+        <p:nvPicPr>
+          <p:cNvPr id="22" name="图片 21"/>
+          <p:cNvPicPr>
+            <a:picLocks noChangeAspect="1"/>
+          </p:cNvPicPr>
+          <p:nvPr>
+            <p:custDataLst>
+              <p:tags r:id="rId4"/>
+            </p:custDataLst>
+          </p:nvPr>
+        </p:nvPicPr>
+        <p:blipFill>
+          <a:blip r:embed="rId5"/>
+          <a:stretch>
+            <a:fillRect/>
+          </a:stretch>
+        </p:blipFill>
+        <p:spPr>
+          <a:xfrm>
+            <a:off x="2263140" y="701675"/>
+            <a:ext cx="393700" cy="226695"/>
+          </a:xfrm>
+          <a:prstGeom prst="rect">
+            <a:avLst/>
+          </a:prstGeom>
+        </p:spPr>
+      </p:pic>
+      <p:sp>
+        <p:nvSpPr>
+          <p:cNvPr id="39" name="矩形 38"/>
+          <p:cNvSpPr/>
+          <p:nvPr>
+            <p:custDataLst>
+              <p:tags r:id="rId6"/>
+            </p:custDataLst>
+          </p:nvPr>
+        </p:nvSpPr>
+        <p:spPr>
+          <a:xfrm>
+            <a:off x="2263140" y="1139825"/>
+            <a:ext cx="1624330" cy="708025"/>
+          </a:xfrm>
+          <a:prstGeom prst="rect">
+            <a:avLst/>
+          </a:prstGeom>
+          <a:solidFill>
+            <a:schemeClr val="bg1"/>
+          </a:solidFill>
+          <a:ln>
+            <a:solidFill>
+              <a:schemeClr val="tx1"/>
+            </a:solidFill>
+          </a:ln>
+        </p:spPr>
+        <p:style>
+          <a:lnRef idx="2">
+            <a:schemeClr val="accent1">
+              <a:lumMod val="75000"/>
+            </a:schemeClr>
+          </a:lnRef>
+          <a:fillRef idx="1">
+            <a:schemeClr val="accent1"/>
+          </a:fillRef>
+          <a:effectRef idx="0">
+            <a:srgbClr val="FFFFFF"/>
+          </a:effectRef>
+          <a:fontRef idx="minor">
+            <a:schemeClr val="lt1"/>
+          </a:fontRef>
+        </p:style>
+        <p:txBody>
+          <a:bodyPr rtlCol="0" anchor="ctr"/>
+          <a:p>
+            <a:pPr algn="ctr"/>
+            <a:endParaRPr lang="zh-CN" altLang="en-US"/>
+          </a:p>
+        </p:txBody>
+      </p:sp>
+      <p:grpSp>
+        <p:nvGrpSpPr>
+          <p:cNvPr id="40" name="组合 39"/>
+          <p:cNvGrpSpPr/>
+          <p:nvPr/>
+        </p:nvGrpSpPr>
+        <p:grpSpPr>
+          <a:xfrm rot="0">
+            <a:off x="2481580" y="1215390"/>
+            <a:ext cx="1188085" cy="418465"/>
+            <a:chOff x="3914" y="1016"/>
+            <a:chExt cx="7486" cy="2602"/>
+          </a:xfrm>
+        </p:grpSpPr>
+        <p:pic>
+          <p:nvPicPr>
+            <p:cNvPr id="41" name="图片 40" descr="file-pdf"/>
+            <p:cNvPicPr>
+              <a:picLocks noChangeAspect="1"/>
+            </p:cNvPicPr>
+            <p:nvPr>
+              <p:custDataLst>
+                <p:tags r:id="rId7"/>
+              </p:custDataLst>
+            </p:nvPr>
+          </p:nvPicPr>
+          <p:blipFill>
+            <a:blip r:embed="rId8">
+              <a:extLst>
+                <a:ext uri="{96DAC541-7B7A-43D3-8B79-37D633B846F1}">
+                  <asvg:svgBlip xmlns:asvg="http://schemas.microsoft.com/office/drawing/2016/SVG/main" r:embed="rId9"/>
+                </a:ext>
+              </a:extLst>
+            </a:blip>
+            <a:stretch>
+              <a:fillRect/>
+            </a:stretch>
+          </p:blipFill>
+          <p:spPr>
+            <a:xfrm>
+              <a:off x="3914" y="1016"/>
+              <a:ext cx="2603" cy="2603"/>
+            </a:xfrm>
+            <a:prstGeom prst="rect">
+              <a:avLst/>
+            </a:prstGeom>
+          </p:spPr>
+        </p:pic>
+        <p:pic>
+          <p:nvPicPr>
+            <p:cNvPr id="42" name="图片 41" descr="DOC"/>
+            <p:cNvPicPr>
+              <a:picLocks noChangeAspect="1"/>
+            </p:cNvPicPr>
+            <p:nvPr>
+              <p:custDataLst>
+                <p:tags r:id="rId10"/>
+              </p:custDataLst>
+            </p:nvPr>
+          </p:nvPicPr>
+          <p:blipFill>
+            <a:blip r:embed="rId11">
+              <a:extLst>
+                <a:ext uri="{96DAC541-7B7A-43D3-8B79-37D633B846F1}">
+                  <asvg:svgBlip xmlns:asvg="http://schemas.microsoft.com/office/drawing/2016/SVG/main" r:embed="rId12"/>
+                </a:ext>
+              </a:extLst>
+            </a:blip>
+            <a:stretch>
+              <a:fillRect/>
+            </a:stretch>
+          </p:blipFill>
+          <p:spPr>
+            <a:xfrm>
+              <a:off x="8846" y="1040"/>
+              <a:ext cx="2555" cy="2555"/>
+            </a:xfrm>
+            <a:prstGeom prst="rect">
+              <a:avLst/>
+            </a:prstGeom>
+          </p:spPr>
+        </p:pic>
+      </p:grpSp>
+      <p:sp>
+        <p:nvSpPr>
+          <p:cNvPr id="43" name="文本框 42"/>
+          <p:cNvSpPr txBox="1"/>
+          <p:nvPr>
+            <p:custDataLst>
+              <p:tags r:id="rId13"/>
+            </p:custDataLst>
+          </p:nvPr>
+        </p:nvSpPr>
+        <p:spPr>
+          <a:xfrm>
+            <a:off x="2263140" y="1633855"/>
+            <a:ext cx="1624965" cy="213995"/>
+          </a:xfrm>
+          <a:prstGeom prst="rect">
+            <a:avLst/>
+          </a:prstGeom>
+          <a:noFill/>
+        </p:spPr>
+        <p:txBody>
+          <a:bodyPr wrap="square" rtlCol="0">
+            <a:spAutoFit/>
+          </a:bodyPr>
+          <a:p>
+            <a:pPr algn="ctr"/>
+            <a:r>
+              <a:rPr lang="en-US" altLang="zh-CN" sz="800">
+                <a:latin typeface="Times New Roman" panose="02020603050405020304" charset="0"/>
+                <a:cs typeface="Times New Roman" panose="02020603050405020304" charset="0"/>
+              </a:rPr>
+              <a:t>Standard Specification Document</a:t>
+            </a:r>
+            <a:endParaRPr lang="en-US" altLang="zh-CN" sz="800">
+              <a:latin typeface="Times New Roman" panose="02020603050405020304" charset="0"/>
+              <a:cs typeface="Times New Roman" panose="02020603050405020304" charset="0"/>
+            </a:endParaRPr>
+          </a:p>
+        </p:txBody>
+      </p:sp>
+      <p:sp>
+        <p:nvSpPr>
+          <p:cNvPr id="45" name="矩形 44"/>
+          <p:cNvSpPr/>
+          <p:nvPr>
+            <p:custDataLst>
+              <p:tags r:id="rId14"/>
+            </p:custDataLst>
+          </p:nvPr>
+        </p:nvSpPr>
+        <p:spPr>
+          <a:xfrm>
+            <a:off x="2263775" y="2209800"/>
+            <a:ext cx="1624330" cy="708025"/>
+          </a:xfrm>
+          <a:prstGeom prst="rect">
+            <a:avLst/>
+          </a:prstGeom>
+          <a:solidFill>
+            <a:schemeClr val="bg1"/>
+          </a:solidFill>
+          <a:ln>
+            <a:solidFill>
+              <a:schemeClr val="tx1"/>
+            </a:solidFill>
+          </a:ln>
+        </p:spPr>
+        <p:style>
+          <a:lnRef idx="2">
+            <a:schemeClr val="accent1">
+              <a:lumMod val="75000"/>
+            </a:schemeClr>
+          </a:lnRef>
+          <a:fillRef idx="1">
+            <a:schemeClr val="accent1"/>
+          </a:fillRef>
+          <a:effectRef idx="0">
+            <a:srgbClr val="FFFFFF"/>
+          </a:effectRef>
+          <a:fontRef idx="minor">
+            <a:schemeClr val="lt1"/>
+          </a:fontRef>
+        </p:style>
+        <p:txBody>
+          <a:bodyPr rtlCol="0" anchor="ctr"/>
+          <a:p>
+            <a:pPr algn="ctr"/>
+            <a:endParaRPr lang="zh-CN" altLang="en-US"/>
+          </a:p>
+        </p:txBody>
+      </p:sp>
+      <p:sp>
+        <p:nvSpPr>
+          <p:cNvPr id="46" name="文本框 45"/>
+          <p:cNvSpPr txBox="1"/>
+          <p:nvPr>
+            <p:custDataLst>
+              <p:tags r:id="rId15"/>
+            </p:custDataLst>
+          </p:nvPr>
+        </p:nvSpPr>
+        <p:spPr>
+          <a:xfrm>
+            <a:off x="2263775" y="2703830"/>
+            <a:ext cx="1624965" cy="213995"/>
+          </a:xfrm>
+          <a:prstGeom prst="rect">
+            <a:avLst/>
+          </a:prstGeom>
+          <a:noFill/>
+        </p:spPr>
+        <p:txBody>
+          <a:bodyPr wrap="square" rtlCol="0">
+            <a:spAutoFit/>
+          </a:bodyPr>
+          <a:p>
+            <a:pPr algn="ctr"/>
+            <a:r>
+              <a:rPr lang="en-US" altLang="zh-CN" sz="800">
+                <a:latin typeface="Times New Roman" panose="02020603050405020304" charset="0"/>
+                <a:cs typeface="Times New Roman" panose="02020603050405020304" charset="0"/>
+              </a:rPr>
+              <a:t>Intermediate Representation </a:t>
+            </a:r>
+            <a:r>
+              <a:rPr lang="en-US" altLang="zh-CN" sz="800">
+                <a:latin typeface="Times New Roman" panose="02020603050405020304" charset="0"/>
+                <a:cs typeface="Times New Roman" panose="02020603050405020304" charset="0"/>
+              </a:rPr>
+              <a:t>Json</a:t>
+            </a:r>
+            <a:endParaRPr lang="en-US" altLang="zh-CN" sz="800">
+              <a:latin typeface="Times New Roman" panose="02020603050405020304" charset="0"/>
+              <a:cs typeface="Times New Roman" panose="02020603050405020304" charset="0"/>
+            </a:endParaRPr>
+          </a:p>
+        </p:txBody>
+      </p:sp>
+      <p:grpSp>
+        <p:nvGrpSpPr>
+          <p:cNvPr id="47" name="组合 46"/>
+          <p:cNvGrpSpPr/>
+          <p:nvPr/>
+        </p:nvGrpSpPr>
+        <p:grpSpPr>
+          <a:xfrm rot="0">
+            <a:off x="2576195" y="2249170"/>
+            <a:ext cx="951865" cy="421640"/>
+            <a:chOff x="11138" y="1583"/>
+            <a:chExt cx="1499" cy="664"/>
+          </a:xfrm>
+        </p:grpSpPr>
+        <p:pic>
+          <p:nvPicPr>
+            <p:cNvPr id="48" name="图片 47" descr="json输出"/>
+            <p:cNvPicPr>
+              <a:picLocks noChangeAspect="1"/>
+            </p:cNvPicPr>
+            <p:nvPr>
+              <p:custDataLst>
+                <p:tags r:id="rId16"/>
+              </p:custDataLst>
+            </p:nvPr>
+          </p:nvPicPr>
+          <p:blipFill>
+            <a:blip r:embed="rId17">
+              <a:extLst>
+                <a:ext uri="{96DAC541-7B7A-43D3-8B79-37D633B846F1}">
+                  <asvg:svgBlip xmlns:asvg="http://schemas.microsoft.com/office/drawing/2016/SVG/main" r:embed="rId18"/>
+                </a:ext>
+              </a:extLst>
+            </a:blip>
+            <a:stretch>
+              <a:fillRect/>
+            </a:stretch>
+          </p:blipFill>
+          <p:spPr>
+            <a:xfrm>
+              <a:off x="11138" y="1632"/>
+              <a:ext cx="528" cy="528"/>
+            </a:xfrm>
+            <a:prstGeom prst="rect">
+              <a:avLst/>
+            </a:prstGeom>
+          </p:spPr>
+        </p:pic>
+        <p:pic>
+          <p:nvPicPr>
+            <p:cNvPr id="49" name="图片 48" descr="jsonSchema"/>
+            <p:cNvPicPr>
+              <a:picLocks noChangeAspect="1"/>
+            </p:cNvPicPr>
+            <p:nvPr>
+              <p:custDataLst>
+                <p:tags r:id="rId19"/>
+              </p:custDataLst>
+            </p:nvPr>
+          </p:nvPicPr>
+          <p:blipFill>
+            <a:blip r:embed="rId20">
+              <a:extLst>
+                <a:ext uri="{96DAC541-7B7A-43D3-8B79-37D633B846F1}">
+                  <asvg:svgBlip xmlns:asvg="http://schemas.microsoft.com/office/drawing/2016/SVG/main" r:embed="rId21"/>
+                </a:ext>
+              </a:extLst>
+            </a:blip>
+            <a:stretch>
+              <a:fillRect/>
+            </a:stretch>
+          </p:blipFill>
+          <p:spPr>
+            <a:xfrm>
+              <a:off x="11973" y="1583"/>
+              <a:ext cx="664" cy="664"/>
+            </a:xfrm>
+            <a:prstGeom prst="rect">
+              <a:avLst/>
+            </a:prstGeom>
+          </p:spPr>
+        </p:pic>
+      </p:grpSp>
+      <p:cxnSp>
+        <p:nvCxnSpPr>
+          <p:cNvPr id="50" name="直接箭头连接符 49"/>
+          <p:cNvCxnSpPr/>
+          <p:nvPr>
+            <p:custDataLst>
+              <p:tags r:id="rId22"/>
+            </p:custDataLst>
+          </p:nvPr>
+        </p:nvCxnSpPr>
+        <p:spPr>
+          <a:xfrm>
+            <a:off x="3075305" y="1847850"/>
+            <a:ext cx="6350" cy="361950"/>
+          </a:xfrm>
+          <a:prstGeom prst="straightConnector1">
+            <a:avLst/>
+          </a:prstGeom>
+          <a:ln w="15875">
+            <a:solidFill>
+              <a:schemeClr val="tx1"/>
+            </a:solidFill>
+            <a:tailEnd type="arrow"/>
+          </a:ln>
+        </p:spPr>
+        <p:style>
+          <a:lnRef idx="2">
+            <a:schemeClr val="accent1"/>
+          </a:lnRef>
+          <a:fillRef idx="0">
+            <a:srgbClr val="FFFFFF"/>
+          </a:fillRef>
+          <a:effectRef idx="0">
+            <a:srgbClr val="FFFFFF"/>
+          </a:effectRef>
+          <a:fontRef idx="minor">
+            <a:schemeClr val="tx1"/>
+          </a:fontRef>
+        </p:style>
+      </p:cxnSp>
+      <p:sp>
+        <p:nvSpPr>
+          <p:cNvPr id="8" name="圆角矩形 7"/>
+          <p:cNvSpPr/>
+          <p:nvPr/>
+        </p:nvSpPr>
+        <p:spPr>
+          <a:xfrm>
+            <a:off x="2131695" y="3459480"/>
+            <a:ext cx="1893570" cy="2442845"/>
+          </a:xfrm>
+          <a:prstGeom prst="roundRect">
+            <a:avLst>
+              <a:gd name="adj" fmla="val 6812"/>
+            </a:avLst>
+          </a:prstGeom>
+          <a:solidFill>
+            <a:srgbClr val="DEEFFE"/>
+          </a:solidFill>
+          <a:ln>
+            <a:solidFill>
+              <a:schemeClr val="accent1">
+                <a:lumMod val="60000"/>
+                <a:lumOff val="40000"/>
+              </a:schemeClr>
+            </a:solidFill>
+          </a:ln>
+        </p:spPr>
+        <p:style>
+          <a:lnRef idx="2">
+            <a:schemeClr val="accent1">
+              <a:lumMod val="75000"/>
+            </a:schemeClr>
+          </a:lnRef>
+          <a:fillRef idx="1">
+            <a:schemeClr val="accent1"/>
+          </a:fillRef>
+          <a:effectRef idx="0">
+            <a:srgbClr val="FFFFFF"/>
+          </a:effectRef>
+          <a:fontRef idx="minor">
+            <a:schemeClr val="lt1"/>
+          </a:fontRef>
+        </p:style>
+        <p:txBody>
+          <a:bodyPr rtlCol="0" anchor="ctr"/>
+          <a:p>
+            <a:pPr algn="ctr"/>
+            <a:endParaRPr lang="zh-CN" altLang="en-US"/>
+          </a:p>
+        </p:txBody>
+      </p:sp>
+      <p:sp>
+        <p:nvSpPr>
+          <p:cNvPr id="12" name="文本框 11"/>
+          <p:cNvSpPr txBox="1"/>
+          <p:nvPr>
+            <p:custDataLst>
+              <p:tags r:id="rId23"/>
+            </p:custDataLst>
+          </p:nvPr>
+        </p:nvSpPr>
+        <p:spPr>
+          <a:xfrm>
+            <a:off x="2613660" y="3481705"/>
+            <a:ext cx="1828165" cy="275590"/>
+          </a:xfrm>
+          <a:prstGeom prst="rect">
+            <a:avLst/>
+          </a:prstGeom>
+          <a:noFill/>
+        </p:spPr>
+        <p:txBody>
+          <a:bodyPr wrap="square" rtlCol="0">
+            <a:spAutoFit/>
+          </a:bodyPr>
+          <a:p>
+            <a:r>
+              <a:rPr lang="en-US" altLang="zh-CN" sz="1200" u="sng">
+                <a:latin typeface="Times New Roman" panose="02020603050405020304" charset="0"/>
+                <a:cs typeface="Times New Roman" panose="02020603050405020304" charset="0"/>
+              </a:rPr>
+              <a:t>IR2Cryptol Agent</a:t>
+            </a:r>
+            <a:endParaRPr lang="en-US" altLang="zh-CN" sz="1200" u="sng">
+              <a:latin typeface="Times New Roman" panose="02020603050405020304" charset="0"/>
+              <a:cs typeface="Times New Roman" panose="02020603050405020304" charset="0"/>
+            </a:endParaRPr>
+          </a:p>
+        </p:txBody>
+      </p:sp>
+      <p:pic>
+        <p:nvPicPr>
+          <p:cNvPr id="19" name="图片 18"/>
+          <p:cNvPicPr>
+            <a:picLocks noChangeAspect="1"/>
+          </p:cNvPicPr>
+          <p:nvPr>
+            <p:custDataLst>
+              <p:tags r:id="rId24"/>
+            </p:custDataLst>
+          </p:nvPr>
+        </p:nvPicPr>
+        <p:blipFill>
+          <a:blip r:embed="rId25"/>
+          <a:stretch>
+            <a:fillRect/>
+          </a:stretch>
+        </p:blipFill>
+        <p:spPr>
+          <a:xfrm>
+            <a:off x="2152015" y="3509010"/>
+            <a:ext cx="426720" cy="279400"/>
+          </a:xfrm>
+          <a:prstGeom prst="rect">
+            <a:avLst/>
+          </a:prstGeom>
+        </p:spPr>
+      </p:pic>
+      <p:sp>
+        <p:nvSpPr>
+          <p:cNvPr id="2" name="矩形 1"/>
+          <p:cNvSpPr/>
+          <p:nvPr>
+            <p:custDataLst>
+              <p:tags r:id="rId26"/>
+            </p:custDataLst>
+          </p:nvPr>
+        </p:nvSpPr>
+        <p:spPr>
+          <a:xfrm>
+            <a:off x="2263775" y="3965575"/>
+            <a:ext cx="1624330" cy="708025"/>
+          </a:xfrm>
+          <a:prstGeom prst="rect">
+            <a:avLst/>
+          </a:prstGeom>
+          <a:solidFill>
+            <a:schemeClr val="bg1"/>
+          </a:solidFill>
+          <a:ln>
+            <a:solidFill>
+              <a:schemeClr val="tx1"/>
+            </a:solidFill>
+          </a:ln>
+        </p:spPr>
+        <p:style>
+          <a:lnRef idx="2">
+            <a:schemeClr val="accent1">
+              <a:lumMod val="75000"/>
+            </a:schemeClr>
+          </a:lnRef>
+          <a:fillRef idx="1">
+            <a:schemeClr val="accent1"/>
+          </a:fillRef>
+          <a:effectRef idx="0">
+            <a:srgbClr val="FFFFFF"/>
+          </a:effectRef>
+          <a:fontRef idx="minor">
+            <a:schemeClr val="lt1"/>
+          </a:fontRef>
+        </p:style>
+        <p:txBody>
+          <a:bodyPr rtlCol="0" anchor="ctr"/>
+          <a:p>
+            <a:pPr algn="ctr"/>
+            <a:endParaRPr lang="zh-CN" altLang="en-US"/>
+          </a:p>
+        </p:txBody>
+      </p:sp>
+      <p:pic>
+        <p:nvPicPr>
+          <p:cNvPr id="4" name="图片 3" descr="json输入"/>
+          <p:cNvPicPr>
+            <a:picLocks noChangeAspect="1"/>
+          </p:cNvPicPr>
+          <p:nvPr>
+            <p:custDataLst>
+              <p:tags r:id="rId27"/>
+            </p:custDataLst>
+          </p:nvPr>
+        </p:nvPicPr>
+        <p:blipFill>
+          <a:blip r:embed="rId28">
+            <a:extLst>
+              <a:ext uri="{96DAC541-7B7A-43D3-8B79-37D633B846F1}">
+                <asvg:svgBlip xmlns:asvg="http://schemas.microsoft.com/office/drawing/2016/SVG/main" r:embed="rId29"/>
+              </a:ext>
+            </a:extLst>
+          </a:blip>
+          <a:stretch>
+            <a:fillRect/>
+          </a:stretch>
+        </p:blipFill>
+        <p:spPr>
+          <a:xfrm>
+            <a:off x="2885440" y="4040505"/>
+            <a:ext cx="381000" cy="381000"/>
+          </a:xfrm>
+          <a:prstGeom prst="rect">
+            <a:avLst/>
+          </a:prstGeom>
+        </p:spPr>
+      </p:pic>
+      <p:sp>
+        <p:nvSpPr>
+          <p:cNvPr id="10" name="文本框 9"/>
+          <p:cNvSpPr txBox="1"/>
+          <p:nvPr>
+            <p:custDataLst>
+              <p:tags r:id="rId30"/>
+            </p:custDataLst>
+          </p:nvPr>
+        </p:nvSpPr>
+        <p:spPr>
+          <a:xfrm>
+            <a:off x="2687955" y="4459605"/>
+            <a:ext cx="775335" cy="213995"/>
+          </a:xfrm>
+          <a:prstGeom prst="rect">
+            <a:avLst/>
+          </a:prstGeom>
+          <a:noFill/>
+        </p:spPr>
+        <p:txBody>
+          <a:bodyPr wrap="square" rtlCol="0">
+            <a:spAutoFit/>
+          </a:bodyPr>
+          <a:p>
+            <a:pPr algn="ctr"/>
+            <a:r>
+              <a:rPr lang="en-US" altLang="zh-CN" sz="800">
+                <a:latin typeface="Times New Roman" panose="02020603050405020304" charset="0"/>
+                <a:cs typeface="Times New Roman" panose="02020603050405020304" charset="0"/>
+              </a:rPr>
+              <a:t>Retrieved IR</a:t>
+            </a:r>
+            <a:endParaRPr lang="en-US" altLang="zh-CN" sz="800">
+              <a:latin typeface="Times New Roman" panose="02020603050405020304" charset="0"/>
+              <a:cs typeface="Times New Roman" panose="02020603050405020304" charset="0"/>
+            </a:endParaRPr>
+          </a:p>
+        </p:txBody>
+      </p:sp>
+      <p:sp>
+        <p:nvSpPr>
+          <p:cNvPr id="5" name="矩形 4"/>
+          <p:cNvSpPr/>
+          <p:nvPr/>
+        </p:nvSpPr>
+        <p:spPr>
+          <a:xfrm>
+            <a:off x="2263140" y="5009515"/>
+            <a:ext cx="1625600" cy="708025"/>
+          </a:xfrm>
+          <a:prstGeom prst="rect">
+            <a:avLst/>
+          </a:prstGeom>
+          <a:solidFill>
+            <a:schemeClr val="bg1"/>
+          </a:solidFill>
+          <a:ln>
+            <a:solidFill>
+              <a:schemeClr val="tx1"/>
+            </a:solidFill>
+          </a:ln>
+        </p:spPr>
+        <p:style>
+          <a:lnRef idx="2">
+            <a:schemeClr val="accent1">
+              <a:lumMod val="75000"/>
+            </a:schemeClr>
+          </a:lnRef>
+          <a:fillRef idx="1">
+            <a:schemeClr val="accent1"/>
+          </a:fillRef>
+          <a:effectRef idx="0">
+            <a:srgbClr val="FFFFFF"/>
+          </a:effectRef>
+          <a:fontRef idx="minor">
+            <a:schemeClr val="lt1"/>
+          </a:fontRef>
+        </p:style>
+        <p:txBody>
+          <a:bodyPr rtlCol="0" anchor="ctr"/>
+          <a:p>
+            <a:pPr algn="ctr"/>
+            <a:endParaRPr lang="zh-CN" altLang="en-US"/>
+          </a:p>
+        </p:txBody>
+      </p:sp>
+      <p:sp>
+        <p:nvSpPr>
+          <p:cNvPr id="15" name="文本框 14"/>
+          <p:cNvSpPr txBox="1"/>
+          <p:nvPr/>
+        </p:nvSpPr>
+        <p:spPr>
+          <a:xfrm>
+            <a:off x="2263140" y="5501005"/>
+            <a:ext cx="1625600" cy="213995"/>
+          </a:xfrm>
+          <a:prstGeom prst="rect">
+            <a:avLst/>
+          </a:prstGeom>
+          <a:noFill/>
+        </p:spPr>
+        <p:txBody>
+          <a:bodyPr wrap="square" rtlCol="0">
+            <a:spAutoFit/>
+          </a:bodyPr>
+          <a:p>
+            <a:pPr algn="ctr"/>
+            <a:r>
+              <a:rPr lang="en-US" altLang="zh-CN" sz="800">
+                <a:latin typeface="Times New Roman" panose="02020603050405020304" charset="0"/>
+                <a:cs typeface="Times New Roman" panose="02020603050405020304" charset="0"/>
+              </a:rPr>
+              <a:t>Generated Cryptol </a:t>
+            </a:r>
+            <a:r>
+              <a:rPr lang="en-US" altLang="zh-CN" sz="800">
+                <a:latin typeface="Times New Roman" panose="02020603050405020304" charset="0"/>
+                <a:cs typeface="Times New Roman" panose="02020603050405020304" charset="0"/>
+              </a:rPr>
+              <a:t>Code</a:t>
+            </a:r>
+            <a:endParaRPr lang="en-US" altLang="zh-CN" sz="800">
+              <a:latin typeface="Times New Roman" panose="02020603050405020304" charset="0"/>
+              <a:cs typeface="Times New Roman" panose="02020603050405020304" charset="0"/>
+            </a:endParaRPr>
+          </a:p>
+        </p:txBody>
+      </p:sp>
+      <p:pic>
+        <p:nvPicPr>
+          <p:cNvPr id="16" name="图片 15" descr="代码文件"/>
+          <p:cNvPicPr>
+            <a:picLocks noChangeAspect="1"/>
+          </p:cNvPicPr>
+          <p:nvPr/>
+        </p:nvPicPr>
+        <p:blipFill>
+          <a:blip r:embed="rId31">
+            <a:extLst>
+              <a:ext uri="{96DAC541-7B7A-43D3-8B79-37D633B846F1}">
+                <asvg:svgBlip xmlns:asvg="http://schemas.microsoft.com/office/drawing/2016/SVG/main" r:embed="rId32"/>
+              </a:ext>
+            </a:extLst>
+          </a:blip>
+          <a:stretch>
+            <a:fillRect/>
+          </a:stretch>
+        </p:blipFill>
+        <p:spPr>
+          <a:xfrm>
+            <a:off x="2870200" y="5080000"/>
+            <a:ext cx="410845" cy="410845"/>
+          </a:xfrm>
+          <a:prstGeom prst="rect">
+            <a:avLst/>
+          </a:prstGeom>
+        </p:spPr>
+      </p:pic>
+      <p:cxnSp>
+        <p:nvCxnSpPr>
+          <p:cNvPr id="23" name="直接箭头连接符 22"/>
+          <p:cNvCxnSpPr>
+            <a:stCxn id="10" idx="2"/>
+            <a:endCxn id="5" idx="0"/>
+          </p:cNvCxnSpPr>
+          <p:nvPr/>
+        </p:nvCxnSpPr>
+        <p:spPr>
+          <a:xfrm>
+            <a:off x="3075940" y="4673600"/>
+            <a:ext cx="0" cy="335915"/>
+          </a:xfrm>
+          <a:prstGeom prst="straightConnector1">
+            <a:avLst/>
+          </a:prstGeom>
+          <a:ln w="15875">
+            <a:solidFill>
+              <a:srgbClr val="202020"/>
+            </a:solidFill>
+            <a:tailEnd type="arrow"/>
+          </a:ln>
+        </p:spPr>
+        <p:style>
+          <a:lnRef idx="2">
+            <a:schemeClr val="accent1"/>
+          </a:lnRef>
+          <a:fillRef idx="0">
+            <a:srgbClr val="FFFFFF"/>
+          </a:fillRef>
+          <a:effectRef idx="0">
+            <a:srgbClr val="FFFFFF"/>
+          </a:effectRef>
+          <a:fontRef idx="minor">
+            <a:schemeClr val="tx1"/>
+          </a:fontRef>
+        </p:style>
+      </p:cxnSp>
+      <p:pic>
+        <p:nvPicPr>
+          <p:cNvPr id="9" name="图片 8"/>
+          <p:cNvPicPr>
+            <a:picLocks noChangeAspect="1"/>
+          </p:cNvPicPr>
+          <p:nvPr/>
+        </p:nvPicPr>
+        <p:blipFill>
+          <a:blip r:embed="rId33"/>
+          <a:stretch>
+            <a:fillRect/>
+          </a:stretch>
+        </p:blipFill>
+        <p:spPr>
+          <a:xfrm>
+            <a:off x="1838960" y="1726883"/>
+            <a:ext cx="292735" cy="292735"/>
+          </a:xfrm>
+          <a:prstGeom prst="rect">
+            <a:avLst/>
+          </a:prstGeom>
+        </p:spPr>
+      </p:pic>
+      <p:pic>
+        <p:nvPicPr>
+          <p:cNvPr id="13" name="图片 12"/>
+          <p:cNvPicPr>
+            <a:picLocks noChangeAspect="1"/>
+          </p:cNvPicPr>
+          <p:nvPr/>
+        </p:nvPicPr>
+        <p:blipFill>
+          <a:blip r:embed="rId33"/>
+          <a:stretch>
+            <a:fillRect/>
+          </a:stretch>
+        </p:blipFill>
+        <p:spPr>
+          <a:xfrm rot="5400000">
+            <a:off x="2869565" y="3166428"/>
+            <a:ext cx="292735" cy="292735"/>
+          </a:xfrm>
+          <a:prstGeom prst="rect">
+            <a:avLst/>
+          </a:prstGeom>
+        </p:spPr>
+      </p:pic>
+      <p:pic>
+        <p:nvPicPr>
+          <p:cNvPr id="20" name="图片 19"/>
+          <p:cNvPicPr>
+            <a:picLocks noChangeAspect="1"/>
+          </p:cNvPicPr>
+          <p:nvPr/>
+        </p:nvPicPr>
+        <p:blipFill>
+          <a:blip r:embed="rId33"/>
+          <a:stretch>
+            <a:fillRect/>
+          </a:stretch>
+        </p:blipFill>
+        <p:spPr>
+          <a:xfrm>
+            <a:off x="4025265" y="4731068"/>
+            <a:ext cx="292735" cy="292735"/>
+          </a:xfrm>
+          <a:prstGeom prst="rect">
+            <a:avLst/>
+          </a:prstGeom>
+        </p:spPr>
+      </p:pic>
+      <p:grpSp>
+        <p:nvGrpSpPr>
+          <p:cNvPr id="6" name="组合 5"/>
+          <p:cNvGrpSpPr/>
+          <p:nvPr/>
+        </p:nvGrpSpPr>
+        <p:grpSpPr>
+          <a:xfrm>
+            <a:off x="4318000" y="1792605"/>
+            <a:ext cx="6343015" cy="4109720"/>
+            <a:chOff x="4200" y="644"/>
+            <a:chExt cx="9989" cy="6472"/>
+          </a:xfrm>
+        </p:grpSpPr>
+        <p:sp>
+          <p:nvSpPr>
+            <p:cNvPr id="24" name="圆角矩形 23"/>
+            <p:cNvSpPr/>
+            <p:nvPr/>
+          </p:nvSpPr>
+          <p:spPr>
+            <a:xfrm>
+              <a:off x="4200" y="644"/>
+              <a:ext cx="6898" cy="6472"/>
+            </a:xfrm>
+            <a:prstGeom prst="roundRect">
+              <a:avLst>
+                <a:gd name="adj" fmla="val 5717"/>
+              </a:avLst>
+            </a:prstGeom>
+            <a:solidFill>
+              <a:srgbClr val="EDFAF2"/>
+            </a:solidFill>
+            <a:ln>
+              <a:solidFill>
+                <a:schemeClr val="accent4">
+                  <a:lumMod val="40000"/>
+                  <a:lumOff val="60000"/>
+                </a:schemeClr>
+              </a:solidFill>
+            </a:ln>
+          </p:spPr>
+          <p:style>
+            <a:lnRef idx="2">
+              <a:schemeClr val="accent1">
+                <a:lumMod val="75000"/>
+              </a:schemeClr>
+            </a:lnRef>
+            <a:fillRef idx="1">
+              <a:schemeClr val="accent1"/>
+            </a:fillRef>
+            <a:effectRef idx="0">
+              <a:srgbClr val="FFFFFF"/>
+            </a:effectRef>
+            <a:fontRef idx="minor">
+              <a:schemeClr val="lt1"/>
+            </a:fontRef>
+          </p:style>
+          <p:txBody>
+            <a:bodyPr rtlCol="0" anchor="ctr"/>
+            <a:p>
+              <a:pPr algn="ctr"/>
+              <a:endParaRPr lang="zh-CN" altLang="en-US"/>
+            </a:p>
+          </p:txBody>
+        </p:sp>
+        <p:grpSp>
+          <p:nvGrpSpPr>
+            <p:cNvPr id="25" name="组合 24"/>
+            <p:cNvGrpSpPr/>
+            <p:nvPr/>
+          </p:nvGrpSpPr>
+          <p:grpSpPr>
+            <a:xfrm>
+              <a:off x="5433" y="653"/>
+              <a:ext cx="4432" cy="498"/>
+              <a:chOff x="7718" y="2765"/>
+              <a:chExt cx="4432" cy="498"/>
+            </a:xfrm>
+          </p:grpSpPr>
+          <p:sp>
+            <p:nvSpPr>
+              <p:cNvPr id="26" name="文本框 25"/>
+              <p:cNvSpPr txBox="1"/>
+              <p:nvPr/>
+            </p:nvSpPr>
+            <p:spPr>
+              <a:xfrm>
+                <a:off x="7810" y="2765"/>
+                <a:ext cx="4341" cy="483"/>
+              </a:xfrm>
+              <a:prstGeom prst="rect">
+                <a:avLst/>
+              </a:prstGeom>
+              <a:noFill/>
+            </p:spPr>
+            <p:txBody>
+              <a:bodyPr wrap="square" rtlCol="0">
+                <a:spAutoFit/>
+              </a:bodyPr>
+              <a:p>
+                <a:pPr algn="ctr"/>
+                <a:r>
+                  <a:rPr lang="en-US" altLang="zh-CN" sz="1400" u="sng">
+                    <a:solidFill>
+                      <a:schemeClr val="tx1"/>
+                    </a:solidFill>
+                    <a:uFillTx/>
+                    <a:latin typeface="Times New Roman" panose="02020603050405020304" charset="0"/>
+                    <a:cs typeface="Times New Roman" panose="02020603050405020304" charset="0"/>
+                  </a:rPr>
+                  <a:t>Compilation &amp; Fixing Agent</a:t>
+                </a:r>
+                <a:endParaRPr lang="en-US" altLang="zh-CN" sz="1400" u="sng">
+                  <a:solidFill>
+                    <a:schemeClr val="tx1"/>
+                  </a:solidFill>
+                  <a:uFillTx/>
+                  <a:latin typeface="Times New Roman" panose="02020603050405020304" charset="0"/>
+                  <a:cs typeface="Times New Roman" panose="02020603050405020304" charset="0"/>
+                </a:endParaRPr>
+              </a:p>
+            </p:txBody>
+          </p:sp>
+          <p:pic>
+            <p:nvPicPr>
+              <p:cNvPr id="27" name="图片 26"/>
+              <p:cNvPicPr>
+                <a:picLocks noChangeAspect="1"/>
+              </p:cNvPicPr>
+              <p:nvPr/>
+            </p:nvPicPr>
+            <p:blipFill>
+              <a:blip r:embed="rId34"/>
+              <a:srcRect l="2066" t="-1111" r="12672" b="21250"/>
+              <a:stretch>
+                <a:fillRect/>
+              </a:stretch>
+            </p:blipFill>
+            <p:spPr>
+              <a:xfrm>
+                <a:off x="7718" y="2765"/>
+                <a:ext cx="537" cy="499"/>
+              </a:xfrm>
+              <a:prstGeom prst="rect">
+                <a:avLst/>
+              </a:prstGeom>
+            </p:spPr>
+          </p:pic>
+        </p:grpSp>
+        <p:grpSp>
+          <p:nvGrpSpPr>
+            <p:cNvPr id="28" name="组合 27"/>
+            <p:cNvGrpSpPr/>
+            <p:nvPr/>
+          </p:nvGrpSpPr>
+          <p:grpSpPr>
+            <a:xfrm>
+              <a:off x="11613" y="1688"/>
+              <a:ext cx="2343" cy="1502"/>
+              <a:chOff x="10527" y="3670"/>
+              <a:chExt cx="2343" cy="1502"/>
+            </a:xfrm>
+          </p:grpSpPr>
+          <p:sp>
+            <p:nvSpPr>
+              <p:cNvPr id="30" name="圆角矩形 29"/>
+              <p:cNvSpPr/>
+              <p:nvPr/>
+            </p:nvSpPr>
+            <p:spPr>
+              <a:xfrm>
+                <a:off x="10527" y="3670"/>
+                <a:ext cx="2342" cy="1503"/>
+              </a:xfrm>
+              <a:prstGeom prst="roundRect">
+                <a:avLst/>
+              </a:prstGeom>
+              <a:solidFill>
+                <a:schemeClr val="accent3">
+                  <a:lumMod val="20000"/>
+                  <a:lumOff val="80000"/>
+                </a:schemeClr>
+              </a:solidFill>
+              <a:ln>
+                <a:solidFill>
+                  <a:schemeClr val="accent2">
+                    <a:lumMod val="60000"/>
+                    <a:lumOff val="40000"/>
+                  </a:schemeClr>
+                </a:solidFill>
+              </a:ln>
+            </p:spPr>
+            <p:style>
+              <a:lnRef idx="2">
+                <a:schemeClr val="accent1">
+                  <a:lumMod val="75000"/>
+                </a:schemeClr>
+              </a:lnRef>
+              <a:fillRef idx="1">
+                <a:schemeClr val="accent1"/>
+              </a:fillRef>
+              <a:effectRef idx="0">
+                <a:srgbClr val="FFFFFF"/>
+              </a:effectRef>
+              <a:fontRef idx="minor">
+                <a:schemeClr val="lt1"/>
+              </a:fontRef>
+            </p:style>
+            <p:txBody>
+              <a:bodyPr rtlCol="0" anchor="ctr"/>
+              <a:p>
+                <a:pPr algn="ctr"/>
+                <a:endParaRPr lang="zh-CN" altLang="en-US"/>
+              </a:p>
+            </p:txBody>
+          </p:sp>
+          <p:pic>
+            <p:nvPicPr>
+              <p:cNvPr id="33" name="图片 32"/>
+              <p:cNvPicPr>
+                <a:picLocks noChangeAspect="1"/>
+              </p:cNvPicPr>
+              <p:nvPr/>
+            </p:nvPicPr>
+            <p:blipFill>
+              <a:blip r:embed="rId35"/>
+              <a:stretch>
+                <a:fillRect/>
+              </a:stretch>
+            </p:blipFill>
+            <p:spPr>
+              <a:xfrm>
+                <a:off x="10648" y="4493"/>
+                <a:ext cx="468" cy="468"/>
+              </a:xfrm>
+              <a:prstGeom prst="rect">
+                <a:avLst/>
+              </a:prstGeom>
+            </p:spPr>
+          </p:pic>
+          <p:sp>
+            <p:nvSpPr>
+              <p:cNvPr id="38" name="文本框 37"/>
+              <p:cNvSpPr txBox="1"/>
+              <p:nvPr/>
+            </p:nvSpPr>
+            <p:spPr>
+              <a:xfrm>
+                <a:off x="10527" y="3670"/>
+                <a:ext cx="2343" cy="531"/>
+              </a:xfrm>
+              <a:prstGeom prst="rect">
+                <a:avLst/>
+              </a:prstGeom>
+              <a:noFill/>
+            </p:spPr>
+            <p:txBody>
+              <a:bodyPr wrap="square" rtlCol="0">
+                <a:spAutoFit/>
+              </a:bodyPr>
+              <a:p>
+                <a:pPr algn="ctr"/>
+                <a:r>
+                  <a:rPr lang="en-US" altLang="zh-CN" sz="1600">
+                    <a:latin typeface="Times New Roman" panose="02020603050405020304" charset="0"/>
+                    <a:cs typeface="Times New Roman" panose="02020603050405020304" charset="0"/>
+                  </a:rPr>
+                  <a:t>Output</a:t>
+                </a:r>
+                <a:endParaRPr lang="en-US" altLang="zh-CN" sz="1600">
+                  <a:latin typeface="Times New Roman" panose="02020603050405020304" charset="0"/>
+                  <a:cs typeface="Times New Roman" panose="02020603050405020304" charset="0"/>
+                </a:endParaRPr>
+              </a:p>
+            </p:txBody>
+          </p:sp>
+          <p:sp>
+            <p:nvSpPr>
+              <p:cNvPr id="44" name="文本框 43"/>
+              <p:cNvSpPr txBox="1"/>
+              <p:nvPr/>
+            </p:nvSpPr>
+            <p:spPr>
+              <a:xfrm>
+                <a:off x="11116" y="4447"/>
+                <a:ext cx="1755" cy="628"/>
+              </a:xfrm>
+              <a:prstGeom prst="rect">
+                <a:avLst/>
+              </a:prstGeom>
+              <a:noFill/>
+            </p:spPr>
+            <p:txBody>
+              <a:bodyPr wrap="square" rtlCol="0">
+                <a:spAutoFit/>
+              </a:bodyPr>
+              <a:p>
+                <a:r>
+                  <a:rPr lang="en-US" altLang="zh-CN" sz="1000">
+                    <a:latin typeface="Times New Roman" panose="02020603050405020304" charset="0"/>
+                    <a:cs typeface="Times New Roman" panose="02020603050405020304" charset="0"/>
+                  </a:rPr>
+                  <a:t>Final Cryptol Code</a:t>
+                </a:r>
+                <a:endParaRPr lang="en-US" altLang="zh-CN" sz="1000">
+                  <a:latin typeface="Times New Roman" panose="02020603050405020304" charset="0"/>
+                  <a:cs typeface="Times New Roman" panose="02020603050405020304" charset="0"/>
+                </a:endParaRPr>
+              </a:p>
+            </p:txBody>
+          </p:sp>
+        </p:grpSp>
+        <p:grpSp>
+          <p:nvGrpSpPr>
+            <p:cNvPr id="51" name="组合 50"/>
+            <p:cNvGrpSpPr/>
+            <p:nvPr/>
+          </p:nvGrpSpPr>
+          <p:grpSpPr>
+            <a:xfrm>
+              <a:off x="11733" y="4953"/>
+              <a:ext cx="2456" cy="1605"/>
+              <a:chOff x="10526" y="5374"/>
+              <a:chExt cx="2456" cy="1605"/>
+            </a:xfrm>
+          </p:grpSpPr>
+          <p:sp>
+            <p:nvSpPr>
+              <p:cNvPr id="55" name="圆角矩形 54"/>
+              <p:cNvSpPr/>
+              <p:nvPr/>
+            </p:nvSpPr>
+            <p:spPr>
+              <a:xfrm>
+                <a:off x="10526" y="5374"/>
+                <a:ext cx="2343" cy="1605"/>
+              </a:xfrm>
+              <a:prstGeom prst="roundRect">
+                <a:avLst/>
+              </a:prstGeom>
+              <a:solidFill>
+                <a:schemeClr val="accent6">
+                  <a:lumMod val="20000"/>
+                  <a:lumOff val="80000"/>
+                </a:schemeClr>
+              </a:solidFill>
+              <a:ln>
+                <a:solidFill>
+                  <a:schemeClr val="accent6">
+                    <a:lumMod val="40000"/>
+                    <a:lumOff val="60000"/>
+                  </a:schemeClr>
+                </a:solidFill>
+              </a:ln>
+            </p:spPr>
+            <p:style>
+              <a:lnRef idx="2">
+                <a:schemeClr val="accent1">
+                  <a:lumMod val="75000"/>
+                </a:schemeClr>
+              </a:lnRef>
+              <a:fillRef idx="1">
+                <a:schemeClr val="accent1"/>
+              </a:fillRef>
+              <a:effectRef idx="0">
+                <a:srgbClr val="FFFFFF"/>
+              </a:effectRef>
+              <a:fontRef idx="minor">
+                <a:schemeClr val="lt1"/>
+              </a:fontRef>
+            </p:style>
+            <p:txBody>
+              <a:bodyPr rtlCol="0" anchor="ctr"/>
+              <a:p>
+                <a:pPr algn="ctr"/>
+                <a:endParaRPr lang="zh-CN" altLang="en-US"/>
+              </a:p>
+            </p:txBody>
+          </p:sp>
+          <p:sp>
+            <p:nvSpPr>
+              <p:cNvPr id="56" name="文本框 55"/>
+              <p:cNvSpPr txBox="1"/>
+              <p:nvPr/>
+            </p:nvSpPr>
+            <p:spPr>
+              <a:xfrm>
+                <a:off x="10527" y="5476"/>
+                <a:ext cx="2343" cy="531"/>
+              </a:xfrm>
+              <a:prstGeom prst="rect">
+                <a:avLst/>
+              </a:prstGeom>
+              <a:noFill/>
+            </p:spPr>
+            <p:txBody>
+              <a:bodyPr wrap="square" rtlCol="0">
+                <a:spAutoFit/>
+              </a:bodyPr>
+              <a:p>
+                <a:pPr algn="ctr"/>
+                <a:r>
+                  <a:rPr lang="en-US" altLang="zh-CN" sz="1600">
+                    <a:latin typeface="Times New Roman" panose="02020603050405020304" charset="0"/>
+                    <a:cs typeface="Times New Roman" panose="02020603050405020304" charset="0"/>
+                  </a:rPr>
+                  <a:t>Failure Output</a:t>
+                </a:r>
+                <a:endParaRPr lang="en-US" altLang="zh-CN" sz="1600">
+                  <a:latin typeface="Times New Roman" panose="02020603050405020304" charset="0"/>
+                  <a:cs typeface="Times New Roman" panose="02020603050405020304" charset="0"/>
+                </a:endParaRPr>
+              </a:p>
+            </p:txBody>
+          </p:sp>
+          <p:sp>
+            <p:nvSpPr>
+              <p:cNvPr id="62" name="文本框 61"/>
+              <p:cNvSpPr txBox="1"/>
+              <p:nvPr/>
+            </p:nvSpPr>
+            <p:spPr>
+              <a:xfrm>
+                <a:off x="11115" y="6228"/>
+                <a:ext cx="1867" cy="751"/>
+              </a:xfrm>
+              <a:prstGeom prst="rect">
+                <a:avLst/>
+              </a:prstGeom>
+              <a:noFill/>
+            </p:spPr>
+            <p:txBody>
+              <a:bodyPr wrap="square" rtlCol="0">
+                <a:noAutofit/>
+              </a:bodyPr>
+              <a:p>
+                <a:r>
+                  <a:rPr lang="en-US" altLang="zh-CN" sz="1000">
+                    <a:latin typeface="Times New Roman" panose="02020603050405020304" charset="0"/>
+                    <a:cs typeface="Times New Roman" panose="02020603050405020304" charset="0"/>
+                  </a:rPr>
+                  <a:t>Code with compilation errors</a:t>
+                </a:r>
+                <a:endParaRPr lang="en-US" altLang="zh-CN" sz="1000">
+                  <a:latin typeface="Times New Roman" panose="02020603050405020304" charset="0"/>
+                  <a:cs typeface="Times New Roman" panose="02020603050405020304" charset="0"/>
+                </a:endParaRPr>
+              </a:p>
+            </p:txBody>
+          </p:sp>
+          <p:pic>
+            <p:nvPicPr>
+              <p:cNvPr id="63" name="图片 62"/>
+              <p:cNvPicPr>
+                <a:picLocks noChangeAspect="1"/>
+              </p:cNvPicPr>
+              <p:nvPr/>
+            </p:nvPicPr>
+            <p:blipFill>
+              <a:blip r:embed="rId36"/>
+              <a:stretch>
+                <a:fillRect/>
+              </a:stretch>
+            </p:blipFill>
+            <p:spPr>
+              <a:xfrm>
+                <a:off x="10635" y="6299"/>
+                <a:ext cx="480" cy="480"/>
+              </a:xfrm>
+              <a:prstGeom prst="rect">
+                <a:avLst/>
+              </a:prstGeom>
+            </p:spPr>
+          </p:pic>
+        </p:grpSp>
+        <p:grpSp>
+          <p:nvGrpSpPr>
+            <p:cNvPr id="64" name="组合 63"/>
+            <p:cNvGrpSpPr/>
+            <p:nvPr/>
+          </p:nvGrpSpPr>
+          <p:grpSpPr>
+            <a:xfrm>
+              <a:off x="5046" y="1424"/>
+              <a:ext cx="2578" cy="1326"/>
+              <a:chOff x="5656" y="5642"/>
+              <a:chExt cx="2578" cy="1326"/>
+            </a:xfrm>
+          </p:grpSpPr>
+          <p:sp>
+            <p:nvSpPr>
+              <p:cNvPr id="65" name="矩形 64"/>
+              <p:cNvSpPr/>
+              <p:nvPr>
+                <p:custDataLst>
+                  <p:tags r:id="rId37"/>
+                </p:custDataLst>
+              </p:nvPr>
+            </p:nvSpPr>
+            <p:spPr>
+              <a:xfrm>
+                <a:off x="5656" y="6014"/>
+                <a:ext cx="2558" cy="954"/>
+              </a:xfrm>
+              <a:prstGeom prst="rect">
+                <a:avLst/>
+              </a:prstGeom>
+              <a:solidFill>
+                <a:schemeClr val="bg1"/>
+              </a:solidFill>
+              <a:ln>
+                <a:solidFill>
+                  <a:schemeClr val="tx1"/>
+                </a:solidFill>
+              </a:ln>
+            </p:spPr>
+            <p:style>
+              <a:lnRef idx="2">
+                <a:schemeClr val="accent1">
+                  <a:lumMod val="75000"/>
+                </a:schemeClr>
+              </a:lnRef>
+              <a:fillRef idx="1">
+                <a:schemeClr val="accent1"/>
+              </a:fillRef>
+              <a:effectRef idx="0">
+                <a:srgbClr val="FFFFFF"/>
+              </a:effectRef>
+              <a:fontRef idx="minor">
+                <a:schemeClr val="lt1"/>
+              </a:fontRef>
+            </p:style>
+            <p:txBody>
+              <a:bodyPr rtlCol="0" anchor="ctr"/>
+              <a:p>
+                <a:pPr algn="ctr"/>
+                <a:endParaRPr lang="zh-CN" altLang="en-US"/>
+              </a:p>
+            </p:txBody>
+          </p:sp>
+          <p:pic>
+            <p:nvPicPr>
+              <p:cNvPr id="66" name="图片 65"/>
+              <p:cNvPicPr>
+                <a:picLocks noChangeAspect="1"/>
+              </p:cNvPicPr>
+              <p:nvPr>
+                <p:custDataLst>
+                  <p:tags r:id="rId38"/>
+                </p:custDataLst>
+              </p:nvPr>
+            </p:nvPicPr>
+            <p:blipFill>
+              <a:blip r:embed="rId39"/>
+              <a:stretch>
+                <a:fillRect/>
+              </a:stretch>
+            </p:blipFill>
+            <p:spPr>
+              <a:xfrm>
+                <a:off x="6651" y="6080"/>
+                <a:ext cx="567" cy="567"/>
+              </a:xfrm>
+              <a:prstGeom prst="rect">
+                <a:avLst/>
+              </a:prstGeom>
+            </p:spPr>
+          </p:pic>
+          <p:sp>
+            <p:nvSpPr>
+              <p:cNvPr id="67" name="文本框 66"/>
+              <p:cNvSpPr txBox="1"/>
+              <p:nvPr>
+                <p:custDataLst>
+                  <p:tags r:id="rId40"/>
+                </p:custDataLst>
+              </p:nvPr>
+            </p:nvSpPr>
+            <p:spPr>
+              <a:xfrm>
+                <a:off x="5676" y="6581"/>
+                <a:ext cx="2558" cy="386"/>
+              </a:xfrm>
+              <a:prstGeom prst="rect">
+                <a:avLst/>
+              </a:prstGeom>
+              <a:noFill/>
+            </p:spPr>
+            <p:txBody>
+              <a:bodyPr wrap="square" rtlCol="0">
+                <a:spAutoFit/>
+              </a:bodyPr>
+              <a:p>
+                <a:pPr algn="ctr"/>
+                <a:r>
+                  <a:rPr lang="en-US" altLang="zh-CN" sz="1000">
+                    <a:latin typeface="Times New Roman" panose="02020603050405020304" charset="0"/>
+                    <a:cs typeface="Times New Roman" panose="02020603050405020304" charset="0"/>
+                  </a:rPr>
+                  <a:t>Compile </a:t>
+                </a:r>
+                <a:r>
+                  <a:rPr lang="en-US" altLang="zh-CN" sz="1000">
+                    <a:latin typeface="Times New Roman" panose="02020603050405020304" charset="0"/>
+                    <a:cs typeface="Times New Roman" panose="02020603050405020304" charset="0"/>
+                  </a:rPr>
+                  <a:t>Code</a:t>
+                </a:r>
+                <a:endParaRPr lang="en-US" altLang="zh-CN" sz="1000">
+                  <a:latin typeface="Times New Roman" panose="02020603050405020304" charset="0"/>
+                  <a:cs typeface="Times New Roman" panose="02020603050405020304" charset="0"/>
+                </a:endParaRPr>
+              </a:p>
+            </p:txBody>
+          </p:sp>
+          <p:sp>
+            <p:nvSpPr>
+              <p:cNvPr id="68" name="矩形 67"/>
+              <p:cNvSpPr/>
+              <p:nvPr/>
+            </p:nvSpPr>
+            <p:spPr>
+              <a:xfrm>
+                <a:off x="5656" y="5642"/>
+                <a:ext cx="2559" cy="365"/>
+              </a:xfrm>
+              <a:prstGeom prst="rect">
+                <a:avLst/>
+              </a:prstGeom>
+              <a:solidFill>
+                <a:srgbClr val="EDFAF2"/>
+              </a:solidFill>
+              <a:ln>
+                <a:solidFill>
+                  <a:srgbClr val="323232"/>
+                </a:solidFill>
+              </a:ln>
+            </p:spPr>
+            <p:style>
+              <a:lnRef idx="2">
+                <a:schemeClr val="accent1">
+                  <a:lumMod val="75000"/>
+                </a:schemeClr>
+              </a:lnRef>
+              <a:fillRef idx="1">
+                <a:schemeClr val="accent1"/>
+              </a:fillRef>
+              <a:effectRef idx="0">
+                <a:srgbClr val="FFFFFF"/>
+              </a:effectRef>
+              <a:fontRef idx="minor">
+                <a:schemeClr val="lt1"/>
+              </a:fontRef>
+            </p:style>
+            <p:txBody>
+              <a:bodyPr rtlCol="0" anchor="ctr"/>
+              <a:p>
+                <a:pPr algn="ctr"/>
+                <a:r>
+                  <a:rPr lang="en-US" altLang="zh-CN" sz="1000">
+                    <a:solidFill>
+                      <a:schemeClr val="tx1"/>
+                    </a:solidFill>
+                    <a:latin typeface="Times New Roman" panose="02020603050405020304" charset="0"/>
+                    <a:cs typeface="Times New Roman" panose="02020603050405020304" charset="0"/>
+                    <a:sym typeface="+mn-ea"/>
+                  </a:rPr>
+                  <a:t>Step1: Compile Code</a:t>
+                </a:r>
+                <a:endParaRPr lang="en-US" altLang="zh-CN" sz="1000">
+                  <a:solidFill>
+                    <a:schemeClr val="tx1"/>
+                  </a:solidFill>
+                  <a:latin typeface="Times New Roman" panose="02020603050405020304" charset="0"/>
+                  <a:cs typeface="Times New Roman" panose="02020603050405020304" charset="0"/>
+                  <a:sym typeface="+mn-ea"/>
+                </a:endParaRPr>
+              </a:p>
+            </p:txBody>
+          </p:sp>
+        </p:grpSp>
+        <p:grpSp>
+          <p:nvGrpSpPr>
+            <p:cNvPr id="69" name="组合 68"/>
+            <p:cNvGrpSpPr/>
+            <p:nvPr/>
+          </p:nvGrpSpPr>
+          <p:grpSpPr>
+            <a:xfrm>
+              <a:off x="5046" y="5055"/>
+              <a:ext cx="2579" cy="1326"/>
+              <a:chOff x="5657" y="3437"/>
+              <a:chExt cx="2578" cy="1326"/>
+            </a:xfrm>
+          </p:grpSpPr>
+          <p:sp>
+            <p:nvSpPr>
+              <p:cNvPr id="70" name="矩形 69"/>
+              <p:cNvSpPr/>
+              <p:nvPr>
+                <p:custDataLst>
+                  <p:tags r:id="rId41"/>
+                </p:custDataLst>
+              </p:nvPr>
+            </p:nvSpPr>
+            <p:spPr>
+              <a:xfrm>
+                <a:off x="5657" y="3809"/>
+                <a:ext cx="2558" cy="954"/>
+              </a:xfrm>
+              <a:prstGeom prst="rect">
+                <a:avLst/>
+              </a:prstGeom>
+              <a:solidFill>
+                <a:schemeClr val="bg1"/>
+              </a:solidFill>
+              <a:ln>
+                <a:solidFill>
+                  <a:schemeClr val="tx1"/>
+                </a:solidFill>
+              </a:ln>
+            </p:spPr>
+            <p:style>
+              <a:lnRef idx="2">
+                <a:schemeClr val="accent1">
+                  <a:lumMod val="75000"/>
+                </a:schemeClr>
+              </a:lnRef>
+              <a:fillRef idx="1">
+                <a:schemeClr val="accent1"/>
+              </a:fillRef>
+              <a:effectRef idx="0">
+                <a:srgbClr val="FFFFFF"/>
+              </a:effectRef>
+              <a:fontRef idx="minor">
+                <a:schemeClr val="lt1"/>
+              </a:fontRef>
+            </p:style>
+            <p:txBody>
+              <a:bodyPr rtlCol="0" anchor="ctr"/>
+              <a:p>
+                <a:pPr algn="ctr"/>
+                <a:endParaRPr lang="zh-CN" altLang="en-US"/>
+              </a:p>
+            </p:txBody>
+          </p:sp>
+          <p:sp>
+            <p:nvSpPr>
+              <p:cNvPr id="71" name="文本框 70"/>
+              <p:cNvSpPr txBox="1"/>
+              <p:nvPr>
+                <p:custDataLst>
+                  <p:tags r:id="rId42"/>
+                </p:custDataLst>
+              </p:nvPr>
+            </p:nvSpPr>
+            <p:spPr>
+              <a:xfrm>
+                <a:off x="5677" y="4376"/>
+                <a:ext cx="2558" cy="386"/>
+              </a:xfrm>
+              <a:prstGeom prst="rect">
+                <a:avLst/>
+              </a:prstGeom>
+              <a:noFill/>
+            </p:spPr>
+            <p:txBody>
+              <a:bodyPr wrap="square" rtlCol="0">
+                <a:spAutoFit/>
+              </a:bodyPr>
+              <a:p>
+                <a:pPr algn="ctr"/>
+                <a:r>
+                  <a:rPr lang="en-US" altLang="zh-CN" sz="1000">
+                    <a:latin typeface="Times New Roman" panose="02020603050405020304" charset="0"/>
+                    <a:cs typeface="Times New Roman" panose="02020603050405020304" charset="0"/>
+                  </a:rPr>
+                  <a:t>Fix Generated Code</a:t>
+                </a:r>
+                <a:endParaRPr lang="en-US" altLang="zh-CN" sz="1000">
+                  <a:latin typeface="Times New Roman" panose="02020603050405020304" charset="0"/>
+                  <a:cs typeface="Times New Roman" panose="02020603050405020304" charset="0"/>
+                </a:endParaRPr>
+              </a:p>
+            </p:txBody>
+          </p:sp>
+          <p:sp>
+            <p:nvSpPr>
+              <p:cNvPr id="72" name="矩形 71"/>
+              <p:cNvSpPr/>
+              <p:nvPr/>
+            </p:nvSpPr>
+            <p:spPr>
+              <a:xfrm>
+                <a:off x="5657" y="3437"/>
+                <a:ext cx="2559" cy="365"/>
+              </a:xfrm>
+              <a:prstGeom prst="rect">
+                <a:avLst/>
+              </a:prstGeom>
+              <a:solidFill>
+                <a:srgbClr val="EDFAF2"/>
+              </a:solidFill>
+              <a:ln>
+                <a:solidFill>
+                  <a:srgbClr val="323232"/>
+                </a:solidFill>
+              </a:ln>
+            </p:spPr>
+            <p:style>
+              <a:lnRef idx="2">
+                <a:schemeClr val="accent1">
+                  <a:lumMod val="75000"/>
+                </a:schemeClr>
+              </a:lnRef>
+              <a:fillRef idx="1">
+                <a:schemeClr val="accent1"/>
+              </a:fillRef>
+              <a:effectRef idx="0">
+                <a:srgbClr val="FFFFFF"/>
+              </a:effectRef>
+              <a:fontRef idx="minor">
+                <a:schemeClr val="lt1"/>
+              </a:fontRef>
+            </p:style>
+            <p:txBody>
+              <a:bodyPr rtlCol="0" anchor="ctr"/>
+              <a:p>
+                <a:pPr algn="ctr"/>
+                <a:r>
+                  <a:rPr lang="en-US" altLang="zh-CN" sz="1000">
+                    <a:solidFill>
+                      <a:schemeClr val="tx1"/>
+                    </a:solidFill>
+                    <a:latin typeface="Times New Roman" panose="02020603050405020304" charset="0"/>
+                    <a:cs typeface="Times New Roman" panose="02020603050405020304" charset="0"/>
+                    <a:sym typeface="+mn-ea"/>
+                  </a:rPr>
+                  <a:t>Step2: Fix Generated Code</a:t>
+                </a:r>
+                <a:endParaRPr lang="en-US" altLang="zh-CN" sz="1000">
+                  <a:solidFill>
+                    <a:schemeClr val="tx1"/>
+                  </a:solidFill>
+                  <a:latin typeface="Times New Roman" panose="02020603050405020304" charset="0"/>
+                  <a:cs typeface="Times New Roman" panose="02020603050405020304" charset="0"/>
+                  <a:sym typeface="+mn-ea"/>
+                </a:endParaRPr>
+              </a:p>
+            </p:txBody>
+          </p:sp>
+          <p:pic>
+            <p:nvPicPr>
+              <p:cNvPr id="73" name="图片 72"/>
+              <p:cNvPicPr>
+                <a:picLocks noChangeAspect="1"/>
+              </p:cNvPicPr>
+              <p:nvPr>
+                <p:custDataLst>
+                  <p:tags r:id="rId43"/>
+                </p:custDataLst>
+              </p:nvPr>
+            </p:nvPicPr>
+            <p:blipFill>
+              <a:blip r:embed="rId44"/>
+              <a:stretch>
+                <a:fillRect/>
+              </a:stretch>
+            </p:blipFill>
+            <p:spPr>
+              <a:xfrm>
+                <a:off x="6652" y="3848"/>
+                <a:ext cx="506" cy="506"/>
+              </a:xfrm>
+              <a:prstGeom prst="rect">
+                <a:avLst/>
+              </a:prstGeom>
+            </p:spPr>
+          </p:pic>
+        </p:grpSp>
+        <p:sp>
+          <p:nvSpPr>
+            <p:cNvPr id="74" name="菱形 73"/>
+            <p:cNvSpPr/>
+            <p:nvPr/>
+          </p:nvSpPr>
+          <p:spPr>
+            <a:xfrm>
+              <a:off x="5047" y="3323"/>
+              <a:ext cx="2559" cy="1044"/>
+            </a:xfrm>
+            <a:prstGeom prst="diamond">
+              <a:avLst/>
+            </a:prstGeom>
+            <a:solidFill>
+              <a:schemeClr val="bg1"/>
+            </a:solidFill>
+            <a:ln>
+              <a:solidFill>
+                <a:schemeClr val="tx1"/>
+              </a:solidFill>
+            </a:ln>
+          </p:spPr>
+          <p:style>
+            <a:lnRef idx="2">
+              <a:schemeClr val="accent1">
+                <a:lumMod val="75000"/>
+              </a:schemeClr>
+            </a:lnRef>
+            <a:fillRef idx="1">
+              <a:schemeClr val="accent1"/>
+            </a:fillRef>
+            <a:effectRef idx="0">
+              <a:srgbClr val="FFFFFF"/>
+            </a:effectRef>
+            <a:fontRef idx="minor">
+              <a:schemeClr val="lt1"/>
+            </a:fontRef>
+          </p:style>
+          <p:txBody>
+            <a:bodyPr rtlCol="0" anchor="ctr"/>
+            <a:p>
+              <a:pPr algn="ctr"/>
+              <a:r>
+                <a:rPr lang="en-US" altLang="zh-CN" sz="1000">
+                  <a:solidFill>
+                    <a:schemeClr val="tx1"/>
+                  </a:solidFill>
+                  <a:latin typeface="Times New Roman" panose="02020603050405020304" charset="0"/>
+                  <a:cs typeface="Times New Roman" panose="02020603050405020304" charset="0"/>
+                </a:rPr>
+                <a:t>successful</a:t>
+              </a:r>
+              <a:r>
+                <a:rPr lang="zh-CN" altLang="en-US" sz="1000">
+                  <a:solidFill>
+                    <a:schemeClr val="tx1"/>
+                  </a:solidFill>
+                  <a:latin typeface="Times New Roman" panose="02020603050405020304" charset="0"/>
+                  <a:cs typeface="Times New Roman" panose="02020603050405020304" charset="0"/>
+                </a:rPr>
+                <a:t>？</a:t>
+              </a:r>
+              <a:endParaRPr lang="zh-CN" altLang="en-US" sz="1000">
+                <a:solidFill>
+                  <a:schemeClr val="tx1"/>
+                </a:solidFill>
+                <a:latin typeface="Times New Roman" panose="02020603050405020304" charset="0"/>
+                <a:cs typeface="Times New Roman" panose="02020603050405020304" charset="0"/>
+              </a:endParaRPr>
+            </a:p>
+          </p:txBody>
+        </p:sp>
+        <p:grpSp>
+          <p:nvGrpSpPr>
+            <p:cNvPr id="75" name="组合 74"/>
+            <p:cNvGrpSpPr/>
+            <p:nvPr/>
+          </p:nvGrpSpPr>
+          <p:grpSpPr>
+            <a:xfrm>
+              <a:off x="8265" y="5233"/>
+              <a:ext cx="2558" cy="1044"/>
+              <a:chOff x="14688" y="2214"/>
+              <a:chExt cx="2558" cy="1044"/>
+            </a:xfrm>
+          </p:grpSpPr>
+          <p:sp>
+            <p:nvSpPr>
+              <p:cNvPr id="76" name="菱形 75"/>
+              <p:cNvSpPr/>
+              <p:nvPr/>
+            </p:nvSpPr>
+            <p:spPr>
+              <a:xfrm>
+                <a:off x="14688" y="2214"/>
+                <a:ext cx="2559" cy="1044"/>
+              </a:xfrm>
+              <a:prstGeom prst="diamond">
+                <a:avLst/>
+              </a:prstGeom>
+              <a:solidFill>
+                <a:schemeClr val="bg1"/>
+              </a:solidFill>
+              <a:ln>
+                <a:solidFill>
+                  <a:schemeClr val="tx1"/>
+                </a:solidFill>
+              </a:ln>
+            </p:spPr>
+            <p:style>
+              <a:lnRef idx="2">
+                <a:schemeClr val="accent1">
+                  <a:lumMod val="75000"/>
+                </a:schemeClr>
+              </a:lnRef>
+              <a:fillRef idx="1">
+                <a:schemeClr val="accent1"/>
+              </a:fillRef>
+              <a:effectRef idx="0">
+                <a:srgbClr val="FFFFFF"/>
+              </a:effectRef>
+              <a:fontRef idx="minor">
+                <a:schemeClr val="lt1"/>
+              </a:fontRef>
+            </p:style>
+            <p:txBody>
+              <a:bodyPr rtlCol="0" anchor="ctr"/>
+              <a:p>
+                <a:pPr algn="ctr"/>
+                <a:endParaRPr lang="zh-CN" altLang="en-US" sz="1000">
+                  <a:solidFill>
+                    <a:schemeClr val="tx1"/>
+                  </a:solidFill>
+                  <a:latin typeface="Times New Roman" panose="02020603050405020304" charset="0"/>
+                  <a:cs typeface="Times New Roman" panose="02020603050405020304" charset="0"/>
+                </a:endParaRPr>
+              </a:p>
+            </p:txBody>
+          </p:sp>
+          <p:sp>
+            <p:nvSpPr>
+              <p:cNvPr id="77" name="文本框 76"/>
+              <p:cNvSpPr txBox="1"/>
+              <p:nvPr/>
+            </p:nvSpPr>
+            <p:spPr>
+              <a:xfrm>
+                <a:off x="15357" y="2430"/>
+                <a:ext cx="1491" cy="628"/>
+              </a:xfrm>
+              <a:prstGeom prst="rect">
+                <a:avLst/>
+              </a:prstGeom>
+              <a:noFill/>
+            </p:spPr>
+            <p:txBody>
+              <a:bodyPr wrap="square" rtlCol="0">
+                <a:spAutoFit/>
+              </a:bodyPr>
+              <a:p>
+                <a:r>
+                  <a:rPr lang="en-US" altLang="zh-CN" sz="1000">
+                    <a:latin typeface="Times New Roman" panose="02020603050405020304" charset="0"/>
+                    <a:cs typeface="Times New Roman" panose="02020603050405020304" charset="0"/>
+                  </a:rPr>
+                  <a:t>Retry Limited Reached </a:t>
+                </a:r>
+                <a:r>
+                  <a:rPr lang="zh-CN" altLang="en-US" sz="1000">
+                    <a:latin typeface="Times New Roman" panose="02020603050405020304" charset="0"/>
+                    <a:cs typeface="Times New Roman" panose="02020603050405020304" charset="0"/>
+                  </a:rPr>
+                  <a:t>？</a:t>
+                </a:r>
+                <a:endParaRPr lang="zh-CN" altLang="en-US" sz="1000">
+                  <a:latin typeface="Times New Roman" panose="02020603050405020304" charset="0"/>
+                  <a:cs typeface="Times New Roman" panose="02020603050405020304" charset="0"/>
+                </a:endParaRPr>
+              </a:p>
+            </p:txBody>
+          </p:sp>
+        </p:grpSp>
+        <p:cxnSp>
+          <p:nvCxnSpPr>
+            <p:cNvPr id="78" name="曲线连接符 77"/>
+            <p:cNvCxnSpPr>
+              <a:endCxn id="74" idx="0"/>
+            </p:cNvCxnSpPr>
+            <p:nvPr/>
+          </p:nvCxnSpPr>
+          <p:spPr>
+            <a:xfrm rot="5400000" flipV="1">
+              <a:off x="6037" y="3033"/>
+              <a:ext cx="574" cy="5"/>
+            </a:xfrm>
+            <a:prstGeom prst="curvedConnector2">
+              <a:avLst/>
+            </a:prstGeom>
+            <a:ln w="19050" cap="flat" cmpd="sng">
+              <a:solidFill>
+                <a:schemeClr val="tx1"/>
+              </a:solidFill>
+              <a:tailEnd type="arrow"/>
+            </a:ln>
+          </p:spPr>
+          <p:style>
+            <a:lnRef idx="2">
+              <a:schemeClr val="accent1"/>
+            </a:lnRef>
+            <a:fillRef idx="0">
+              <a:srgbClr val="FFFFFF"/>
+            </a:fillRef>
+            <a:effectRef idx="0">
+              <a:srgbClr val="FFFFFF"/>
+            </a:effectRef>
+            <a:fontRef idx="minor">
+              <a:schemeClr val="tx1"/>
+            </a:fontRef>
+          </p:style>
+        </p:cxnSp>
+        <p:cxnSp>
+          <p:nvCxnSpPr>
+            <p:cNvPr id="79" name="肘形连接符 78"/>
+            <p:cNvCxnSpPr/>
+            <p:nvPr/>
+          </p:nvCxnSpPr>
+          <p:spPr>
+            <a:xfrm rot="5400000" flipH="1">
+              <a:off x="5293" y="2025"/>
+              <a:ext cx="4004" cy="4499"/>
+            </a:xfrm>
+            <a:prstGeom prst="bentConnector4">
+              <a:avLst>
+                <a:gd name="adj1" fmla="val -9353"/>
+                <a:gd name="adj2" fmla="val 108346"/>
+              </a:avLst>
+            </a:prstGeom>
+            <a:ln w="19050" cap="flat" cmpd="sng">
+              <a:solidFill>
+                <a:schemeClr val="tx1"/>
+              </a:solidFill>
+              <a:tailEnd type="arrow"/>
+            </a:ln>
+          </p:spPr>
+          <p:style>
+            <a:lnRef idx="2">
+              <a:schemeClr val="accent1"/>
+            </a:lnRef>
+            <a:fillRef idx="0">
+              <a:srgbClr val="FFFFFF"/>
+            </a:fillRef>
+            <a:effectRef idx="0">
+              <a:srgbClr val="FFFFFF"/>
+            </a:effectRef>
+            <a:fontRef idx="minor">
+              <a:schemeClr val="tx1"/>
+            </a:fontRef>
+          </p:style>
+        </p:cxnSp>
+        <p:cxnSp>
+          <p:nvCxnSpPr>
+            <p:cNvPr id="80" name="肘形连接符 79"/>
+            <p:cNvCxnSpPr>
+              <a:stCxn id="74" idx="2"/>
+              <a:endCxn id="72" idx="0"/>
+            </p:cNvCxnSpPr>
+            <p:nvPr/>
+          </p:nvCxnSpPr>
+          <p:spPr>
+            <a:xfrm rot="5400000">
+              <a:off x="5983" y="4711"/>
+              <a:ext cx="688" cy="1"/>
+            </a:xfrm>
+            <a:prstGeom prst="bentConnector3">
+              <a:avLst>
+                <a:gd name="adj1" fmla="val 49927"/>
+              </a:avLst>
+            </a:prstGeom>
+            <a:ln w="19050" cap="flat" cmpd="sng">
+              <a:solidFill>
+                <a:schemeClr val="tx1"/>
+              </a:solidFill>
+              <a:tailEnd type="arrow"/>
+            </a:ln>
+          </p:spPr>
+          <p:style>
+            <a:lnRef idx="2">
+              <a:schemeClr val="accent1"/>
+            </a:lnRef>
+            <a:fillRef idx="0">
+              <a:srgbClr val="FFFFFF"/>
+            </a:fillRef>
+            <a:effectRef idx="0">
+              <a:srgbClr val="FFFFFF"/>
+            </a:effectRef>
+            <a:fontRef idx="minor">
+              <a:schemeClr val="tx1"/>
+            </a:fontRef>
+          </p:style>
+        </p:cxnSp>
+        <p:cxnSp>
+          <p:nvCxnSpPr>
+            <p:cNvPr id="81" name="肘形连接符 80"/>
+            <p:cNvCxnSpPr>
+              <a:stCxn id="74" idx="3"/>
+              <a:endCxn id="30" idx="1"/>
+            </p:cNvCxnSpPr>
+            <p:nvPr/>
+          </p:nvCxnSpPr>
+          <p:spPr>
+            <a:xfrm flipV="1">
+              <a:off x="7606" y="2440"/>
+              <a:ext cx="4007" cy="1405"/>
+            </a:xfrm>
+            <a:prstGeom prst="bentConnector3">
+              <a:avLst>
+                <a:gd name="adj1" fmla="val 50012"/>
+              </a:avLst>
+            </a:prstGeom>
+            <a:ln w="19050" cap="flat" cmpd="sng">
+              <a:solidFill>
+                <a:schemeClr val="tx1"/>
+              </a:solidFill>
+              <a:tailEnd type="arrow"/>
+            </a:ln>
+          </p:spPr>
+          <p:style>
+            <a:lnRef idx="2">
+              <a:schemeClr val="accent1"/>
+            </a:lnRef>
+            <a:fillRef idx="0">
+              <a:srgbClr val="FFFFFF"/>
+            </a:fillRef>
+            <a:effectRef idx="0">
+              <a:srgbClr val="FFFFFF"/>
+            </a:effectRef>
+            <a:fontRef idx="minor">
+              <a:schemeClr val="tx1"/>
+            </a:fontRef>
+          </p:style>
+        </p:cxnSp>
+        <p:cxnSp>
+          <p:nvCxnSpPr>
+            <p:cNvPr id="82" name="肘形连接符 81"/>
+            <p:cNvCxnSpPr>
+              <a:endCxn id="76" idx="0"/>
+            </p:cNvCxnSpPr>
+            <p:nvPr/>
+          </p:nvCxnSpPr>
+          <p:spPr>
+            <a:xfrm flipV="1">
+              <a:off x="7603" y="5233"/>
+              <a:ext cx="1942" cy="522"/>
+            </a:xfrm>
+            <a:prstGeom prst="bentConnector4">
+              <a:avLst>
+                <a:gd name="adj1" fmla="val 17096"/>
+                <a:gd name="adj2" fmla="val 171839"/>
+              </a:avLst>
+            </a:prstGeom>
+            <a:ln w="19050" cap="flat" cmpd="sng">
+              <a:solidFill>
+                <a:schemeClr val="tx1"/>
+              </a:solidFill>
+              <a:tailEnd type="arrow"/>
+            </a:ln>
+          </p:spPr>
+          <p:style>
+            <a:lnRef idx="2">
+              <a:schemeClr val="accent1"/>
+            </a:lnRef>
+            <a:fillRef idx="0">
+              <a:srgbClr val="FFFFFF"/>
+            </a:fillRef>
+            <a:effectRef idx="0">
+              <a:srgbClr val="FFFFFF"/>
+            </a:effectRef>
+            <a:fontRef idx="minor">
+              <a:schemeClr val="tx1"/>
+            </a:fontRef>
+          </p:style>
+        </p:cxnSp>
+        <p:cxnSp>
+          <p:nvCxnSpPr>
+            <p:cNvPr id="83" name="肘形连接符 82"/>
+            <p:cNvCxnSpPr>
+              <a:stCxn id="76" idx="3"/>
+              <a:endCxn id="55" idx="1"/>
+            </p:cNvCxnSpPr>
+            <p:nvPr/>
+          </p:nvCxnSpPr>
+          <p:spPr>
+            <a:xfrm>
+              <a:off x="10824" y="5755"/>
+              <a:ext cx="909" cy="1"/>
+            </a:xfrm>
+            <a:prstGeom prst="bentConnector3">
+              <a:avLst>
+                <a:gd name="adj1" fmla="val 50055"/>
+              </a:avLst>
+            </a:prstGeom>
+            <a:ln w="19050" cap="flat" cmpd="sng">
+              <a:solidFill>
+                <a:schemeClr val="tx1"/>
+              </a:solidFill>
+              <a:tailEnd type="arrow"/>
+            </a:ln>
+          </p:spPr>
+          <p:style>
+            <a:lnRef idx="2">
+              <a:schemeClr val="accent1"/>
+            </a:lnRef>
+            <a:fillRef idx="0">
+              <a:srgbClr val="FFFFFF"/>
+            </a:fillRef>
+            <a:effectRef idx="0">
+              <a:srgbClr val="FFFFFF"/>
+            </a:effectRef>
+            <a:fontRef idx="minor">
+              <a:schemeClr val="tx1"/>
+            </a:fontRef>
+          </p:style>
+        </p:cxnSp>
+      </p:grpSp>
+    </p:spTree>
+  </p:cSld>
+  <p:clrMapOvr>
+    <a:masterClrMapping/>
+  </p:clrMapOvr>
+</p:sld>
+</file>
+
+<file path=ppt/slides/slide4.xml><?xml version="1.0" encoding="utf-8"?>
 <p:sld xmlns:a="http://schemas.openxmlformats.org/drawingml/2006/main" xmlns:r="http://schemas.openxmlformats.org/officeDocument/2006/relationships" xmlns:p="http://schemas.openxmlformats.org/presentationml/2006/main">
   <p:cSld>
     <p:spTree>
@@ -5816,7 +11050,7 @@
 </p:sld>
 </file>
 
-<file path=ppt/slides/slide3.xml><?xml version="1.0" encoding="utf-8"?>
+<file path=ppt/slides/slide5.xml><?xml version="1.0" encoding="utf-8"?>
 <p:sld xmlns:a="http://schemas.openxmlformats.org/drawingml/2006/main" xmlns:r="http://schemas.openxmlformats.org/officeDocument/2006/relationships" xmlns:p="http://schemas.openxmlformats.org/presentationml/2006/main">
   <p:cSld>
     <p:spTree>
@@ -5828,13 +11062,60 @@
       <p:grpSpPr/>
       <p:sp>
         <p:nvSpPr>
+          <p:cNvPr id="6" name="矩形 5"/>
+          <p:cNvSpPr/>
+          <p:nvPr/>
+        </p:nvSpPr>
+        <p:spPr>
+          <a:xfrm>
+            <a:off x="4258310" y="3952240"/>
+            <a:ext cx="1805940" cy="1116965"/>
+          </a:xfrm>
+          <a:prstGeom prst="rect">
+            <a:avLst/>
+          </a:prstGeom>
+          <a:solidFill>
+            <a:schemeClr val="bg1"/>
+          </a:solidFill>
+          <a:ln>
+            <a:solidFill>
+              <a:schemeClr val="tx1"/>
+            </a:solidFill>
+          </a:ln>
+        </p:spPr>
+        <p:style>
+          <a:lnRef idx="2">
+            <a:schemeClr val="accent1">
+              <a:lumMod val="75000"/>
+            </a:schemeClr>
+          </a:lnRef>
+          <a:fillRef idx="1">
+            <a:schemeClr val="accent1"/>
+          </a:fillRef>
+          <a:effectRef idx="0">
+            <a:srgbClr val="FFFFFF"/>
+          </a:effectRef>
+          <a:fontRef idx="minor">
+            <a:schemeClr val="lt1"/>
+          </a:fontRef>
+        </p:style>
+        <p:txBody>
+          <a:bodyPr rtlCol="0" anchor="ctr"/>
+          <a:p>
+            <a:pPr algn="ctr"/>
+            <a:endParaRPr lang="zh-CN" altLang="en-US"/>
+          </a:p>
+        </p:txBody>
+      </p:sp>
+      <p:sp>
+        <p:nvSpPr>
           <p:cNvPr id="5" name="圆角矩形 4"/>
           <p:cNvSpPr/>
           <p:nvPr/>
         </p:nvSpPr>
         <p:spPr>
           <a:xfrm>
-            <a:off x="4067810" y="2971800"/>
+            <a:off x="1050925" y="539750"/>
             <a:ext cx="2153285" cy="2200275"/>
           </a:xfrm>
           <a:prstGeom prst="roundRect">
@@ -5890,7 +11171,7 @@
         </p:nvSpPr>
         <p:spPr>
           <a:xfrm>
-            <a:off x="4575175" y="3197225"/>
+            <a:off x="1558290" y="765175"/>
             <a:ext cx="1828165" cy="275590"/>
           </a:xfrm>
           <a:prstGeom prst="rect">
@@ -5937,7 +11218,7 @@
         </p:blipFill>
         <p:spPr>
           <a:xfrm>
-            <a:off x="4113530" y="3224530"/>
+            <a:off x="1096645" y="792480"/>
             <a:ext cx="426720" cy="279400"/>
           </a:xfrm>
           <a:prstGeom prst="rect">
@@ -5945,6 +11226,2345 @@
           </a:prstGeom>
         </p:spPr>
       </p:pic>
+      <p:pic>
+        <p:nvPicPr>
+          <p:cNvPr id="3" name="图片 2" descr="代码文件"/>
+          <p:cNvPicPr>
+            <a:picLocks noChangeAspect="1"/>
+          </p:cNvPicPr>
+          <p:nvPr/>
+        </p:nvPicPr>
+        <p:blipFill>
+          <a:blip r:embed="rId4">
+            <a:extLst>
+              <a:ext uri="{96DAC541-7B7A-43D3-8B79-37D633B846F1}">
+                <asvg:svgBlip xmlns:asvg="http://schemas.microsoft.com/office/drawing/2016/SVG/main" r:embed="rId5"/>
+              </a:ext>
+            </a:extLst>
+          </a:blip>
+          <a:stretch>
+            <a:fillRect/>
+          </a:stretch>
+        </p:blipFill>
+        <p:spPr>
+          <a:xfrm>
+            <a:off x="4850130" y="4023995"/>
+            <a:ext cx="530225" cy="530225"/>
+          </a:xfrm>
+          <a:prstGeom prst="rect">
+            <a:avLst/>
+          </a:prstGeom>
+        </p:spPr>
+      </p:pic>
+      <p:grpSp>
+        <p:nvGrpSpPr>
+          <p:cNvPr id="51" name="组合 50"/>
+          <p:cNvGrpSpPr/>
+          <p:nvPr>
+            <p:custDataLst>
+              <p:tags r:id="rId6"/>
+            </p:custDataLst>
+          </p:nvPr>
+        </p:nvGrpSpPr>
+        <p:grpSpPr>
+          <a:xfrm>
+            <a:off x="6492240" y="680085"/>
+            <a:ext cx="1934845" cy="2493010"/>
+            <a:chOff x="1538" y="6291"/>
+            <a:chExt cx="3047" cy="3926"/>
+          </a:xfrm>
+        </p:grpSpPr>
+        <p:sp>
+          <p:nvSpPr>
+            <p:cNvPr id="16" name="圆角矩形 15"/>
+            <p:cNvSpPr/>
+            <p:nvPr>
+              <p:custDataLst>
+                <p:tags r:id="rId7"/>
+              </p:custDataLst>
+            </p:nvPr>
+          </p:nvSpPr>
+          <p:spPr>
+            <a:xfrm>
+              <a:off x="1538" y="6291"/>
+              <a:ext cx="2981" cy="3926"/>
+            </a:xfrm>
+            <a:prstGeom prst="roundRect">
+              <a:avLst>
+                <a:gd name="adj" fmla="val 4082"/>
+              </a:avLst>
+            </a:prstGeom>
+            <a:solidFill>
+              <a:srgbClr val="F8EFFF"/>
+            </a:solidFill>
+            <a:ln>
+              <a:solidFill>
+                <a:schemeClr val="accent6">
+                  <a:lumMod val="20000"/>
+                  <a:lumOff val="80000"/>
+                </a:schemeClr>
+              </a:solidFill>
+            </a:ln>
+          </p:spPr>
+          <p:style>
+            <a:lnRef idx="2">
+              <a:schemeClr val="accent1">
+                <a:lumMod val="75000"/>
+              </a:schemeClr>
+            </a:lnRef>
+            <a:fillRef idx="1">
+              <a:schemeClr val="accent1"/>
+            </a:fillRef>
+            <a:effectRef idx="0">
+              <a:srgbClr val="FFFFFF"/>
+            </a:effectRef>
+            <a:fontRef idx="minor">
+              <a:schemeClr val="lt1"/>
+            </a:fontRef>
+          </p:style>
+          <p:txBody>
+            <a:bodyPr rtlCol="0" anchor="ctr"/>
+            <a:p>
+              <a:pPr algn="ctr"/>
+              <a:endParaRPr lang="zh-CN" altLang="en-US"/>
+            </a:p>
+          </p:txBody>
+        </p:sp>
+        <p:sp>
+          <p:nvSpPr>
+            <p:cNvPr id="17" name="文本框 16"/>
+            <p:cNvSpPr txBox="1"/>
+            <p:nvPr>
+              <p:custDataLst>
+                <p:tags r:id="rId8"/>
+              </p:custDataLst>
+            </p:nvPr>
+          </p:nvSpPr>
+          <p:spPr>
+            <a:xfrm>
+              <a:off x="2365" y="6475"/>
+              <a:ext cx="2221" cy="434"/>
+            </a:xfrm>
+            <a:prstGeom prst="rect">
+              <a:avLst/>
+            </a:prstGeom>
+            <a:noFill/>
+          </p:spPr>
+          <p:txBody>
+            <a:bodyPr wrap="square" rtlCol="0">
+              <a:spAutoFit/>
+            </a:bodyPr>
+            <a:p>
+              <a:r>
+                <a:rPr lang="en-US" altLang="zh-CN" sz="1200" u="sng">
+                  <a:latin typeface="Times New Roman" panose="02020603050405020304" charset="0"/>
+                  <a:cs typeface="Times New Roman" panose="02020603050405020304" charset="0"/>
+                </a:rPr>
+                <a:t>Spec2IR Agent</a:t>
+              </a:r>
+              <a:endParaRPr lang="en-US" altLang="zh-CN" sz="1200" u="sng">
+                <a:latin typeface="Times New Roman" panose="02020603050405020304" charset="0"/>
+                <a:cs typeface="Times New Roman" panose="02020603050405020304" charset="0"/>
+              </a:endParaRPr>
+            </a:p>
+          </p:txBody>
+        </p:sp>
+        <p:pic>
+          <p:nvPicPr>
+            <p:cNvPr id="22" name="图片 21"/>
+            <p:cNvPicPr>
+              <a:picLocks noChangeAspect="1"/>
+            </p:cNvPicPr>
+            <p:nvPr>
+              <p:custDataLst>
+                <p:tags r:id="rId9"/>
+              </p:custDataLst>
+            </p:nvPr>
+          </p:nvPicPr>
+          <p:blipFill>
+            <a:blip r:embed="rId10"/>
+            <a:stretch>
+              <a:fillRect/>
+            </a:stretch>
+          </p:blipFill>
+          <p:spPr>
+            <a:xfrm>
+              <a:off x="1745" y="6514"/>
+              <a:ext cx="620" cy="357"/>
+            </a:xfrm>
+            <a:prstGeom prst="rect">
+              <a:avLst/>
+            </a:prstGeom>
+          </p:spPr>
+        </p:pic>
+        <p:grpSp>
+          <p:nvGrpSpPr>
+            <p:cNvPr id="38" name="组合 37"/>
+            <p:cNvGrpSpPr/>
+            <p:nvPr/>
+          </p:nvGrpSpPr>
+          <p:grpSpPr>
+            <a:xfrm>
+              <a:off x="1745" y="7204"/>
+              <a:ext cx="2558" cy="1114"/>
+              <a:chOff x="8923" y="5741"/>
+              <a:chExt cx="2558" cy="1114"/>
+            </a:xfrm>
+          </p:grpSpPr>
+          <p:sp>
+            <p:nvSpPr>
+              <p:cNvPr id="39" name="矩形 38"/>
+              <p:cNvSpPr/>
+              <p:nvPr>
+                <p:custDataLst>
+                  <p:tags r:id="rId11"/>
+                </p:custDataLst>
+              </p:nvPr>
+            </p:nvSpPr>
+            <p:spPr>
+              <a:xfrm>
+                <a:off x="8923" y="5741"/>
+                <a:ext cx="2558" cy="1115"/>
+              </a:xfrm>
+              <a:prstGeom prst="rect">
+                <a:avLst/>
+              </a:prstGeom>
+              <a:solidFill>
+                <a:schemeClr val="bg1"/>
+              </a:solidFill>
+              <a:ln>
+                <a:solidFill>
+                  <a:schemeClr val="tx1"/>
+                </a:solidFill>
+              </a:ln>
+            </p:spPr>
+            <p:style>
+              <a:lnRef idx="2">
+                <a:schemeClr val="accent1">
+                  <a:lumMod val="75000"/>
+                </a:schemeClr>
+              </a:lnRef>
+              <a:fillRef idx="1">
+                <a:schemeClr val="accent1"/>
+              </a:fillRef>
+              <a:effectRef idx="0">
+                <a:srgbClr val="FFFFFF"/>
+              </a:effectRef>
+              <a:fontRef idx="minor">
+                <a:schemeClr val="lt1"/>
+              </a:fontRef>
+            </p:style>
+            <p:txBody>
+              <a:bodyPr rtlCol="0" anchor="ctr"/>
+              <a:p>
+                <a:pPr algn="ctr"/>
+                <a:endParaRPr lang="zh-CN" altLang="en-US"/>
+              </a:p>
+            </p:txBody>
+          </p:sp>
+          <p:grpSp>
+            <p:nvGrpSpPr>
+              <p:cNvPr id="40" name="组合 39"/>
+              <p:cNvGrpSpPr/>
+              <p:nvPr/>
+            </p:nvGrpSpPr>
+            <p:grpSpPr>
+              <a:xfrm>
+                <a:off x="9267" y="5860"/>
+                <a:ext cx="1871" cy="659"/>
+                <a:chOff x="3914" y="1016"/>
+                <a:chExt cx="7486" cy="2602"/>
+              </a:xfrm>
+            </p:grpSpPr>
+            <p:pic>
+              <p:nvPicPr>
+                <p:cNvPr id="41" name="图片 40" descr="file-pdf"/>
+                <p:cNvPicPr>
+                  <a:picLocks noChangeAspect="1"/>
+                </p:cNvPicPr>
+                <p:nvPr>
+                  <p:custDataLst>
+                    <p:tags r:id="rId12"/>
+                  </p:custDataLst>
+                </p:nvPr>
+              </p:nvPicPr>
+              <p:blipFill>
+                <a:blip r:embed="rId13">
+                  <a:extLst>
+                    <a:ext uri="{96DAC541-7B7A-43D3-8B79-37D633B846F1}">
+                      <asvg:svgBlip xmlns:asvg="http://schemas.microsoft.com/office/drawing/2016/SVG/main" r:embed="rId14"/>
+                    </a:ext>
+                  </a:extLst>
+                </a:blip>
+                <a:stretch>
+                  <a:fillRect/>
+                </a:stretch>
+              </p:blipFill>
+              <p:spPr>
+                <a:xfrm>
+                  <a:off x="3914" y="1016"/>
+                  <a:ext cx="2603" cy="2603"/>
+                </a:xfrm>
+                <a:prstGeom prst="rect">
+                  <a:avLst/>
+                </a:prstGeom>
+              </p:spPr>
+            </p:pic>
+            <p:pic>
+              <p:nvPicPr>
+                <p:cNvPr id="42" name="图片 41" descr="DOC"/>
+                <p:cNvPicPr>
+                  <a:picLocks noChangeAspect="1"/>
+                </p:cNvPicPr>
+                <p:nvPr>
+                  <p:custDataLst>
+                    <p:tags r:id="rId15"/>
+                  </p:custDataLst>
+                </p:nvPr>
+              </p:nvPicPr>
+              <p:blipFill>
+                <a:blip r:embed="rId16">
+                  <a:extLst>
+                    <a:ext uri="{96DAC541-7B7A-43D3-8B79-37D633B846F1}">
+                      <asvg:svgBlip xmlns:asvg="http://schemas.microsoft.com/office/drawing/2016/SVG/main" r:embed="rId17"/>
+                    </a:ext>
+                  </a:extLst>
+                </a:blip>
+                <a:stretch>
+                  <a:fillRect/>
+                </a:stretch>
+              </p:blipFill>
+              <p:spPr>
+                <a:xfrm>
+                  <a:off x="8846" y="1040"/>
+                  <a:ext cx="2555" cy="2555"/>
+                </a:xfrm>
+                <a:prstGeom prst="rect">
+                  <a:avLst/>
+                </a:prstGeom>
+              </p:spPr>
+            </p:pic>
+          </p:grpSp>
+          <p:sp>
+            <p:nvSpPr>
+              <p:cNvPr id="43" name="文本框 42"/>
+              <p:cNvSpPr txBox="1"/>
+              <p:nvPr>
+                <p:custDataLst>
+                  <p:tags r:id="rId18"/>
+                </p:custDataLst>
+              </p:nvPr>
+            </p:nvSpPr>
+            <p:spPr>
+              <a:xfrm>
+                <a:off x="8923" y="6519"/>
+                <a:ext cx="2559" cy="337"/>
+              </a:xfrm>
+              <a:prstGeom prst="rect">
+                <a:avLst/>
+              </a:prstGeom>
+              <a:noFill/>
+            </p:spPr>
+            <p:txBody>
+              <a:bodyPr wrap="square" rtlCol="0">
+                <a:spAutoFit/>
+              </a:bodyPr>
+              <a:p>
+                <a:pPr algn="ctr"/>
+                <a:r>
+                  <a:rPr lang="en-US" altLang="zh-CN" sz="800">
+                    <a:latin typeface="Times New Roman" panose="02020603050405020304" charset="0"/>
+                    <a:cs typeface="Times New Roman" panose="02020603050405020304" charset="0"/>
+                  </a:rPr>
+                  <a:t>Standard Specification Document</a:t>
+                </a:r>
+                <a:endParaRPr lang="en-US" altLang="zh-CN" sz="800">
+                  <a:latin typeface="Times New Roman" panose="02020603050405020304" charset="0"/>
+                  <a:cs typeface="Times New Roman" panose="02020603050405020304" charset="0"/>
+                </a:endParaRPr>
+              </a:p>
+            </p:txBody>
+          </p:sp>
+        </p:grpSp>
+        <p:grpSp>
+          <p:nvGrpSpPr>
+            <p:cNvPr id="44" name="组合 43"/>
+            <p:cNvGrpSpPr/>
+            <p:nvPr/>
+          </p:nvGrpSpPr>
+          <p:grpSpPr>
+            <a:xfrm>
+              <a:off x="1746" y="8889"/>
+              <a:ext cx="2558" cy="1114"/>
+              <a:chOff x="9425" y="2609"/>
+              <a:chExt cx="2558" cy="1114"/>
+            </a:xfrm>
+          </p:grpSpPr>
+          <p:sp>
+            <p:nvSpPr>
+              <p:cNvPr id="45" name="矩形 44"/>
+              <p:cNvSpPr/>
+              <p:nvPr>
+                <p:custDataLst>
+                  <p:tags r:id="rId19"/>
+                </p:custDataLst>
+              </p:nvPr>
+            </p:nvSpPr>
+            <p:spPr>
+              <a:xfrm>
+                <a:off x="9425" y="2609"/>
+                <a:ext cx="2558" cy="1115"/>
+              </a:xfrm>
+              <a:prstGeom prst="rect">
+                <a:avLst/>
+              </a:prstGeom>
+              <a:solidFill>
+                <a:schemeClr val="bg1"/>
+              </a:solidFill>
+              <a:ln>
+                <a:solidFill>
+                  <a:schemeClr val="tx1"/>
+                </a:solidFill>
+              </a:ln>
+            </p:spPr>
+            <p:style>
+              <a:lnRef idx="2">
+                <a:schemeClr val="accent1">
+                  <a:lumMod val="75000"/>
+                </a:schemeClr>
+              </a:lnRef>
+              <a:fillRef idx="1">
+                <a:schemeClr val="accent1"/>
+              </a:fillRef>
+              <a:effectRef idx="0">
+                <a:srgbClr val="FFFFFF"/>
+              </a:effectRef>
+              <a:fontRef idx="minor">
+                <a:schemeClr val="lt1"/>
+              </a:fontRef>
+            </p:style>
+            <p:txBody>
+              <a:bodyPr rtlCol="0" anchor="ctr"/>
+              <a:p>
+                <a:pPr algn="ctr"/>
+                <a:endParaRPr lang="zh-CN" altLang="en-US"/>
+              </a:p>
+            </p:txBody>
+          </p:sp>
+          <p:sp>
+            <p:nvSpPr>
+              <p:cNvPr id="46" name="文本框 45"/>
+              <p:cNvSpPr txBox="1"/>
+              <p:nvPr>
+                <p:custDataLst>
+                  <p:tags r:id="rId20"/>
+                </p:custDataLst>
+              </p:nvPr>
+            </p:nvSpPr>
+            <p:spPr>
+              <a:xfrm>
+                <a:off x="9425" y="3387"/>
+                <a:ext cx="2559" cy="337"/>
+              </a:xfrm>
+              <a:prstGeom prst="rect">
+                <a:avLst/>
+              </a:prstGeom>
+              <a:noFill/>
+            </p:spPr>
+            <p:txBody>
+              <a:bodyPr wrap="square" rtlCol="0">
+                <a:spAutoFit/>
+              </a:bodyPr>
+              <a:p>
+                <a:pPr algn="ctr"/>
+                <a:r>
+                  <a:rPr lang="en-US" altLang="zh-CN" sz="800">
+                    <a:latin typeface="Times New Roman" panose="02020603050405020304" charset="0"/>
+                    <a:cs typeface="Times New Roman" panose="02020603050405020304" charset="0"/>
+                  </a:rPr>
+                  <a:t>Intermediate Representation </a:t>
+                </a:r>
+                <a:r>
+                  <a:rPr lang="en-US" altLang="zh-CN" sz="800">
+                    <a:latin typeface="Times New Roman" panose="02020603050405020304" charset="0"/>
+                    <a:cs typeface="Times New Roman" panose="02020603050405020304" charset="0"/>
+                  </a:rPr>
+                  <a:t>Json</a:t>
+                </a:r>
+                <a:endParaRPr lang="en-US" altLang="zh-CN" sz="800">
+                  <a:latin typeface="Times New Roman" panose="02020603050405020304" charset="0"/>
+                  <a:cs typeface="Times New Roman" panose="02020603050405020304" charset="0"/>
+                </a:endParaRPr>
+              </a:p>
+            </p:txBody>
+          </p:sp>
+          <p:grpSp>
+            <p:nvGrpSpPr>
+              <p:cNvPr id="47" name="组合 46"/>
+              <p:cNvGrpSpPr/>
+              <p:nvPr/>
+            </p:nvGrpSpPr>
+            <p:grpSpPr>
+              <a:xfrm>
+                <a:off x="9917" y="2671"/>
+                <a:ext cx="1499" cy="664"/>
+                <a:chOff x="11138" y="1583"/>
+                <a:chExt cx="1499" cy="664"/>
+              </a:xfrm>
+            </p:grpSpPr>
+            <p:pic>
+              <p:nvPicPr>
+                <p:cNvPr id="48" name="图片 47" descr="json输出"/>
+                <p:cNvPicPr>
+                  <a:picLocks noChangeAspect="1"/>
+                </p:cNvPicPr>
+                <p:nvPr>
+                  <p:custDataLst>
+                    <p:tags r:id="rId21"/>
+                  </p:custDataLst>
+                </p:nvPr>
+              </p:nvPicPr>
+              <p:blipFill>
+                <a:blip r:embed="rId22">
+                  <a:extLst>
+                    <a:ext uri="{96DAC541-7B7A-43D3-8B79-37D633B846F1}">
+                      <asvg:svgBlip xmlns:asvg="http://schemas.microsoft.com/office/drawing/2016/SVG/main" r:embed="rId23"/>
+                    </a:ext>
+                  </a:extLst>
+                </a:blip>
+                <a:stretch>
+                  <a:fillRect/>
+                </a:stretch>
+              </p:blipFill>
+              <p:spPr>
+                <a:xfrm>
+                  <a:off x="11138" y="1632"/>
+                  <a:ext cx="528" cy="528"/>
+                </a:xfrm>
+                <a:prstGeom prst="rect">
+                  <a:avLst/>
+                </a:prstGeom>
+              </p:spPr>
+            </p:pic>
+            <p:pic>
+              <p:nvPicPr>
+                <p:cNvPr id="49" name="图片 48" descr="jsonSchema"/>
+                <p:cNvPicPr>
+                  <a:picLocks noChangeAspect="1"/>
+                </p:cNvPicPr>
+                <p:nvPr>
+                  <p:custDataLst>
+                    <p:tags r:id="rId24"/>
+                  </p:custDataLst>
+                </p:nvPr>
+              </p:nvPicPr>
+              <p:blipFill>
+                <a:blip r:embed="rId25">
+                  <a:extLst>
+                    <a:ext uri="{96DAC541-7B7A-43D3-8B79-37D633B846F1}">
+                      <asvg:svgBlip xmlns:asvg="http://schemas.microsoft.com/office/drawing/2016/SVG/main" r:embed="rId26"/>
+                    </a:ext>
+                  </a:extLst>
+                </a:blip>
+                <a:stretch>
+                  <a:fillRect/>
+                </a:stretch>
+              </p:blipFill>
+              <p:spPr>
+                <a:xfrm>
+                  <a:off x="11973" y="1583"/>
+                  <a:ext cx="664" cy="664"/>
+                </a:xfrm>
+                <a:prstGeom prst="rect">
+                  <a:avLst/>
+                </a:prstGeom>
+              </p:spPr>
+            </p:pic>
+          </p:grpSp>
+        </p:grpSp>
+        <p:cxnSp>
+          <p:nvCxnSpPr>
+            <p:cNvPr id="50" name="直接箭头连接符 49"/>
+            <p:cNvCxnSpPr/>
+            <p:nvPr>
+              <p:custDataLst>
+                <p:tags r:id="rId27"/>
+              </p:custDataLst>
+            </p:nvPr>
+          </p:nvCxnSpPr>
+          <p:spPr>
+            <a:xfrm>
+              <a:off x="3024" y="8319"/>
+              <a:ext cx="10" cy="570"/>
+            </a:xfrm>
+            <a:prstGeom prst="straightConnector1">
+              <a:avLst/>
+            </a:prstGeom>
+            <a:ln w="15875">
+              <a:solidFill>
+                <a:schemeClr val="tx1"/>
+              </a:solidFill>
+              <a:tailEnd type="arrow"/>
+            </a:ln>
+          </p:spPr>
+          <p:style>
+            <a:lnRef idx="2">
+              <a:schemeClr val="accent1"/>
+            </a:lnRef>
+            <a:fillRef idx="0">
+              <a:srgbClr val="FFFFFF"/>
+            </a:fillRef>
+            <a:effectRef idx="0">
+              <a:srgbClr val="FFFFFF"/>
+            </a:effectRef>
+            <a:fontRef idx="minor">
+              <a:schemeClr val="tx1"/>
+            </a:fontRef>
+          </p:style>
+        </p:cxnSp>
+      </p:grpSp>
+      <p:grpSp>
+        <p:nvGrpSpPr>
+          <p:cNvPr id="21" name="组合 20"/>
+          <p:cNvGrpSpPr/>
+          <p:nvPr/>
+        </p:nvGrpSpPr>
+        <p:grpSpPr>
+          <a:xfrm>
+            <a:off x="4280535" y="1285875"/>
+            <a:ext cx="1625600" cy="1751330"/>
+            <a:chOff x="6741" y="2025"/>
+            <a:chExt cx="2560" cy="2758"/>
+          </a:xfrm>
+        </p:grpSpPr>
+        <p:sp>
+          <p:nvSpPr>
+            <p:cNvPr id="8" name="矩形 7"/>
+            <p:cNvSpPr/>
+            <p:nvPr>
+              <p:custDataLst>
+                <p:tags r:id="rId28"/>
+              </p:custDataLst>
+            </p:nvPr>
+          </p:nvSpPr>
+          <p:spPr>
+            <a:xfrm>
+              <a:off x="6742" y="2025"/>
+              <a:ext cx="2558" cy="1115"/>
+            </a:xfrm>
+            <a:prstGeom prst="rect">
+              <a:avLst/>
+            </a:prstGeom>
+            <a:solidFill>
+              <a:schemeClr val="bg1"/>
+            </a:solidFill>
+            <a:ln>
+              <a:solidFill>
+                <a:schemeClr val="tx1"/>
+              </a:solidFill>
+            </a:ln>
+          </p:spPr>
+          <p:style>
+            <a:lnRef idx="2">
+              <a:schemeClr val="accent1">
+                <a:lumMod val="75000"/>
+              </a:schemeClr>
+            </a:lnRef>
+            <a:fillRef idx="1">
+              <a:schemeClr val="accent1"/>
+            </a:fillRef>
+            <a:effectRef idx="0">
+              <a:srgbClr val="FFFFFF"/>
+            </a:effectRef>
+            <a:fontRef idx="minor">
+              <a:schemeClr val="lt1"/>
+            </a:fontRef>
+          </p:style>
+          <p:txBody>
+            <a:bodyPr rtlCol="0" anchor="ctr"/>
+            <a:p>
+              <a:pPr algn="ctr"/>
+              <a:endParaRPr lang="zh-CN" altLang="en-US"/>
+            </a:p>
+          </p:txBody>
+        </p:sp>
+        <p:pic>
+          <p:nvPicPr>
+            <p:cNvPr id="9" name="图片 8" descr="json输入"/>
+            <p:cNvPicPr>
+              <a:picLocks noChangeAspect="1"/>
+            </p:cNvPicPr>
+            <p:nvPr>
+              <p:custDataLst>
+                <p:tags r:id="rId29"/>
+              </p:custDataLst>
+            </p:nvPr>
+          </p:nvPicPr>
+          <p:blipFill>
+            <a:blip r:embed="rId30">
+              <a:extLst>
+                <a:ext uri="{96DAC541-7B7A-43D3-8B79-37D633B846F1}">
+                  <asvg:svgBlip xmlns:asvg="http://schemas.microsoft.com/office/drawing/2016/SVG/main" r:embed="rId31"/>
+                </a:ext>
+              </a:extLst>
+            </a:blip>
+            <a:stretch>
+              <a:fillRect/>
+            </a:stretch>
+          </p:blipFill>
+          <p:spPr>
+            <a:xfrm>
+              <a:off x="7721" y="2143"/>
+              <a:ext cx="600" cy="600"/>
+            </a:xfrm>
+            <a:prstGeom prst="rect">
+              <a:avLst/>
+            </a:prstGeom>
+          </p:spPr>
+        </p:pic>
+        <p:sp>
+          <p:nvSpPr>
+            <p:cNvPr id="10" name="文本框 9"/>
+            <p:cNvSpPr txBox="1"/>
+            <p:nvPr>
+              <p:custDataLst>
+                <p:tags r:id="rId32"/>
+              </p:custDataLst>
+            </p:nvPr>
+          </p:nvSpPr>
+          <p:spPr>
+            <a:xfrm>
+              <a:off x="7410" y="2803"/>
+              <a:ext cx="1221" cy="337"/>
+            </a:xfrm>
+            <a:prstGeom prst="rect">
+              <a:avLst/>
+            </a:prstGeom>
+            <a:noFill/>
+          </p:spPr>
+          <p:txBody>
+            <a:bodyPr wrap="square" rtlCol="0">
+              <a:spAutoFit/>
+            </a:bodyPr>
+            <a:p>
+              <a:pPr algn="ctr"/>
+              <a:r>
+                <a:rPr lang="en-US" altLang="zh-CN" sz="800">
+                  <a:latin typeface="Times New Roman" panose="02020603050405020304" charset="0"/>
+                  <a:cs typeface="Times New Roman" panose="02020603050405020304" charset="0"/>
+                </a:rPr>
+                <a:t>Retrieved IR</a:t>
+              </a:r>
+              <a:endParaRPr lang="en-US" altLang="zh-CN" sz="800">
+                <a:latin typeface="Times New Roman" panose="02020603050405020304" charset="0"/>
+                <a:cs typeface="Times New Roman" panose="02020603050405020304" charset="0"/>
+              </a:endParaRPr>
+            </a:p>
+          </p:txBody>
+        </p:sp>
+        <p:sp>
+          <p:nvSpPr>
+            <p:cNvPr id="11" name="矩形 10"/>
+            <p:cNvSpPr/>
+            <p:nvPr/>
+          </p:nvSpPr>
+          <p:spPr>
+            <a:xfrm>
+              <a:off x="6741" y="3669"/>
+              <a:ext cx="2560" cy="1115"/>
+            </a:xfrm>
+            <a:prstGeom prst="rect">
+              <a:avLst/>
+            </a:prstGeom>
+            <a:solidFill>
+              <a:schemeClr val="bg1"/>
+            </a:solidFill>
+            <a:ln>
+              <a:solidFill>
+                <a:schemeClr val="tx1"/>
+              </a:solidFill>
+            </a:ln>
+          </p:spPr>
+          <p:style>
+            <a:lnRef idx="2">
+              <a:schemeClr val="accent1">
+                <a:lumMod val="75000"/>
+              </a:schemeClr>
+            </a:lnRef>
+            <a:fillRef idx="1">
+              <a:schemeClr val="accent1"/>
+            </a:fillRef>
+            <a:effectRef idx="0">
+              <a:srgbClr val="FFFFFF"/>
+            </a:effectRef>
+            <a:fontRef idx="minor">
+              <a:schemeClr val="lt1"/>
+            </a:fontRef>
+          </p:style>
+          <p:txBody>
+            <a:bodyPr rtlCol="0" anchor="ctr"/>
+            <a:p>
+              <a:pPr algn="ctr"/>
+              <a:endParaRPr lang="zh-CN" altLang="en-US"/>
+            </a:p>
+          </p:txBody>
+        </p:sp>
+        <p:sp>
+          <p:nvSpPr>
+            <p:cNvPr id="14" name="文本框 13"/>
+            <p:cNvSpPr txBox="1"/>
+            <p:nvPr/>
+          </p:nvSpPr>
+          <p:spPr>
+            <a:xfrm>
+              <a:off x="6741" y="4443"/>
+              <a:ext cx="2560" cy="337"/>
+            </a:xfrm>
+            <a:prstGeom prst="rect">
+              <a:avLst/>
+            </a:prstGeom>
+            <a:noFill/>
+          </p:spPr>
+          <p:txBody>
+            <a:bodyPr wrap="square" rtlCol="0">
+              <a:spAutoFit/>
+            </a:bodyPr>
+            <a:p>
+              <a:pPr algn="ctr"/>
+              <a:r>
+                <a:rPr lang="en-US" altLang="zh-CN" sz="800">
+                  <a:latin typeface="Times New Roman" panose="02020603050405020304" charset="0"/>
+                  <a:cs typeface="Times New Roman" panose="02020603050405020304" charset="0"/>
+                </a:rPr>
+                <a:t>Generated Cryptol </a:t>
+              </a:r>
+              <a:r>
+                <a:rPr lang="en-US" altLang="zh-CN" sz="800">
+                  <a:latin typeface="Times New Roman" panose="02020603050405020304" charset="0"/>
+                  <a:cs typeface="Times New Roman" panose="02020603050405020304" charset="0"/>
+                </a:rPr>
+                <a:t>Code</a:t>
+              </a:r>
+              <a:endParaRPr lang="en-US" altLang="zh-CN" sz="800">
+                <a:latin typeface="Times New Roman" panose="02020603050405020304" charset="0"/>
+                <a:cs typeface="Times New Roman" panose="02020603050405020304" charset="0"/>
+              </a:endParaRPr>
+            </a:p>
+          </p:txBody>
+        </p:sp>
+        <p:pic>
+          <p:nvPicPr>
+            <p:cNvPr id="15" name="图片 14" descr="代码文件"/>
+            <p:cNvPicPr>
+              <a:picLocks noChangeAspect="1"/>
+            </p:cNvPicPr>
+            <p:nvPr/>
+          </p:nvPicPr>
+          <p:blipFill>
+            <a:blip r:embed="rId4">
+              <a:extLst>
+                <a:ext uri="{96DAC541-7B7A-43D3-8B79-37D633B846F1}">
+                  <asvg:svgBlip xmlns:asvg="http://schemas.microsoft.com/office/drawing/2016/SVG/main" r:embed="rId5"/>
+                </a:ext>
+              </a:extLst>
+            </a:blip>
+            <a:stretch>
+              <a:fillRect/>
+            </a:stretch>
+          </p:blipFill>
+          <p:spPr>
+            <a:xfrm>
+              <a:off x="7697" y="3780"/>
+              <a:ext cx="647" cy="647"/>
+            </a:xfrm>
+            <a:prstGeom prst="rect">
+              <a:avLst/>
+            </a:prstGeom>
+          </p:spPr>
+        </p:pic>
+        <p:cxnSp>
+          <p:nvCxnSpPr>
+            <p:cNvPr id="20" name="直接箭头连接符 19"/>
+            <p:cNvCxnSpPr>
+              <a:stCxn id="10" idx="2"/>
+              <a:endCxn id="11" idx="0"/>
+            </p:cNvCxnSpPr>
+            <p:nvPr/>
+          </p:nvCxnSpPr>
+          <p:spPr>
+            <a:xfrm>
+              <a:off x="8021" y="3140"/>
+              <a:ext cx="0" cy="529"/>
+            </a:xfrm>
+            <a:prstGeom prst="straightConnector1">
+              <a:avLst/>
+            </a:prstGeom>
+            <a:ln w="15875">
+              <a:solidFill>
+                <a:srgbClr val="202020"/>
+              </a:solidFill>
+              <a:tailEnd type="arrow"/>
+            </a:ln>
+          </p:spPr>
+          <p:style>
+            <a:lnRef idx="2">
+              <a:schemeClr val="accent1"/>
+            </a:lnRef>
+            <a:fillRef idx="0">
+              <a:srgbClr val="FFFFFF"/>
+            </a:fillRef>
+            <a:effectRef idx="0">
+              <a:srgbClr val="FFFFFF"/>
+            </a:effectRef>
+            <a:fontRef idx="minor">
+              <a:schemeClr val="tx1"/>
+            </a:fontRef>
+          </p:style>
+        </p:cxnSp>
+      </p:grpSp>
+    </p:spTree>
+  </p:cSld>
+  <p:clrMapOvr>
+    <a:masterClrMapping/>
+  </p:clrMapOvr>
+</p:sld>
+</file>
+
+<file path=ppt/slides/slide6.xml><?xml version="1.0" encoding="utf-8"?>
+<p:sld xmlns:a="http://schemas.openxmlformats.org/drawingml/2006/main" xmlns:r="http://schemas.openxmlformats.org/officeDocument/2006/relationships" xmlns:p="http://schemas.openxmlformats.org/presentationml/2006/main">
+  <p:cSld>
+    <p:spTree>
+      <p:nvGrpSpPr>
+        <p:cNvPr id="1" name=""/>
+        <p:cNvGrpSpPr/>
+        <p:nvPr/>
+      </p:nvGrpSpPr>
+      <p:grpSpPr/>
+      <p:sp>
+        <p:nvSpPr>
+          <p:cNvPr id="24" name="矩形 23"/>
+          <p:cNvSpPr/>
+          <p:nvPr>
+            <p:custDataLst>
+              <p:tags r:id="rId1"/>
+            </p:custDataLst>
+          </p:nvPr>
+        </p:nvSpPr>
+        <p:spPr>
+          <a:xfrm>
+            <a:off x="2833370" y="5857875"/>
+            <a:ext cx="1624330" cy="708025"/>
+          </a:xfrm>
+          <a:prstGeom prst="rect">
+            <a:avLst/>
+          </a:prstGeom>
+          <a:solidFill>
+            <a:schemeClr val="bg1"/>
+          </a:solidFill>
+          <a:ln>
+            <a:solidFill>
+              <a:schemeClr val="tx1"/>
+            </a:solidFill>
+          </a:ln>
+        </p:spPr>
+        <p:style>
+          <a:lnRef idx="2">
+            <a:schemeClr val="accent1">
+              <a:lumMod val="75000"/>
+            </a:schemeClr>
+          </a:lnRef>
+          <a:fillRef idx="1">
+            <a:schemeClr val="accent1"/>
+          </a:fillRef>
+          <a:effectRef idx="0">
+            <a:srgbClr val="FFFFFF"/>
+          </a:effectRef>
+          <a:fontRef idx="minor">
+            <a:schemeClr val="lt1"/>
+          </a:fontRef>
+        </p:style>
+        <p:txBody>
+          <a:bodyPr rtlCol="0" anchor="ctr"/>
+          <a:p>
+            <a:pPr algn="ctr"/>
+            <a:endParaRPr lang="zh-CN" altLang="en-US"/>
+          </a:p>
+        </p:txBody>
+      </p:sp>
+      <p:pic>
+        <p:nvPicPr>
+          <p:cNvPr id="18" name="图片 17"/>
+          <p:cNvPicPr>
+            <a:picLocks noChangeAspect="1"/>
+          </p:cNvPicPr>
+          <p:nvPr>
+            <p:custDataLst>
+              <p:tags r:id="rId2"/>
+            </p:custDataLst>
+          </p:nvPr>
+        </p:nvPicPr>
+        <p:blipFill>
+          <a:blip r:embed="rId3"/>
+          <a:stretch>
+            <a:fillRect/>
+          </a:stretch>
+        </p:blipFill>
+        <p:spPr>
+          <a:xfrm rot="5400000" flipH="1">
+            <a:off x="3465195" y="5342255"/>
+            <a:ext cx="360045" cy="360045"/>
+          </a:xfrm>
+          <a:prstGeom prst="rect">
+            <a:avLst/>
+          </a:prstGeom>
+        </p:spPr>
+      </p:pic>
+      <p:sp>
+        <p:nvSpPr>
+          <p:cNvPr id="22" name="文本框 21"/>
+          <p:cNvSpPr txBox="1"/>
+          <p:nvPr>
+            <p:custDataLst>
+              <p:tags r:id="rId4"/>
+            </p:custDataLst>
+          </p:nvPr>
+        </p:nvSpPr>
+        <p:spPr>
+          <a:xfrm>
+            <a:off x="2833370" y="6302375"/>
+            <a:ext cx="1623695" cy="245110"/>
+          </a:xfrm>
+          <a:prstGeom prst="rect">
+            <a:avLst/>
+          </a:prstGeom>
+          <a:noFill/>
+        </p:spPr>
+        <p:txBody>
+          <a:bodyPr wrap="square" rtlCol="0">
+            <a:spAutoFit/>
+          </a:bodyPr>
+          <a:p>
+            <a:pPr algn="ctr"/>
+            <a:r>
+              <a:rPr lang="en-US" altLang="zh-CN" sz="1000">
+                <a:latin typeface="Times New Roman" panose="02020603050405020304" charset="0"/>
+                <a:cs typeface="Times New Roman" panose="02020603050405020304" charset="0"/>
+              </a:rPr>
+              <a:t>Fixes Generated Code</a:t>
+            </a:r>
+            <a:endParaRPr lang="en-US" altLang="zh-CN" sz="1000">
+              <a:latin typeface="Times New Roman" panose="02020603050405020304" charset="0"/>
+              <a:cs typeface="Times New Roman" panose="02020603050405020304" charset="0"/>
+            </a:endParaRPr>
+          </a:p>
+        </p:txBody>
+      </p:sp>
+      <p:grpSp>
+        <p:nvGrpSpPr>
+          <p:cNvPr id="54" name="组合 53"/>
+          <p:cNvGrpSpPr/>
+          <p:nvPr/>
+        </p:nvGrpSpPr>
+        <p:grpSpPr>
+          <a:xfrm>
+            <a:off x="2667000" y="408940"/>
+            <a:ext cx="6343015" cy="4109720"/>
+            <a:chOff x="4200" y="644"/>
+            <a:chExt cx="9989" cy="6472"/>
+          </a:xfrm>
+        </p:grpSpPr>
+        <p:sp>
+          <p:nvSpPr>
+            <p:cNvPr id="4" name="圆角矩形 3"/>
+            <p:cNvSpPr/>
+            <p:nvPr/>
+          </p:nvSpPr>
+          <p:spPr>
+            <a:xfrm>
+              <a:off x="4200" y="644"/>
+              <a:ext cx="6898" cy="6472"/>
+            </a:xfrm>
+            <a:prstGeom prst="roundRect">
+              <a:avLst>
+                <a:gd name="adj" fmla="val 5717"/>
+              </a:avLst>
+            </a:prstGeom>
+            <a:solidFill>
+              <a:srgbClr val="EDFAF2"/>
+            </a:solidFill>
+            <a:ln>
+              <a:solidFill>
+                <a:schemeClr val="accent4">
+                  <a:lumMod val="40000"/>
+                  <a:lumOff val="60000"/>
+                </a:schemeClr>
+              </a:solidFill>
+            </a:ln>
+          </p:spPr>
+          <p:style>
+            <a:lnRef idx="2">
+              <a:schemeClr val="accent1">
+                <a:lumMod val="75000"/>
+              </a:schemeClr>
+            </a:lnRef>
+            <a:fillRef idx="1">
+              <a:schemeClr val="accent1"/>
+            </a:fillRef>
+            <a:effectRef idx="0">
+              <a:srgbClr val="FFFFFF"/>
+            </a:effectRef>
+            <a:fontRef idx="minor">
+              <a:schemeClr val="lt1"/>
+            </a:fontRef>
+          </p:style>
+          <p:txBody>
+            <a:bodyPr rtlCol="0" anchor="ctr"/>
+            <a:p>
+              <a:pPr algn="ctr"/>
+              <a:endParaRPr lang="zh-CN" altLang="en-US"/>
+            </a:p>
+          </p:txBody>
+        </p:sp>
+        <p:grpSp>
+          <p:nvGrpSpPr>
+            <p:cNvPr id="2" name="组合 1"/>
+            <p:cNvGrpSpPr/>
+            <p:nvPr/>
+          </p:nvGrpSpPr>
+          <p:grpSpPr>
+            <a:xfrm>
+              <a:off x="5433" y="653"/>
+              <a:ext cx="4432" cy="498"/>
+              <a:chOff x="7718" y="2765"/>
+              <a:chExt cx="4432" cy="498"/>
+            </a:xfrm>
+          </p:grpSpPr>
+          <p:sp>
+            <p:nvSpPr>
+              <p:cNvPr id="13" name="文本框 12"/>
+              <p:cNvSpPr txBox="1"/>
+              <p:nvPr/>
+            </p:nvSpPr>
+            <p:spPr>
+              <a:xfrm>
+                <a:off x="7810" y="2765"/>
+                <a:ext cx="4341" cy="483"/>
+              </a:xfrm>
+              <a:prstGeom prst="rect">
+                <a:avLst/>
+              </a:prstGeom>
+              <a:noFill/>
+            </p:spPr>
+            <p:txBody>
+              <a:bodyPr wrap="square" rtlCol="0">
+                <a:spAutoFit/>
+              </a:bodyPr>
+              <a:p>
+                <a:pPr algn="ctr"/>
+                <a:r>
+                  <a:rPr lang="en-US" altLang="zh-CN" sz="1400" u="sng">
+                    <a:solidFill>
+                      <a:schemeClr val="tx1"/>
+                    </a:solidFill>
+                    <a:uFillTx/>
+                    <a:latin typeface="Times New Roman" panose="02020603050405020304" charset="0"/>
+                    <a:cs typeface="Times New Roman" panose="02020603050405020304" charset="0"/>
+                  </a:rPr>
+                  <a:t>Compilation &amp; Fixing Agent</a:t>
+                </a:r>
+                <a:endParaRPr lang="en-US" altLang="zh-CN" sz="1400" u="sng">
+                  <a:solidFill>
+                    <a:schemeClr val="tx1"/>
+                  </a:solidFill>
+                  <a:uFillTx/>
+                  <a:latin typeface="Times New Roman" panose="02020603050405020304" charset="0"/>
+                  <a:cs typeface="Times New Roman" panose="02020603050405020304" charset="0"/>
+                </a:endParaRPr>
+              </a:p>
+            </p:txBody>
+          </p:sp>
+          <p:pic>
+            <p:nvPicPr>
+              <p:cNvPr id="5" name="图片 4"/>
+              <p:cNvPicPr>
+                <a:picLocks noChangeAspect="1"/>
+              </p:cNvPicPr>
+              <p:nvPr/>
+            </p:nvPicPr>
+            <p:blipFill>
+              <a:blip r:embed="rId5"/>
+              <a:srcRect l="2066" t="-1111" r="12672" b="21250"/>
+              <a:stretch>
+                <a:fillRect/>
+              </a:stretch>
+            </p:blipFill>
+            <p:spPr>
+              <a:xfrm>
+                <a:off x="7718" y="2765"/>
+                <a:ext cx="537" cy="499"/>
+              </a:xfrm>
+              <a:prstGeom prst="rect">
+                <a:avLst/>
+              </a:prstGeom>
+            </p:spPr>
+          </p:pic>
+        </p:grpSp>
+        <p:grpSp>
+          <p:nvGrpSpPr>
+            <p:cNvPr id="16" name="组合 15"/>
+            <p:cNvGrpSpPr/>
+            <p:nvPr/>
+          </p:nvGrpSpPr>
+          <p:grpSpPr>
+            <a:xfrm>
+              <a:off x="11613" y="1688"/>
+              <a:ext cx="2343" cy="1502"/>
+              <a:chOff x="10527" y="3670"/>
+              <a:chExt cx="2343" cy="1502"/>
+            </a:xfrm>
+          </p:grpSpPr>
+          <p:sp>
+            <p:nvSpPr>
+              <p:cNvPr id="59" name="圆角矩形 58"/>
+              <p:cNvSpPr/>
+              <p:nvPr/>
+            </p:nvSpPr>
+            <p:spPr>
+              <a:xfrm>
+                <a:off x="10527" y="3670"/>
+                <a:ext cx="2342" cy="1503"/>
+              </a:xfrm>
+              <a:prstGeom prst="roundRect">
+                <a:avLst/>
+              </a:prstGeom>
+              <a:solidFill>
+                <a:schemeClr val="accent3">
+                  <a:lumMod val="20000"/>
+                  <a:lumOff val="80000"/>
+                </a:schemeClr>
+              </a:solidFill>
+              <a:ln>
+                <a:solidFill>
+                  <a:schemeClr val="accent2">
+                    <a:lumMod val="60000"/>
+                    <a:lumOff val="40000"/>
+                  </a:schemeClr>
+                </a:solidFill>
+              </a:ln>
+            </p:spPr>
+            <p:style>
+              <a:lnRef idx="2">
+                <a:schemeClr val="accent1">
+                  <a:lumMod val="75000"/>
+                </a:schemeClr>
+              </a:lnRef>
+              <a:fillRef idx="1">
+                <a:schemeClr val="accent1"/>
+              </a:fillRef>
+              <a:effectRef idx="0">
+                <a:srgbClr val="FFFFFF"/>
+              </a:effectRef>
+              <a:fontRef idx="minor">
+                <a:schemeClr val="lt1"/>
+              </a:fontRef>
+            </p:style>
+            <p:txBody>
+              <a:bodyPr rtlCol="0" anchor="ctr"/>
+              <a:p>
+                <a:pPr algn="ctr"/>
+                <a:endParaRPr lang="zh-CN" altLang="en-US"/>
+              </a:p>
+            </p:txBody>
+          </p:sp>
+          <p:pic>
+            <p:nvPicPr>
+              <p:cNvPr id="57" name="图片 56"/>
+              <p:cNvPicPr>
+                <a:picLocks noChangeAspect="1"/>
+              </p:cNvPicPr>
+              <p:nvPr/>
+            </p:nvPicPr>
+            <p:blipFill>
+              <a:blip r:embed="rId6"/>
+              <a:stretch>
+                <a:fillRect/>
+              </a:stretch>
+            </p:blipFill>
+            <p:spPr>
+              <a:xfrm>
+                <a:off x="10648" y="4493"/>
+                <a:ext cx="468" cy="468"/>
+              </a:xfrm>
+              <a:prstGeom prst="rect">
+                <a:avLst/>
+              </a:prstGeom>
+            </p:spPr>
+          </p:pic>
+          <p:sp>
+            <p:nvSpPr>
+              <p:cNvPr id="60" name="文本框 59"/>
+              <p:cNvSpPr txBox="1"/>
+              <p:nvPr/>
+            </p:nvSpPr>
+            <p:spPr>
+              <a:xfrm>
+                <a:off x="10527" y="3670"/>
+                <a:ext cx="2343" cy="531"/>
+              </a:xfrm>
+              <a:prstGeom prst="rect">
+                <a:avLst/>
+              </a:prstGeom>
+              <a:noFill/>
+            </p:spPr>
+            <p:txBody>
+              <a:bodyPr wrap="square" rtlCol="0">
+                <a:spAutoFit/>
+              </a:bodyPr>
+              <a:p>
+                <a:pPr algn="ctr"/>
+                <a:r>
+                  <a:rPr lang="en-US" altLang="zh-CN" sz="1600">
+                    <a:latin typeface="Times New Roman" panose="02020603050405020304" charset="0"/>
+                    <a:cs typeface="Times New Roman" panose="02020603050405020304" charset="0"/>
+                  </a:rPr>
+                  <a:t>Output</a:t>
+                </a:r>
+                <a:endParaRPr lang="en-US" altLang="zh-CN" sz="1600">
+                  <a:latin typeface="Times New Roman" panose="02020603050405020304" charset="0"/>
+                  <a:cs typeface="Times New Roman" panose="02020603050405020304" charset="0"/>
+                </a:endParaRPr>
+              </a:p>
+            </p:txBody>
+          </p:sp>
+          <p:sp>
+            <p:nvSpPr>
+              <p:cNvPr id="61" name="文本框 60"/>
+              <p:cNvSpPr txBox="1"/>
+              <p:nvPr/>
+            </p:nvSpPr>
+            <p:spPr>
+              <a:xfrm>
+                <a:off x="11116" y="4447"/>
+                <a:ext cx="1755" cy="628"/>
+              </a:xfrm>
+              <a:prstGeom prst="rect">
+                <a:avLst/>
+              </a:prstGeom>
+              <a:noFill/>
+            </p:spPr>
+            <p:txBody>
+              <a:bodyPr wrap="square" rtlCol="0">
+                <a:spAutoFit/>
+              </a:bodyPr>
+              <a:p>
+                <a:r>
+                  <a:rPr lang="en-US" altLang="zh-CN" sz="1000">
+                    <a:latin typeface="Times New Roman" panose="02020603050405020304" charset="0"/>
+                    <a:cs typeface="Times New Roman" panose="02020603050405020304" charset="0"/>
+                  </a:rPr>
+                  <a:t>Final Cryptol Code</a:t>
+                </a:r>
+                <a:endParaRPr lang="en-US" altLang="zh-CN" sz="1000">
+                  <a:latin typeface="Times New Roman" panose="02020603050405020304" charset="0"/>
+                  <a:cs typeface="Times New Roman" panose="02020603050405020304" charset="0"/>
+                </a:endParaRPr>
+              </a:p>
+            </p:txBody>
+          </p:sp>
+        </p:grpSp>
+        <p:grpSp>
+          <p:nvGrpSpPr>
+            <p:cNvPr id="20" name="组合 19"/>
+            <p:cNvGrpSpPr/>
+            <p:nvPr/>
+          </p:nvGrpSpPr>
+          <p:grpSpPr>
+            <a:xfrm>
+              <a:off x="11733" y="4953"/>
+              <a:ext cx="2456" cy="1605"/>
+              <a:chOff x="10526" y="5374"/>
+              <a:chExt cx="2456" cy="1605"/>
+            </a:xfrm>
+          </p:grpSpPr>
+          <p:sp>
+            <p:nvSpPr>
+              <p:cNvPr id="3" name="圆角矩形 2"/>
+              <p:cNvSpPr/>
+              <p:nvPr/>
+            </p:nvSpPr>
+            <p:spPr>
+              <a:xfrm>
+                <a:off x="10526" y="5374"/>
+                <a:ext cx="2343" cy="1605"/>
+              </a:xfrm>
+              <a:prstGeom prst="roundRect">
+                <a:avLst/>
+              </a:prstGeom>
+              <a:solidFill>
+                <a:schemeClr val="accent6">
+                  <a:lumMod val="20000"/>
+                  <a:lumOff val="80000"/>
+                </a:schemeClr>
+              </a:solidFill>
+              <a:ln>
+                <a:solidFill>
+                  <a:schemeClr val="accent6">
+                    <a:lumMod val="40000"/>
+                    <a:lumOff val="60000"/>
+                  </a:schemeClr>
+                </a:solidFill>
+              </a:ln>
+            </p:spPr>
+            <p:style>
+              <a:lnRef idx="2">
+                <a:schemeClr val="accent1">
+                  <a:lumMod val="75000"/>
+                </a:schemeClr>
+              </a:lnRef>
+              <a:fillRef idx="1">
+                <a:schemeClr val="accent1"/>
+              </a:fillRef>
+              <a:effectRef idx="0">
+                <a:srgbClr val="FFFFFF"/>
+              </a:effectRef>
+              <a:fontRef idx="minor">
+                <a:schemeClr val="lt1"/>
+              </a:fontRef>
+            </p:style>
+            <p:txBody>
+              <a:bodyPr rtlCol="0" anchor="ctr"/>
+              <a:p>
+                <a:pPr algn="ctr"/>
+                <a:endParaRPr lang="zh-CN" altLang="en-US"/>
+              </a:p>
+            </p:txBody>
+          </p:sp>
+          <p:sp>
+            <p:nvSpPr>
+              <p:cNvPr id="9" name="文本框 8"/>
+              <p:cNvSpPr txBox="1"/>
+              <p:nvPr/>
+            </p:nvSpPr>
+            <p:spPr>
+              <a:xfrm>
+                <a:off x="10527" y="5476"/>
+                <a:ext cx="2343" cy="531"/>
+              </a:xfrm>
+              <a:prstGeom prst="rect">
+                <a:avLst/>
+              </a:prstGeom>
+              <a:noFill/>
+            </p:spPr>
+            <p:txBody>
+              <a:bodyPr wrap="square" rtlCol="0">
+                <a:spAutoFit/>
+              </a:bodyPr>
+              <a:p>
+                <a:pPr algn="ctr"/>
+                <a:r>
+                  <a:rPr lang="en-US" altLang="zh-CN" sz="1600">
+                    <a:latin typeface="Times New Roman" panose="02020603050405020304" charset="0"/>
+                    <a:cs typeface="Times New Roman" panose="02020603050405020304" charset="0"/>
+                  </a:rPr>
+                  <a:t>Failure Output</a:t>
+                </a:r>
+                <a:endParaRPr lang="en-US" altLang="zh-CN" sz="1600">
+                  <a:latin typeface="Times New Roman" panose="02020603050405020304" charset="0"/>
+                  <a:cs typeface="Times New Roman" panose="02020603050405020304" charset="0"/>
+                </a:endParaRPr>
+              </a:p>
+            </p:txBody>
+          </p:sp>
+          <p:sp>
+            <p:nvSpPr>
+              <p:cNvPr id="10" name="文本框 9"/>
+              <p:cNvSpPr txBox="1"/>
+              <p:nvPr/>
+            </p:nvSpPr>
+            <p:spPr>
+              <a:xfrm>
+                <a:off x="11115" y="6228"/>
+                <a:ext cx="1867" cy="751"/>
+              </a:xfrm>
+              <a:prstGeom prst="rect">
+                <a:avLst/>
+              </a:prstGeom>
+              <a:noFill/>
+            </p:spPr>
+            <p:txBody>
+              <a:bodyPr wrap="square" rtlCol="0">
+                <a:noAutofit/>
+              </a:bodyPr>
+              <a:p>
+                <a:r>
+                  <a:rPr lang="en-US" altLang="zh-CN" sz="1000">
+                    <a:latin typeface="Times New Roman" panose="02020603050405020304" charset="0"/>
+                    <a:cs typeface="Times New Roman" panose="02020603050405020304" charset="0"/>
+                  </a:rPr>
+                  <a:t>Code with compilation errors</a:t>
+                </a:r>
+                <a:endParaRPr lang="en-US" altLang="zh-CN" sz="1000">
+                  <a:latin typeface="Times New Roman" panose="02020603050405020304" charset="0"/>
+                  <a:cs typeface="Times New Roman" panose="02020603050405020304" charset="0"/>
+                </a:endParaRPr>
+              </a:p>
+            </p:txBody>
+          </p:sp>
+          <p:pic>
+            <p:nvPicPr>
+              <p:cNvPr id="12" name="图片 11"/>
+              <p:cNvPicPr>
+                <a:picLocks noChangeAspect="1"/>
+              </p:cNvPicPr>
+              <p:nvPr/>
+            </p:nvPicPr>
+            <p:blipFill>
+              <a:blip r:embed="rId7"/>
+              <a:stretch>
+                <a:fillRect/>
+              </a:stretch>
+            </p:blipFill>
+            <p:spPr>
+              <a:xfrm>
+                <a:off x="10635" y="6299"/>
+                <a:ext cx="480" cy="480"/>
+              </a:xfrm>
+              <a:prstGeom prst="rect">
+                <a:avLst/>
+              </a:prstGeom>
+            </p:spPr>
+          </p:pic>
+        </p:grpSp>
+        <p:grpSp>
+          <p:nvGrpSpPr>
+            <p:cNvPr id="37" name="组合 36"/>
+            <p:cNvGrpSpPr/>
+            <p:nvPr/>
+          </p:nvGrpSpPr>
+          <p:grpSpPr>
+            <a:xfrm>
+              <a:off x="5046" y="1424"/>
+              <a:ext cx="2578" cy="1326"/>
+              <a:chOff x="5656" y="5642"/>
+              <a:chExt cx="2578" cy="1326"/>
+            </a:xfrm>
+          </p:grpSpPr>
+          <p:sp>
+            <p:nvSpPr>
+              <p:cNvPr id="39" name="矩形 38"/>
+              <p:cNvSpPr/>
+              <p:nvPr>
+                <p:custDataLst>
+                  <p:tags r:id="rId8"/>
+                </p:custDataLst>
+              </p:nvPr>
+            </p:nvSpPr>
+            <p:spPr>
+              <a:xfrm>
+                <a:off x="5656" y="6014"/>
+                <a:ext cx="2558" cy="954"/>
+              </a:xfrm>
+              <a:prstGeom prst="rect">
+                <a:avLst/>
+              </a:prstGeom>
+              <a:solidFill>
+                <a:schemeClr val="bg1"/>
+              </a:solidFill>
+              <a:ln>
+                <a:solidFill>
+                  <a:schemeClr val="tx1"/>
+                </a:solidFill>
+              </a:ln>
+            </p:spPr>
+            <p:style>
+              <a:lnRef idx="2">
+                <a:schemeClr val="accent1">
+                  <a:lumMod val="75000"/>
+                </a:schemeClr>
+              </a:lnRef>
+              <a:fillRef idx="1">
+                <a:schemeClr val="accent1"/>
+              </a:fillRef>
+              <a:effectRef idx="0">
+                <a:srgbClr val="FFFFFF"/>
+              </a:effectRef>
+              <a:fontRef idx="minor">
+                <a:schemeClr val="lt1"/>
+              </a:fontRef>
+            </p:style>
+            <p:txBody>
+              <a:bodyPr rtlCol="0" anchor="ctr"/>
+              <a:p>
+                <a:pPr algn="ctr"/>
+                <a:endParaRPr lang="zh-CN" altLang="en-US"/>
+              </a:p>
+            </p:txBody>
+          </p:sp>
+          <p:pic>
+            <p:nvPicPr>
+              <p:cNvPr id="7" name="图片 6"/>
+              <p:cNvPicPr>
+                <a:picLocks noChangeAspect="1"/>
+              </p:cNvPicPr>
+              <p:nvPr>
+                <p:custDataLst>
+                  <p:tags r:id="rId9"/>
+                </p:custDataLst>
+              </p:nvPr>
+            </p:nvPicPr>
+            <p:blipFill>
+              <a:blip r:embed="rId10"/>
+              <a:stretch>
+                <a:fillRect/>
+              </a:stretch>
+            </p:blipFill>
+            <p:spPr>
+              <a:xfrm>
+                <a:off x="6651" y="6080"/>
+                <a:ext cx="567" cy="567"/>
+              </a:xfrm>
+              <a:prstGeom prst="rect">
+                <a:avLst/>
+              </a:prstGeom>
+            </p:spPr>
+          </p:pic>
+          <p:sp>
+            <p:nvSpPr>
+              <p:cNvPr id="19" name="文本框 18"/>
+              <p:cNvSpPr txBox="1"/>
+              <p:nvPr>
+                <p:custDataLst>
+                  <p:tags r:id="rId11"/>
+                </p:custDataLst>
+              </p:nvPr>
+            </p:nvSpPr>
+            <p:spPr>
+              <a:xfrm>
+                <a:off x="5676" y="6581"/>
+                <a:ext cx="2558" cy="386"/>
+              </a:xfrm>
+              <a:prstGeom prst="rect">
+                <a:avLst/>
+              </a:prstGeom>
+              <a:noFill/>
+            </p:spPr>
+            <p:txBody>
+              <a:bodyPr wrap="square" rtlCol="0">
+                <a:spAutoFit/>
+              </a:bodyPr>
+              <a:p>
+                <a:pPr algn="ctr"/>
+                <a:r>
+                  <a:rPr lang="en-US" altLang="zh-CN" sz="1000">
+                    <a:latin typeface="Times New Roman" panose="02020603050405020304" charset="0"/>
+                    <a:cs typeface="Times New Roman" panose="02020603050405020304" charset="0"/>
+                  </a:rPr>
+                  <a:t>Compile </a:t>
+                </a:r>
+                <a:r>
+                  <a:rPr lang="en-US" altLang="zh-CN" sz="1000">
+                    <a:latin typeface="Times New Roman" panose="02020603050405020304" charset="0"/>
+                    <a:cs typeface="Times New Roman" panose="02020603050405020304" charset="0"/>
+                  </a:rPr>
+                  <a:t>Code</a:t>
+                </a:r>
+                <a:endParaRPr lang="en-US" altLang="zh-CN" sz="1000">
+                  <a:latin typeface="Times New Roman" panose="02020603050405020304" charset="0"/>
+                  <a:cs typeface="Times New Roman" panose="02020603050405020304" charset="0"/>
+                </a:endParaRPr>
+              </a:p>
+            </p:txBody>
+          </p:sp>
+          <p:sp>
+            <p:nvSpPr>
+              <p:cNvPr id="23" name="矩形 22"/>
+              <p:cNvSpPr/>
+              <p:nvPr/>
+            </p:nvSpPr>
+            <p:spPr>
+              <a:xfrm>
+                <a:off x="5656" y="5642"/>
+                <a:ext cx="2559" cy="365"/>
+              </a:xfrm>
+              <a:prstGeom prst="rect">
+                <a:avLst/>
+              </a:prstGeom>
+              <a:solidFill>
+                <a:srgbClr val="EDFAF2"/>
+              </a:solidFill>
+              <a:ln>
+                <a:solidFill>
+                  <a:srgbClr val="323232"/>
+                </a:solidFill>
+              </a:ln>
+            </p:spPr>
+            <p:style>
+              <a:lnRef idx="2">
+                <a:schemeClr val="accent1">
+                  <a:lumMod val="75000"/>
+                </a:schemeClr>
+              </a:lnRef>
+              <a:fillRef idx="1">
+                <a:schemeClr val="accent1"/>
+              </a:fillRef>
+              <a:effectRef idx="0">
+                <a:srgbClr val="FFFFFF"/>
+              </a:effectRef>
+              <a:fontRef idx="minor">
+                <a:schemeClr val="lt1"/>
+              </a:fontRef>
+            </p:style>
+            <p:txBody>
+              <a:bodyPr rtlCol="0" anchor="ctr"/>
+              <a:p>
+                <a:pPr algn="ctr"/>
+                <a:r>
+                  <a:rPr lang="en-US" altLang="zh-CN" sz="1000">
+                    <a:solidFill>
+                      <a:schemeClr val="tx1"/>
+                    </a:solidFill>
+                    <a:latin typeface="Times New Roman" panose="02020603050405020304" charset="0"/>
+                    <a:cs typeface="Times New Roman" panose="02020603050405020304" charset="0"/>
+                    <a:sym typeface="+mn-ea"/>
+                  </a:rPr>
+                  <a:t>Step1: Compile Code</a:t>
+                </a:r>
+                <a:endParaRPr lang="en-US" altLang="zh-CN" sz="1000">
+                  <a:solidFill>
+                    <a:schemeClr val="tx1"/>
+                  </a:solidFill>
+                  <a:latin typeface="Times New Roman" panose="02020603050405020304" charset="0"/>
+                  <a:cs typeface="Times New Roman" panose="02020603050405020304" charset="0"/>
+                  <a:sym typeface="+mn-ea"/>
+                </a:endParaRPr>
+              </a:p>
+            </p:txBody>
+          </p:sp>
+        </p:grpSp>
+        <p:grpSp>
+          <p:nvGrpSpPr>
+            <p:cNvPr id="38" name="组合 37"/>
+            <p:cNvGrpSpPr/>
+            <p:nvPr/>
+          </p:nvGrpSpPr>
+          <p:grpSpPr>
+            <a:xfrm>
+              <a:off x="5046" y="5055"/>
+              <a:ext cx="2579" cy="1326"/>
+              <a:chOff x="5657" y="3437"/>
+              <a:chExt cx="2578" cy="1326"/>
+            </a:xfrm>
+          </p:grpSpPr>
+          <p:sp>
+            <p:nvSpPr>
+              <p:cNvPr id="29" name="矩形 28"/>
+              <p:cNvSpPr/>
+              <p:nvPr>
+                <p:custDataLst>
+                  <p:tags r:id="rId12"/>
+                </p:custDataLst>
+              </p:nvPr>
+            </p:nvSpPr>
+            <p:spPr>
+              <a:xfrm>
+                <a:off x="5657" y="3809"/>
+                <a:ext cx="2558" cy="954"/>
+              </a:xfrm>
+              <a:prstGeom prst="rect">
+                <a:avLst/>
+              </a:prstGeom>
+              <a:solidFill>
+                <a:schemeClr val="bg1"/>
+              </a:solidFill>
+              <a:ln>
+                <a:solidFill>
+                  <a:schemeClr val="tx1"/>
+                </a:solidFill>
+              </a:ln>
+            </p:spPr>
+            <p:style>
+              <a:lnRef idx="2">
+                <a:schemeClr val="accent1">
+                  <a:lumMod val="75000"/>
+                </a:schemeClr>
+              </a:lnRef>
+              <a:fillRef idx="1">
+                <a:schemeClr val="accent1"/>
+              </a:fillRef>
+              <a:effectRef idx="0">
+                <a:srgbClr val="FFFFFF"/>
+              </a:effectRef>
+              <a:fontRef idx="minor">
+                <a:schemeClr val="lt1"/>
+              </a:fontRef>
+            </p:style>
+            <p:txBody>
+              <a:bodyPr rtlCol="0" anchor="ctr"/>
+              <a:p>
+                <a:pPr algn="ctr"/>
+                <a:endParaRPr lang="zh-CN" altLang="en-US"/>
+              </a:p>
+            </p:txBody>
+          </p:sp>
+          <p:sp>
+            <p:nvSpPr>
+              <p:cNvPr id="31" name="文本框 30"/>
+              <p:cNvSpPr txBox="1"/>
+              <p:nvPr>
+                <p:custDataLst>
+                  <p:tags r:id="rId13"/>
+                </p:custDataLst>
+              </p:nvPr>
+            </p:nvSpPr>
+            <p:spPr>
+              <a:xfrm>
+                <a:off x="5677" y="4376"/>
+                <a:ext cx="2558" cy="386"/>
+              </a:xfrm>
+              <a:prstGeom prst="rect">
+                <a:avLst/>
+              </a:prstGeom>
+              <a:noFill/>
+            </p:spPr>
+            <p:txBody>
+              <a:bodyPr wrap="square" rtlCol="0">
+                <a:spAutoFit/>
+              </a:bodyPr>
+              <a:p>
+                <a:pPr algn="ctr"/>
+                <a:r>
+                  <a:rPr lang="en-US" altLang="zh-CN" sz="1000">
+                    <a:latin typeface="Times New Roman" panose="02020603050405020304" charset="0"/>
+                    <a:cs typeface="Times New Roman" panose="02020603050405020304" charset="0"/>
+                  </a:rPr>
+                  <a:t>Fix Generated Code</a:t>
+                </a:r>
+                <a:endParaRPr lang="en-US" altLang="zh-CN" sz="1000">
+                  <a:latin typeface="Times New Roman" panose="02020603050405020304" charset="0"/>
+                  <a:cs typeface="Times New Roman" panose="02020603050405020304" charset="0"/>
+                </a:endParaRPr>
+              </a:p>
+            </p:txBody>
+          </p:sp>
+          <p:sp>
+            <p:nvSpPr>
+              <p:cNvPr id="32" name="矩形 31"/>
+              <p:cNvSpPr/>
+              <p:nvPr/>
+            </p:nvSpPr>
+            <p:spPr>
+              <a:xfrm>
+                <a:off x="5657" y="3437"/>
+                <a:ext cx="2559" cy="365"/>
+              </a:xfrm>
+              <a:prstGeom prst="rect">
+                <a:avLst/>
+              </a:prstGeom>
+              <a:solidFill>
+                <a:srgbClr val="EDFAF2"/>
+              </a:solidFill>
+              <a:ln>
+                <a:solidFill>
+                  <a:srgbClr val="323232"/>
+                </a:solidFill>
+              </a:ln>
+            </p:spPr>
+            <p:style>
+              <a:lnRef idx="2">
+                <a:schemeClr val="accent1">
+                  <a:lumMod val="75000"/>
+                </a:schemeClr>
+              </a:lnRef>
+              <a:fillRef idx="1">
+                <a:schemeClr val="accent1"/>
+              </a:fillRef>
+              <a:effectRef idx="0">
+                <a:srgbClr val="FFFFFF"/>
+              </a:effectRef>
+              <a:fontRef idx="minor">
+                <a:schemeClr val="lt1"/>
+              </a:fontRef>
+            </p:style>
+            <p:txBody>
+              <a:bodyPr rtlCol="0" anchor="ctr"/>
+              <a:p>
+                <a:pPr algn="ctr"/>
+                <a:r>
+                  <a:rPr lang="en-US" altLang="zh-CN" sz="1000">
+                    <a:solidFill>
+                      <a:schemeClr val="tx1"/>
+                    </a:solidFill>
+                    <a:latin typeface="Times New Roman" panose="02020603050405020304" charset="0"/>
+                    <a:cs typeface="Times New Roman" panose="02020603050405020304" charset="0"/>
+                    <a:sym typeface="+mn-ea"/>
+                  </a:rPr>
+                  <a:t>Step2: Fix Generated Code</a:t>
+                </a:r>
+                <a:endParaRPr lang="en-US" altLang="zh-CN" sz="1000">
+                  <a:solidFill>
+                    <a:schemeClr val="tx1"/>
+                  </a:solidFill>
+                  <a:latin typeface="Times New Roman" panose="02020603050405020304" charset="0"/>
+                  <a:cs typeface="Times New Roman" panose="02020603050405020304" charset="0"/>
+                  <a:sym typeface="+mn-ea"/>
+                </a:endParaRPr>
+              </a:p>
+            </p:txBody>
+          </p:sp>
+          <p:pic>
+            <p:nvPicPr>
+              <p:cNvPr id="17" name="图片 16"/>
+              <p:cNvPicPr>
+                <a:picLocks noChangeAspect="1"/>
+              </p:cNvPicPr>
+              <p:nvPr>
+                <p:custDataLst>
+                  <p:tags r:id="rId14"/>
+                </p:custDataLst>
+              </p:nvPr>
+            </p:nvPicPr>
+            <p:blipFill>
+              <a:blip r:embed="rId15"/>
+              <a:stretch>
+                <a:fillRect/>
+              </a:stretch>
+            </p:blipFill>
+            <p:spPr>
+              <a:xfrm>
+                <a:off x="6652" y="3848"/>
+                <a:ext cx="506" cy="506"/>
+              </a:xfrm>
+              <a:prstGeom prst="rect">
+                <a:avLst/>
+              </a:prstGeom>
+            </p:spPr>
+          </p:pic>
+        </p:grpSp>
+        <p:sp>
+          <p:nvSpPr>
+            <p:cNvPr id="33" name="菱形 32"/>
+            <p:cNvSpPr/>
+            <p:nvPr/>
+          </p:nvSpPr>
+          <p:spPr>
+            <a:xfrm>
+              <a:off x="5047" y="3323"/>
+              <a:ext cx="2559" cy="1044"/>
+            </a:xfrm>
+            <a:prstGeom prst="diamond">
+              <a:avLst/>
+            </a:prstGeom>
+            <a:solidFill>
+              <a:schemeClr val="bg1"/>
+            </a:solidFill>
+            <a:ln>
+              <a:solidFill>
+                <a:schemeClr val="tx1"/>
+              </a:solidFill>
+            </a:ln>
+          </p:spPr>
+          <p:style>
+            <a:lnRef idx="2">
+              <a:schemeClr val="accent1">
+                <a:lumMod val="75000"/>
+              </a:schemeClr>
+            </a:lnRef>
+            <a:fillRef idx="1">
+              <a:schemeClr val="accent1"/>
+            </a:fillRef>
+            <a:effectRef idx="0">
+              <a:srgbClr val="FFFFFF"/>
+            </a:effectRef>
+            <a:fontRef idx="minor">
+              <a:schemeClr val="lt1"/>
+            </a:fontRef>
+          </p:style>
+          <p:txBody>
+            <a:bodyPr rtlCol="0" anchor="ctr"/>
+            <a:p>
+              <a:pPr algn="ctr"/>
+              <a:r>
+                <a:rPr lang="en-US" altLang="zh-CN" sz="1000">
+                  <a:solidFill>
+                    <a:schemeClr val="tx1"/>
+                  </a:solidFill>
+                  <a:latin typeface="Times New Roman" panose="02020603050405020304" charset="0"/>
+                  <a:cs typeface="Times New Roman" panose="02020603050405020304" charset="0"/>
+                </a:rPr>
+                <a:t>successful</a:t>
+              </a:r>
+              <a:r>
+                <a:rPr lang="zh-CN" altLang="en-US" sz="1000">
+                  <a:solidFill>
+                    <a:schemeClr val="tx1"/>
+                  </a:solidFill>
+                  <a:latin typeface="Times New Roman" panose="02020603050405020304" charset="0"/>
+                  <a:cs typeface="Times New Roman" panose="02020603050405020304" charset="0"/>
+                </a:rPr>
+                <a:t>？</a:t>
+              </a:r>
+              <a:endParaRPr lang="zh-CN" altLang="en-US" sz="1000">
+                <a:solidFill>
+                  <a:schemeClr val="tx1"/>
+                </a:solidFill>
+                <a:latin typeface="Times New Roman" panose="02020603050405020304" charset="0"/>
+                <a:cs typeface="Times New Roman" panose="02020603050405020304" charset="0"/>
+              </a:endParaRPr>
+            </a:p>
+          </p:txBody>
+        </p:sp>
+        <p:grpSp>
+          <p:nvGrpSpPr>
+            <p:cNvPr id="36" name="组合 35"/>
+            <p:cNvGrpSpPr/>
+            <p:nvPr/>
+          </p:nvGrpSpPr>
+          <p:grpSpPr>
+            <a:xfrm>
+              <a:off x="8265" y="5233"/>
+              <a:ext cx="2558" cy="1044"/>
+              <a:chOff x="14688" y="2214"/>
+              <a:chExt cx="2558" cy="1044"/>
+            </a:xfrm>
+          </p:grpSpPr>
+          <p:sp>
+            <p:nvSpPr>
+              <p:cNvPr id="34" name="菱形 33"/>
+              <p:cNvSpPr/>
+              <p:nvPr/>
+            </p:nvSpPr>
+            <p:spPr>
+              <a:xfrm>
+                <a:off x="14688" y="2214"/>
+                <a:ext cx="2559" cy="1044"/>
+              </a:xfrm>
+              <a:prstGeom prst="diamond">
+                <a:avLst/>
+              </a:prstGeom>
+              <a:solidFill>
+                <a:schemeClr val="bg1"/>
+              </a:solidFill>
+              <a:ln>
+                <a:solidFill>
+                  <a:schemeClr val="tx1"/>
+                </a:solidFill>
+              </a:ln>
+            </p:spPr>
+            <p:style>
+              <a:lnRef idx="2">
+                <a:schemeClr val="accent1">
+                  <a:lumMod val="75000"/>
+                </a:schemeClr>
+              </a:lnRef>
+              <a:fillRef idx="1">
+                <a:schemeClr val="accent1"/>
+              </a:fillRef>
+              <a:effectRef idx="0">
+                <a:srgbClr val="FFFFFF"/>
+              </a:effectRef>
+              <a:fontRef idx="minor">
+                <a:schemeClr val="lt1"/>
+              </a:fontRef>
+            </p:style>
+            <p:txBody>
+              <a:bodyPr rtlCol="0" anchor="ctr"/>
+              <a:p>
+                <a:pPr algn="ctr"/>
+                <a:endParaRPr lang="zh-CN" altLang="en-US" sz="1000">
+                  <a:solidFill>
+                    <a:schemeClr val="tx1"/>
+                  </a:solidFill>
+                  <a:latin typeface="Times New Roman" panose="02020603050405020304" charset="0"/>
+                  <a:cs typeface="Times New Roman" panose="02020603050405020304" charset="0"/>
+                </a:endParaRPr>
+              </a:p>
+            </p:txBody>
+          </p:sp>
+          <p:sp>
+            <p:nvSpPr>
+              <p:cNvPr id="35" name="文本框 34"/>
+              <p:cNvSpPr txBox="1"/>
+              <p:nvPr/>
+            </p:nvSpPr>
+            <p:spPr>
+              <a:xfrm>
+                <a:off x="15357" y="2430"/>
+                <a:ext cx="1491" cy="628"/>
+              </a:xfrm>
+              <a:prstGeom prst="rect">
+                <a:avLst/>
+              </a:prstGeom>
+              <a:noFill/>
+            </p:spPr>
+            <p:txBody>
+              <a:bodyPr wrap="square" rtlCol="0">
+                <a:spAutoFit/>
+              </a:bodyPr>
+              <a:p>
+                <a:r>
+                  <a:rPr lang="en-US" altLang="zh-CN" sz="1000">
+                    <a:latin typeface="Times New Roman" panose="02020603050405020304" charset="0"/>
+                    <a:cs typeface="Times New Roman" panose="02020603050405020304" charset="0"/>
+                  </a:rPr>
+                  <a:t>Retry Limited Reached </a:t>
+                </a:r>
+                <a:r>
+                  <a:rPr lang="zh-CN" altLang="en-US" sz="1000">
+                    <a:latin typeface="Times New Roman" panose="02020603050405020304" charset="0"/>
+                    <a:cs typeface="Times New Roman" panose="02020603050405020304" charset="0"/>
+                  </a:rPr>
+                  <a:t>？</a:t>
+                </a:r>
+                <a:endParaRPr lang="zh-CN" altLang="en-US" sz="1000">
+                  <a:latin typeface="Times New Roman" panose="02020603050405020304" charset="0"/>
+                  <a:cs typeface="Times New Roman" panose="02020603050405020304" charset="0"/>
+                </a:endParaRPr>
+              </a:p>
+            </p:txBody>
+          </p:sp>
+        </p:grpSp>
+        <p:cxnSp>
+          <p:nvCxnSpPr>
+            <p:cNvPr id="40" name="曲线连接符 39"/>
+            <p:cNvCxnSpPr>
+              <a:endCxn id="33" idx="0"/>
+            </p:cNvCxnSpPr>
+            <p:nvPr/>
+          </p:nvCxnSpPr>
+          <p:spPr>
+            <a:xfrm rot="5400000" flipV="1">
+              <a:off x="6037" y="3033"/>
+              <a:ext cx="574" cy="5"/>
+            </a:xfrm>
+            <a:prstGeom prst="curvedConnector2">
+              <a:avLst/>
+            </a:prstGeom>
+            <a:ln w="19050" cap="flat" cmpd="sng">
+              <a:solidFill>
+                <a:schemeClr val="tx1"/>
+              </a:solidFill>
+              <a:tailEnd type="arrow"/>
+            </a:ln>
+          </p:spPr>
+          <p:style>
+            <a:lnRef idx="2">
+              <a:schemeClr val="accent1"/>
+            </a:lnRef>
+            <a:fillRef idx="0">
+              <a:srgbClr val="FFFFFF"/>
+            </a:fillRef>
+            <a:effectRef idx="0">
+              <a:srgbClr val="FFFFFF"/>
+            </a:effectRef>
+            <a:fontRef idx="minor">
+              <a:schemeClr val="tx1"/>
+            </a:fontRef>
+          </p:style>
+        </p:cxnSp>
+        <p:cxnSp>
+          <p:nvCxnSpPr>
+            <p:cNvPr id="46" name="肘形连接符 45"/>
+            <p:cNvCxnSpPr/>
+            <p:nvPr/>
+          </p:nvCxnSpPr>
+          <p:spPr>
+            <a:xfrm rot="5400000" flipH="1">
+              <a:off x="5293" y="2025"/>
+              <a:ext cx="4004" cy="4499"/>
+            </a:xfrm>
+            <a:prstGeom prst="bentConnector4">
+              <a:avLst>
+                <a:gd name="adj1" fmla="val -9353"/>
+                <a:gd name="adj2" fmla="val 108346"/>
+              </a:avLst>
+            </a:prstGeom>
+            <a:ln w="19050" cap="flat" cmpd="sng">
+              <a:solidFill>
+                <a:schemeClr val="tx1"/>
+              </a:solidFill>
+              <a:tailEnd type="arrow"/>
+            </a:ln>
+          </p:spPr>
+          <p:style>
+            <a:lnRef idx="2">
+              <a:schemeClr val="accent1"/>
+            </a:lnRef>
+            <a:fillRef idx="0">
+              <a:srgbClr val="FFFFFF"/>
+            </a:fillRef>
+            <a:effectRef idx="0">
+              <a:srgbClr val="FFFFFF"/>
+            </a:effectRef>
+            <a:fontRef idx="minor">
+              <a:schemeClr val="tx1"/>
+            </a:fontRef>
+          </p:style>
+        </p:cxnSp>
+        <p:cxnSp>
+          <p:nvCxnSpPr>
+            <p:cNvPr id="47" name="肘形连接符 46"/>
+            <p:cNvCxnSpPr>
+              <a:stCxn id="33" idx="2"/>
+              <a:endCxn id="32" idx="0"/>
+            </p:cNvCxnSpPr>
+            <p:nvPr/>
+          </p:nvCxnSpPr>
+          <p:spPr>
+            <a:xfrm rot="5400000">
+              <a:off x="5983" y="4711"/>
+              <a:ext cx="688" cy="1"/>
+            </a:xfrm>
+            <a:prstGeom prst="bentConnector3">
+              <a:avLst>
+                <a:gd name="adj1" fmla="val 49927"/>
+              </a:avLst>
+            </a:prstGeom>
+            <a:ln w="19050" cap="flat" cmpd="sng">
+              <a:solidFill>
+                <a:schemeClr val="tx1"/>
+              </a:solidFill>
+              <a:tailEnd type="arrow"/>
+            </a:ln>
+          </p:spPr>
+          <p:style>
+            <a:lnRef idx="2">
+              <a:schemeClr val="accent1"/>
+            </a:lnRef>
+            <a:fillRef idx="0">
+              <a:srgbClr val="FFFFFF"/>
+            </a:fillRef>
+            <a:effectRef idx="0">
+              <a:srgbClr val="FFFFFF"/>
+            </a:effectRef>
+            <a:fontRef idx="minor">
+              <a:schemeClr val="tx1"/>
+            </a:fontRef>
+          </p:style>
+        </p:cxnSp>
+        <p:cxnSp>
+          <p:nvCxnSpPr>
+            <p:cNvPr id="48" name="肘形连接符 47"/>
+            <p:cNvCxnSpPr>
+              <a:stCxn id="33" idx="3"/>
+              <a:endCxn id="59" idx="1"/>
+            </p:cNvCxnSpPr>
+            <p:nvPr/>
+          </p:nvCxnSpPr>
+          <p:spPr>
+            <a:xfrm flipV="1">
+              <a:off x="7606" y="2440"/>
+              <a:ext cx="4007" cy="1405"/>
+            </a:xfrm>
+            <a:prstGeom prst="bentConnector3">
+              <a:avLst>
+                <a:gd name="adj1" fmla="val 50012"/>
+              </a:avLst>
+            </a:prstGeom>
+            <a:ln w="19050" cap="flat" cmpd="sng">
+              <a:solidFill>
+                <a:schemeClr val="tx1"/>
+              </a:solidFill>
+              <a:tailEnd type="arrow"/>
+            </a:ln>
+          </p:spPr>
+          <p:style>
+            <a:lnRef idx="2">
+              <a:schemeClr val="accent1"/>
+            </a:lnRef>
+            <a:fillRef idx="0">
+              <a:srgbClr val="FFFFFF"/>
+            </a:fillRef>
+            <a:effectRef idx="0">
+              <a:srgbClr val="FFFFFF"/>
+            </a:effectRef>
+            <a:fontRef idx="minor">
+              <a:schemeClr val="tx1"/>
+            </a:fontRef>
+          </p:style>
+        </p:cxnSp>
+        <p:cxnSp>
+          <p:nvCxnSpPr>
+            <p:cNvPr id="49" name="肘形连接符 48"/>
+            <p:cNvCxnSpPr>
+              <a:endCxn id="34" idx="0"/>
+            </p:cNvCxnSpPr>
+            <p:nvPr/>
+          </p:nvCxnSpPr>
+          <p:spPr>
+            <a:xfrm flipV="1">
+              <a:off x="7603" y="5233"/>
+              <a:ext cx="1942" cy="522"/>
+            </a:xfrm>
+            <a:prstGeom prst="bentConnector4">
+              <a:avLst>
+                <a:gd name="adj1" fmla="val 17096"/>
+                <a:gd name="adj2" fmla="val 171839"/>
+              </a:avLst>
+            </a:prstGeom>
+            <a:ln w="19050" cap="flat" cmpd="sng">
+              <a:solidFill>
+                <a:schemeClr val="tx1"/>
+              </a:solidFill>
+              <a:tailEnd type="arrow"/>
+            </a:ln>
+          </p:spPr>
+          <p:style>
+            <a:lnRef idx="2">
+              <a:schemeClr val="accent1"/>
+            </a:lnRef>
+            <a:fillRef idx="0">
+              <a:srgbClr val="FFFFFF"/>
+            </a:fillRef>
+            <a:effectRef idx="0">
+              <a:srgbClr val="FFFFFF"/>
+            </a:effectRef>
+            <a:fontRef idx="minor">
+              <a:schemeClr val="tx1"/>
+            </a:fontRef>
+          </p:style>
+        </p:cxnSp>
+        <p:cxnSp>
+          <p:nvCxnSpPr>
+            <p:cNvPr id="53" name="肘形连接符 52"/>
+            <p:cNvCxnSpPr>
+              <a:stCxn id="34" idx="3"/>
+              <a:endCxn id="3" idx="1"/>
+            </p:cNvCxnSpPr>
+            <p:nvPr/>
+          </p:nvCxnSpPr>
+          <p:spPr>
+            <a:xfrm>
+              <a:off x="10824" y="5755"/>
+              <a:ext cx="909" cy="1"/>
+            </a:xfrm>
+            <a:prstGeom prst="bentConnector3">
+              <a:avLst>
+                <a:gd name="adj1" fmla="val 50055"/>
+              </a:avLst>
+            </a:prstGeom>
+            <a:ln w="19050" cap="flat" cmpd="sng">
+              <a:solidFill>
+                <a:schemeClr val="tx1"/>
+              </a:solidFill>
+              <a:tailEnd type="arrow"/>
+            </a:ln>
+          </p:spPr>
+          <p:style>
+            <a:lnRef idx="2">
+              <a:schemeClr val="accent1"/>
+            </a:lnRef>
+            <a:fillRef idx="0">
+              <a:srgbClr val="FFFFFF"/>
+            </a:fillRef>
+            <a:effectRef idx="0">
+              <a:srgbClr val="FFFFFF"/>
+            </a:effectRef>
+            <a:fontRef idx="minor">
+              <a:schemeClr val="tx1"/>
+            </a:fontRef>
+          </p:style>
+        </p:cxnSp>
+      </p:grpSp>
     </p:spTree>
   </p:cSld>
   <p:clrMapOvr>
@@ -5965,7 +13585,121 @@
 </p:tagLst>
 </file>
 
+<file path=ppt/tags/tag11.xml><?xml version="1.0" encoding="utf-8"?>
+<p:tagLst xmlns:p="http://schemas.openxmlformats.org/presentationml/2006/main">
+  <p:tag name="KSO_WM_DIAGRAM_VIRTUALLY_FRAME" val="{&quot;height&quot;:231.8,&quot;left&quot;:322.35,&quot;top&quot;:44.1,&quot;width&quot;:181.85}"/>
+</p:tagLst>
+</file>
+
+<file path=ppt/tags/tag12.xml><?xml version="1.0" encoding="utf-8"?>
+<p:tagLst xmlns:p="http://schemas.openxmlformats.org/presentationml/2006/main">
+  <p:tag name="KSO_WM_DIAGRAM_VIRTUALLY_FRAME" val="{&quot;height&quot;:231.8,&quot;left&quot;:322.35,&quot;top&quot;:44.1,&quot;width&quot;:181.85}"/>
+</p:tagLst>
+</file>
+
+<file path=ppt/tags/tag13.xml><?xml version="1.0" encoding="utf-8"?>
+<p:tagLst xmlns:p="http://schemas.openxmlformats.org/presentationml/2006/main">
+  <p:tag name="KSO_WM_DIAGRAM_VIRTUALLY_FRAME" val="{&quot;height&quot;:231.8,&quot;left&quot;:322.35,&quot;top&quot;:44.1,&quot;width&quot;:181.85}"/>
+</p:tagLst>
+</file>
+
+<file path=ppt/tags/tag14.xml><?xml version="1.0" encoding="utf-8"?>
+<p:tagLst xmlns:p="http://schemas.openxmlformats.org/presentationml/2006/main">
+  <p:tag name="KSO_WM_DIAGRAM_VIRTUALLY_FRAME" val="{&quot;height&quot;:231.8,&quot;left&quot;:322.35,&quot;top&quot;:44.1,&quot;width&quot;:181.85}"/>
+</p:tagLst>
+</file>
+
+<file path=ppt/tags/tag15.xml><?xml version="1.0" encoding="utf-8"?>
+<p:tagLst xmlns:p="http://schemas.openxmlformats.org/presentationml/2006/main">
+  <p:tag name="KSO_WM_DIAGRAM_VIRTUALLY_FRAME" val="{&quot;height&quot;:231.8,&quot;left&quot;:322.35,&quot;top&quot;:44.1,&quot;width&quot;:181.85}"/>
+</p:tagLst>
+</file>
+
+<file path=ppt/tags/tag16.xml><?xml version="1.0" encoding="utf-8"?>
+<p:tagLst xmlns:p="http://schemas.openxmlformats.org/presentationml/2006/main">
+  <p:tag name="KSO_WM_DIAGRAM_VIRTUALLY_FRAME" val="{&quot;height&quot;:231.8,&quot;left&quot;:322.35,&quot;top&quot;:44.1,&quot;width&quot;:181.85}"/>
+</p:tagLst>
+</file>
+
+<file path=ppt/tags/tag17.xml><?xml version="1.0" encoding="utf-8"?>
+<p:tagLst xmlns:p="http://schemas.openxmlformats.org/presentationml/2006/main">
+  <p:tag name="KSO_WM_DIAGRAM_VIRTUALLY_FRAME" val="{&quot;height&quot;:231.8,&quot;left&quot;:122.7,&quot;top&quot;:44.1,&quot;width&quot;:540.85}"/>
+</p:tagLst>
+</file>
+
+<file path=ppt/tags/tag18.xml><?xml version="1.0" encoding="utf-8"?>
+<p:tagLst xmlns:p="http://schemas.openxmlformats.org/presentationml/2006/main">
+  <p:tag name="KSO_WM_DIAGRAM_VIRTUALLY_FRAME" val="{&quot;height&quot;:231.8,&quot;left&quot;:122.7,&quot;top&quot;:44.1,&quot;width&quot;:540.85}"/>
+</p:tagLst>
+</file>
+
+<file path=ppt/tags/tag19.xml><?xml version="1.0" encoding="utf-8"?>
+<p:tagLst xmlns:p="http://schemas.openxmlformats.org/presentationml/2006/main">
+  <p:tag name="KSO_WM_DIAGRAM_VIRTUALLY_FRAME" val="{&quot;height&quot;:231.8,&quot;left&quot;:122.7,&quot;top&quot;:44.1,&quot;width&quot;:540.85}"/>
+</p:tagLst>
+</file>
+
 <file path=ppt/tags/tag2.xml><?xml version="1.0" encoding="utf-8"?>
+<p:tagLst xmlns:p="http://schemas.openxmlformats.org/presentationml/2006/main">
+  <p:tag name="KSO_WM_DIAGRAM_VIRTUALLY_FRAME" val="{&quot;height&quot;:231.8,&quot;left&quot;:322.35,&quot;top&quot;:44.1,&quot;width&quot;:181.85}"/>
+</p:tagLst>
+</file>
+
+<file path=ppt/tags/tag20.xml><?xml version="1.0" encoding="utf-8"?>
+<p:tagLst xmlns:p="http://schemas.openxmlformats.org/presentationml/2006/main">
+  <p:tag name="KSO_WM_DIAGRAM_VIRTUALLY_FRAME" val="{&quot;height&quot;:231.8,&quot;left&quot;:322.35,&quot;top&quot;:44.1,&quot;width&quot;:181.85}"/>
+</p:tagLst>
+</file>
+
+<file path=ppt/tags/tag21.xml><?xml version="1.0" encoding="utf-8"?>
+<p:tagLst xmlns:p="http://schemas.openxmlformats.org/presentationml/2006/main">
+  <p:tag name="KSO_WM_DIAGRAM_VIRTUALLY_FRAME" val="{&quot;height&quot;:231.8,&quot;left&quot;:322.35,&quot;top&quot;:44.1,&quot;width&quot;:181.85}"/>
+</p:tagLst>
+</file>
+
+<file path=ppt/tags/tag22.xml><?xml version="1.0" encoding="utf-8"?>
+<p:tagLst xmlns:p="http://schemas.openxmlformats.org/presentationml/2006/main">
+  <p:tag name="KSO_WM_DIAGRAM_VIRTUALLY_FRAME" val="{&quot;height&quot;:231.8,&quot;left&quot;:322.35,&quot;top&quot;:44.1,&quot;width&quot;:181.85}"/>
+</p:tagLst>
+</file>
+
+<file path=ppt/tags/tag23.xml><?xml version="1.0" encoding="utf-8"?>
+<p:tagLst xmlns:p="http://schemas.openxmlformats.org/presentationml/2006/main">
+  <p:tag name="KSO_WM_DIAGRAM_VIRTUALLY_FRAME" val="{&quot;height&quot;:231.8,&quot;left&quot;:322.35,&quot;top&quot;:44.1,&quot;width&quot;:181.85}"/>
+</p:tagLst>
+</file>
+
+<file path=ppt/tags/tag24.xml><?xml version="1.0" encoding="utf-8"?>
+<p:tagLst xmlns:p="http://schemas.openxmlformats.org/presentationml/2006/main">
+  <p:tag name="KSO_WM_DIAGRAM_VIRTUALLY_FRAME" val="{&quot;height&quot;:231.8,&quot;left&quot;:322.35,&quot;top&quot;:44.1,&quot;width&quot;:181.85}"/>
+</p:tagLst>
+</file>
+
+<file path=ppt/tags/tag25.xml><?xml version="1.0" encoding="utf-8"?>
+<p:tagLst xmlns:p="http://schemas.openxmlformats.org/presentationml/2006/main">
+  <p:tag name="KSO_WM_DIAGRAM_VIRTUALLY_FRAME" val="{&quot;height&quot;:231.8,&quot;left&quot;:322.35,&quot;top&quot;:44.1,&quot;width&quot;:181.85}"/>
+</p:tagLst>
+</file>
+
+<file path=ppt/tags/tag26.xml><?xml version="1.0" encoding="utf-8"?>
+<p:tagLst xmlns:p="http://schemas.openxmlformats.org/presentationml/2006/main">
+  <p:tag name="KSO_WM_DIAGRAM_VIRTUALLY_FRAME" val="{&quot;height&quot;:231.8,&quot;left&quot;:322.35,&quot;top&quot;:44.1,&quot;width&quot;:181.85}"/>
+</p:tagLst>
+</file>
+
+<file path=ppt/tags/tag27.xml><?xml version="1.0" encoding="utf-8"?>
+<p:tagLst xmlns:p="http://schemas.openxmlformats.org/presentationml/2006/main">
+  <p:tag name="KSO_WM_DIAGRAM_VIRTUALLY_FRAME" val="{&quot;height&quot;:231.8,&quot;left&quot;:322.35,&quot;top&quot;:44.1,&quot;width&quot;:181.85}"/>
+</p:tagLst>
+</file>
+
+<file path=ppt/tags/tag28.xml><?xml version="1.0" encoding="utf-8"?>
+<p:tagLst xmlns:p="http://schemas.openxmlformats.org/presentationml/2006/main">
+  <p:tag name="KSO_WM_DIAGRAM_VIRTUALLY_FRAME" val="{&quot;height&quot;:231.8,&quot;left&quot;:322.35,&quot;top&quot;:44.1,&quot;width&quot;:181.85}"/>
+</p:tagLst>
+</file>
+
+<file path=ppt/tags/tag29.xml><?xml version="1.0" encoding="utf-8"?>
 <p:tagLst xmlns:p="http://schemas.openxmlformats.org/presentationml/2006/main">
   <p:tag name="KSO_WM_DIAGRAM_VIRTUALLY_FRAME" val="{&quot;height&quot;:231.8,&quot;left&quot;:322.35,&quot;top&quot;:44.1,&quot;width&quot;:181.85}"/>
 </p:tagLst>
@@ -5977,7 +13711,127 @@
 </p:tagLst>
 </file>
 
+<file path=ppt/tags/tag30.xml><?xml version="1.0" encoding="utf-8"?>
+<p:tagLst xmlns:p="http://schemas.openxmlformats.org/presentationml/2006/main">
+  <p:tag name="KSO_WM_DIAGRAM_VIRTUALLY_FRAME" val="{&quot;height&quot;:231.8,&quot;left&quot;:322.35,&quot;top&quot;:44.1,&quot;width&quot;:181.85}"/>
+</p:tagLst>
+</file>
+
+<file path=ppt/tags/tag31.xml><?xml version="1.0" encoding="utf-8"?>
+<p:tagLst xmlns:p="http://schemas.openxmlformats.org/presentationml/2006/main">
+  <p:tag name="KSO_WM_DIAGRAM_VIRTUALLY_FRAME" val="{&quot;height&quot;:231.8,&quot;left&quot;:322.35,&quot;top&quot;:44.1,&quot;width&quot;:181.85}"/>
+</p:tagLst>
+</file>
+
+<file path=ppt/tags/tag32.xml><?xml version="1.0" encoding="utf-8"?>
+<p:tagLst xmlns:p="http://schemas.openxmlformats.org/presentationml/2006/main">
+  <p:tag name="KSO_WM_DIAGRAM_VIRTUALLY_FRAME" val="{&quot;height&quot;:231.8,&quot;left&quot;:322.35,&quot;top&quot;:44.1,&quot;width&quot;:181.85}"/>
+</p:tagLst>
+</file>
+
+<file path=ppt/tags/tag33.xml><?xml version="1.0" encoding="utf-8"?>
+<p:tagLst xmlns:p="http://schemas.openxmlformats.org/presentationml/2006/main">
+  <p:tag name="KSO_WM_DIAGRAM_VIRTUALLY_FRAME" val="{&quot;height&quot;:231.8,&quot;left&quot;:322.35,&quot;top&quot;:44.1,&quot;width&quot;:181.85}"/>
+</p:tagLst>
+</file>
+
+<file path=ppt/tags/tag34.xml><?xml version="1.0" encoding="utf-8"?>
+<p:tagLst xmlns:p="http://schemas.openxmlformats.org/presentationml/2006/main">
+  <p:tag name="KSO_WM_DIAGRAM_VIRTUALLY_FRAME" val="{&quot;height&quot;:231.8,&quot;left&quot;:122.7,&quot;top&quot;:44.1,&quot;width&quot;:540.85}"/>
+</p:tagLst>
+</file>
+
+<file path=ppt/tags/tag35.xml><?xml version="1.0" encoding="utf-8"?>
+<p:tagLst xmlns:p="http://schemas.openxmlformats.org/presentationml/2006/main">
+  <p:tag name="KSO_WM_DIAGRAM_VIRTUALLY_FRAME" val="{&quot;height&quot;:231.8,&quot;left&quot;:122.7,&quot;top&quot;:44.1,&quot;width&quot;:540.85}"/>
+</p:tagLst>
+</file>
+
+<file path=ppt/tags/tag36.xml><?xml version="1.0" encoding="utf-8"?>
+<p:tagLst xmlns:p="http://schemas.openxmlformats.org/presentationml/2006/main">
+  <p:tag name="KSO_WM_DIAGRAM_VIRTUALLY_FRAME" val="{&quot;height&quot;:231.8,&quot;left&quot;:122.7,&quot;top&quot;:44.1,&quot;width&quot;:540.85}"/>
+</p:tagLst>
+</file>
+
+<file path=ppt/tags/tag37.xml><?xml version="1.0" encoding="utf-8"?>
+<p:tagLst xmlns:p="http://schemas.openxmlformats.org/presentationml/2006/main">
+  <p:tag name="KSO_WM_DIAGRAM_VIRTUALLY_FRAME" val="{&quot;height&quot;:217.15,&quot;left&quot;:103.75,&quot;top&quot;:102.8,&quot;width&quot;:641.6770656879353}"/>
+</p:tagLst>
+</file>
+
+<file path=ppt/tags/tag38.xml><?xml version="1.0" encoding="utf-8"?>
+<p:tagLst xmlns:p="http://schemas.openxmlformats.org/presentationml/2006/main">
+  <p:tag name="KSO_WM_DIAGRAM_VIRTUALLY_FRAME" val="{&quot;height&quot;:217.15,&quot;left&quot;:103.75,&quot;top&quot;:102.8,&quot;width&quot;:641.6770656879353}"/>
+</p:tagLst>
+</file>
+
+<file path=ppt/tags/tag39.xml><?xml version="1.0" encoding="utf-8"?>
+<p:tagLst xmlns:p="http://schemas.openxmlformats.org/presentationml/2006/main">
+  <p:tag name="KSO_WM_DIAGRAM_VIRTUALLY_FRAME" val="{&quot;height&quot;:217.15,&quot;left&quot;:103.75,&quot;top&quot;:102.8,&quot;width&quot;:641.6770656879353}"/>
+</p:tagLst>
+</file>
+
 <file path=ppt/tags/tag4.xml><?xml version="1.0" encoding="utf-8"?>
+<p:tagLst xmlns:p="http://schemas.openxmlformats.org/presentationml/2006/main">
+  <p:tag name="KSO_WM_DIAGRAM_VIRTUALLY_FRAME" val="{&quot;height&quot;:231.8,&quot;left&quot;:322.35,&quot;top&quot;:44.1,&quot;width&quot;:181.85}"/>
+</p:tagLst>
+</file>
+
+<file path=ppt/tags/tag40.xml><?xml version="1.0" encoding="utf-8"?>
+<p:tagLst xmlns:p="http://schemas.openxmlformats.org/presentationml/2006/main">
+  <p:tag name="KSO_WM_DIAGRAM_VIRTUALLY_FRAME" val="{&quot;height&quot;:217.15,&quot;left&quot;:103.75,&quot;top&quot;:102.8,&quot;width&quot;:641.6770656879353}"/>
+</p:tagLst>
+</file>
+
+<file path=ppt/tags/tag41.xml><?xml version="1.0" encoding="utf-8"?>
+<p:tagLst xmlns:p="http://schemas.openxmlformats.org/presentationml/2006/main">
+  <p:tag name="KSO_WM_DIAGRAM_VIRTUALLY_FRAME" val="{&quot;height&quot;:217.15,&quot;left&quot;:103.75,&quot;top&quot;:102.8,&quot;width&quot;:641.6770656879353}"/>
+</p:tagLst>
+</file>
+
+<file path=ppt/tags/tag42.xml><?xml version="1.0" encoding="utf-8"?>
+<p:tagLst xmlns:p="http://schemas.openxmlformats.org/presentationml/2006/main">
+  <p:tag name="KSO_WM_DIAGRAM_VIRTUALLY_FRAME" val="{&quot;height&quot;:217.15,&quot;left&quot;:103.75,&quot;top&quot;:102.8,&quot;width&quot;:641.6770656879353}"/>
+</p:tagLst>
+</file>
+
+<file path=ppt/tags/tag43.xml><?xml version="1.0" encoding="utf-8"?>
+<p:tagLst xmlns:p="http://schemas.openxmlformats.org/presentationml/2006/main">
+  <p:tag name="KSO_WM_DIAGRAM_VIRTUALLY_FRAME" val="{&quot;height&quot;:217.15,&quot;left&quot;:103.75,&quot;top&quot;:102.8,&quot;width&quot;:641.6770656879353}"/>
+</p:tagLst>
+</file>
+
+<file path=ppt/tags/tag44.xml><?xml version="1.0" encoding="utf-8"?>
+<p:tagLst xmlns:p="http://schemas.openxmlformats.org/presentationml/2006/main">
+  <p:tag name="KSO_WM_DIAGRAM_VIRTUALLY_FRAME" val="{&quot;height&quot;:231.8,&quot;left&quot;:322.35,&quot;top&quot;:44.1,&quot;width&quot;:181.85}"/>
+</p:tagLst>
+</file>
+
+<file path=ppt/tags/tag45.xml><?xml version="1.0" encoding="utf-8"?>
+<p:tagLst xmlns:p="http://schemas.openxmlformats.org/presentationml/2006/main">
+  <p:tag name="KSO_WM_DIAGRAM_VIRTUALLY_FRAME" val="{&quot;height&quot;:231.8,&quot;left&quot;:322.35,&quot;top&quot;:44.1,&quot;width&quot;:181.85}"/>
+</p:tagLst>
+</file>
+
+<file path=ppt/tags/tag46.xml><?xml version="1.0" encoding="utf-8"?>
+<p:tagLst xmlns:p="http://schemas.openxmlformats.org/presentationml/2006/main">
+  <p:tag name="KSO_WM_DIAGRAM_VIRTUALLY_FRAME" val="{&quot;height&quot;:231.8,&quot;left&quot;:322.35,&quot;top&quot;:44.1,&quot;width&quot;:181.85}"/>
+</p:tagLst>
+</file>
+
+<file path=ppt/tags/tag47.xml><?xml version="1.0" encoding="utf-8"?>
+<p:tagLst xmlns:p="http://schemas.openxmlformats.org/presentationml/2006/main">
+  <p:tag name="KSO_WM_DIAGRAM_VIRTUALLY_FRAME" val="{&quot;height&quot;:231.8,&quot;left&quot;:322.35,&quot;top&quot;:44.1,&quot;width&quot;:181.85}"/>
+</p:tagLst>
+</file>
+
+<file path=ppt/tags/tag48.xml><?xml version="1.0" encoding="utf-8"?>
+<p:tagLst xmlns:p="http://schemas.openxmlformats.org/presentationml/2006/main">
+  <p:tag name="KSO_WM_DIAGRAM_VIRTUALLY_FRAME" val="{&quot;height&quot;:231.8,&quot;left&quot;:322.35,&quot;top&quot;:44.1,&quot;width&quot;:181.85}"/>
+</p:tagLst>
+</file>
+
+<file path=ppt/tags/tag49.xml><?xml version="1.0" encoding="utf-8"?>
 <p:tagLst xmlns:p="http://schemas.openxmlformats.org/presentationml/2006/main">
   <p:tag name="KSO_WM_DIAGRAM_VIRTUALLY_FRAME" val="{&quot;height&quot;:231.8,&quot;left&quot;:322.35,&quot;top&quot;:44.1,&quot;width&quot;:181.85}"/>
 </p:tagLst>
@@ -5989,13 +13843,193 @@
 </p:tagLst>
 </file>
 
+<file path=ppt/tags/tag50.xml><?xml version="1.0" encoding="utf-8"?>
+<p:tagLst xmlns:p="http://schemas.openxmlformats.org/presentationml/2006/main">
+  <p:tag name="KSO_WM_DIAGRAM_VIRTUALLY_FRAME" val="{&quot;height&quot;:231.8,&quot;left&quot;:322.35,&quot;top&quot;:44.1,&quot;width&quot;:181.85}"/>
+</p:tagLst>
+</file>
+
+<file path=ppt/tags/tag51.xml><?xml version="1.0" encoding="utf-8"?>
+<p:tagLst xmlns:p="http://schemas.openxmlformats.org/presentationml/2006/main">
+  <p:tag name="KSO_WM_DIAGRAM_VIRTUALLY_FRAME" val="{&quot;height&quot;:231.8,&quot;left&quot;:322.35,&quot;top&quot;:44.1,&quot;width&quot;:181.85}"/>
+</p:tagLst>
+</file>
+
+<file path=ppt/tags/tag52.xml><?xml version="1.0" encoding="utf-8"?>
+<p:tagLst xmlns:p="http://schemas.openxmlformats.org/presentationml/2006/main">
+  <p:tag name="KSO_WM_DIAGRAM_VIRTUALLY_FRAME" val="{&quot;height&quot;:231.8,&quot;left&quot;:322.35,&quot;top&quot;:44.1,&quot;width&quot;:181.85}"/>
+</p:tagLst>
+</file>
+
+<file path=ppt/tags/tag53.xml><?xml version="1.0" encoding="utf-8"?>
+<p:tagLst xmlns:p="http://schemas.openxmlformats.org/presentationml/2006/main">
+  <p:tag name="KSO_WM_DIAGRAM_VIRTUALLY_FRAME" val="{&quot;height&quot;:231.8,&quot;left&quot;:322.35,&quot;top&quot;:44.1,&quot;width&quot;:181.85}"/>
+</p:tagLst>
+</file>
+
+<file path=ppt/tags/tag54.xml><?xml version="1.0" encoding="utf-8"?>
+<p:tagLst xmlns:p="http://schemas.openxmlformats.org/presentationml/2006/main">
+  <p:tag name="KSO_WM_DIAGRAM_VIRTUALLY_FRAME" val="{&quot;height&quot;:231.8,&quot;left&quot;:322.35,&quot;top&quot;:44.1,&quot;width&quot;:181.85}"/>
+</p:tagLst>
+</file>
+
+<file path=ppt/tags/tag55.xml><?xml version="1.0" encoding="utf-8"?>
+<p:tagLst xmlns:p="http://schemas.openxmlformats.org/presentationml/2006/main">
+  <p:tag name="KSO_WM_DIAGRAM_VIRTUALLY_FRAME" val="{&quot;height&quot;:231.8,&quot;left&quot;:322.35,&quot;top&quot;:44.1,&quot;width&quot;:181.85}"/>
+</p:tagLst>
+</file>
+
+<file path=ppt/tags/tag56.xml><?xml version="1.0" encoding="utf-8"?>
+<p:tagLst xmlns:p="http://schemas.openxmlformats.org/presentationml/2006/main">
+  <p:tag name="KSO_WM_DIAGRAM_VIRTUALLY_FRAME" val="{&quot;height&quot;:231.8,&quot;left&quot;:322.35,&quot;top&quot;:44.1,&quot;width&quot;:181.85}"/>
+</p:tagLst>
+</file>
+
+<file path=ppt/tags/tag57.xml><?xml version="1.0" encoding="utf-8"?>
+<p:tagLst xmlns:p="http://schemas.openxmlformats.org/presentationml/2006/main">
+  <p:tag name="KSO_WM_DIAGRAM_VIRTUALLY_FRAME" val="{&quot;height&quot;:231.8,&quot;left&quot;:322.35,&quot;top&quot;:44.1,&quot;width&quot;:181.85}"/>
+</p:tagLst>
+</file>
+
+<file path=ppt/tags/tag58.xml><?xml version="1.0" encoding="utf-8"?>
+<p:tagLst xmlns:p="http://schemas.openxmlformats.org/presentationml/2006/main">
+  <p:tag name="KSO_WM_DIAGRAM_VIRTUALLY_FRAME" val="{&quot;height&quot;:231.8,&quot;left&quot;:122.7,&quot;top&quot;:44.1,&quot;width&quot;:540.85}"/>
+</p:tagLst>
+</file>
+
+<file path=ppt/tags/tag59.xml><?xml version="1.0" encoding="utf-8"?>
+<p:tagLst xmlns:p="http://schemas.openxmlformats.org/presentationml/2006/main">
+  <p:tag name="KSO_WM_DIAGRAM_VIRTUALLY_FRAME" val="{&quot;height&quot;:231.8,&quot;left&quot;:122.7,&quot;top&quot;:44.1,&quot;width&quot;:540.85}"/>
+</p:tagLst>
+</file>
+
 <file path=ppt/tags/tag6.xml><?xml version="1.0" encoding="utf-8"?>
 <p:tagLst xmlns:p="http://schemas.openxmlformats.org/presentationml/2006/main">
   <p:tag name="KSO_WM_DIAGRAM_VIRTUALLY_FRAME" val="{&quot;height&quot;:231.8,&quot;left&quot;:322.35,&quot;top&quot;:44.1,&quot;width&quot;:181.85}"/>
 </p:tagLst>
 </file>
 
+<file path=ppt/tags/tag60.xml><?xml version="1.0" encoding="utf-8"?>
+<p:tagLst xmlns:p="http://schemas.openxmlformats.org/presentationml/2006/main">
+  <p:tag name="KSO_WM_DIAGRAM_VIRTUALLY_FRAME" val="{&quot;height&quot;:231.8,&quot;left&quot;:122.7,&quot;top&quot;:44.1,&quot;width&quot;:540.85}"/>
+</p:tagLst>
+</file>
+
+<file path=ppt/tags/tag61.xml><?xml version="1.0" encoding="utf-8"?>
+<p:tagLst xmlns:p="http://schemas.openxmlformats.org/presentationml/2006/main">
+  <p:tag name="KSO_WM_DIAGRAM_VIRTUALLY_FRAME" val="{&quot;height&quot;:281.35,&quot;left&quot;:100.35,&quot;top&quot;:46.3,&quot;width&quot;:697.85}"/>
+</p:tagLst>
+</file>
+
+<file path=ppt/tags/tag62.xml><?xml version="1.0" encoding="utf-8"?>
+<p:tagLst xmlns:p="http://schemas.openxmlformats.org/presentationml/2006/main">
+  <p:tag name="KSO_WM_DIAGRAM_VIRTUALLY_FRAME" val="{&quot;height&quot;:281.35,&quot;left&quot;:100.35,&quot;top&quot;:46.3,&quot;width&quot;:697.85}"/>
+</p:tagLst>
+</file>
+
+<file path=ppt/tags/tag63.xml><?xml version="1.0" encoding="utf-8"?>
+<p:tagLst xmlns:p="http://schemas.openxmlformats.org/presentationml/2006/main">
+  <p:tag name="KSO_WM_DIAGRAM_VIRTUALLY_FRAME" val="{&quot;height&quot;:281.35,&quot;left&quot;:100.35,&quot;top&quot;:46.3,&quot;width&quot;:697.85}"/>
+</p:tagLst>
+</file>
+
+<file path=ppt/tags/tag64.xml><?xml version="1.0" encoding="utf-8"?>
+<p:tagLst xmlns:p="http://schemas.openxmlformats.org/presentationml/2006/main">
+  <p:tag name="KSO_WM_DIAGRAM_VIRTUALLY_FRAME" val="{&quot;height&quot;:281.35,&quot;left&quot;:100.35,&quot;top&quot;:46.3,&quot;width&quot;:697.85}"/>
+</p:tagLst>
+</file>
+
+<file path=ppt/tags/tag65.xml><?xml version="1.0" encoding="utf-8"?>
+<p:tagLst xmlns:p="http://schemas.openxmlformats.org/presentationml/2006/main">
+  <p:tag name="KSO_WM_DIAGRAM_VIRTUALLY_FRAME" val="{&quot;height&quot;:281.35,&quot;left&quot;:100.35,&quot;top&quot;:46.3,&quot;width&quot;:697.85}"/>
+</p:tagLst>
+</file>
+
+<file path=ppt/tags/tag66.xml><?xml version="1.0" encoding="utf-8"?>
+<p:tagLst xmlns:p="http://schemas.openxmlformats.org/presentationml/2006/main">
+  <p:tag name="KSO_WM_DIAGRAM_VIRTUALLY_FRAME" val="{&quot;height&quot;:281.35,&quot;left&quot;:100.35,&quot;top&quot;:46.3,&quot;width&quot;:697.85}"/>
+</p:tagLst>
+</file>
+
+<file path=ppt/tags/tag67.xml><?xml version="1.0" encoding="utf-8"?>
+<p:tagLst xmlns:p="http://schemas.openxmlformats.org/presentationml/2006/main">
+  <p:tag name="KSO_WM_DIAGRAM_VIRTUALLY_FRAME" val="{&quot;height&quot;:231.8,&quot;left&quot;:122.7,&quot;top&quot;:44.1,&quot;width&quot;:540.85}"/>
+</p:tagLst>
+</file>
+
+<file path=ppt/tags/tag68.xml><?xml version="1.0" encoding="utf-8"?>
+<p:tagLst xmlns:p="http://schemas.openxmlformats.org/presentationml/2006/main">
+  <p:tag name="KSO_WM_DIAGRAM_VIRTUALLY_FRAME" val="{&quot;height&quot;:231.8,&quot;left&quot;:322.35,&quot;top&quot;:44.1,&quot;width&quot;:181.85}"/>
+</p:tagLst>
+</file>
+
+<file path=ppt/tags/tag69.xml><?xml version="1.0" encoding="utf-8"?>
+<p:tagLst xmlns:p="http://schemas.openxmlformats.org/presentationml/2006/main">
+  <p:tag name="KSO_WM_DIAGRAM_VIRTUALLY_FRAME" val="{&quot;height&quot;:231.8,&quot;left&quot;:122.7,&quot;top&quot;:44.1,&quot;width&quot;:540.85}"/>
+</p:tagLst>
+</file>
+
 <file path=ppt/tags/tag7.xml><?xml version="1.0" encoding="utf-8"?>
+<p:tagLst xmlns:p="http://schemas.openxmlformats.org/presentationml/2006/main">
+  <p:tag name="KSO_WM_DIAGRAM_VIRTUALLY_FRAME" val="{&quot;height&quot;:231.8,&quot;left&quot;:322.35,&quot;top&quot;:44.1,&quot;width&quot;:181.85}"/>
+</p:tagLst>
+</file>
+
+<file path=ppt/tags/tag70.xml><?xml version="1.0" encoding="utf-8"?>
+<p:tagLst xmlns:p="http://schemas.openxmlformats.org/presentationml/2006/main">
+  <p:tag name="KSO_WM_DIAGRAM_VIRTUALLY_FRAME" val="{&quot;height&quot;:231.8,&quot;left&quot;:322.35,&quot;top&quot;:44.1,&quot;width&quot;:181.85}"/>
+</p:tagLst>
+</file>
+
+<file path=ppt/tags/tag71.xml><?xml version="1.0" encoding="utf-8"?>
+<p:tagLst xmlns:p="http://schemas.openxmlformats.org/presentationml/2006/main">
+  <p:tag name="KSO_WM_DIAGRAM_VIRTUALLY_FRAME" val="{&quot;height&quot;:231.8,&quot;left&quot;:122.7,&quot;top&quot;:44.1,&quot;width&quot;:540.85}"/>
+</p:tagLst>
+</file>
+
+<file path=ppt/tags/tag72.xml><?xml version="1.0" encoding="utf-8"?>
+<p:tagLst xmlns:p="http://schemas.openxmlformats.org/presentationml/2006/main">
+  <p:tag name="KSO_WM_DIAGRAM_VIRTUALLY_FRAME" val="{&quot;height&quot;:231.8,&quot;left&quot;:122.7,&quot;top&quot;:44.1,&quot;width&quot;:540.85}"/>
+</p:tagLst>
+</file>
+
+<file path=ppt/tags/tag73.xml><?xml version="1.0" encoding="utf-8"?>
+<p:tagLst xmlns:p="http://schemas.openxmlformats.org/presentationml/2006/main">
+  <p:tag name="KSO_WM_DIAGRAM_VIRTUALLY_FRAME" val="{&quot;height&quot;:231.8,&quot;left&quot;:122.7,&quot;top&quot;:44.1,&quot;width&quot;:540.85}"/>
+</p:tagLst>
+</file>
+
+<file path=ppt/tags/tag74.xml><?xml version="1.0" encoding="utf-8"?>
+<p:tagLst xmlns:p="http://schemas.openxmlformats.org/presentationml/2006/main">
+  <p:tag name="KSO_WM_DIAGRAM_VIRTUALLY_FRAME" val="{&quot;height&quot;:231.8,&quot;left&quot;:122.7,&quot;top&quot;:44.1,&quot;width&quot;:540.85}"/>
+</p:tagLst>
+</file>
+
+<file path=ppt/tags/tag75.xml><?xml version="1.0" encoding="utf-8"?>
+<p:tagLst xmlns:p="http://schemas.openxmlformats.org/presentationml/2006/main">
+  <p:tag name="KSO_WM_DIAGRAM_VIRTUALLY_FRAME" val="{&quot;height&quot;:231.8,&quot;left&quot;:122.7,&quot;top&quot;:44.1,&quot;width&quot;:540.85}"/>
+</p:tagLst>
+</file>
+
+<file path=ppt/tags/tag76.xml><?xml version="1.0" encoding="utf-8"?>
+<p:tagLst xmlns:p="http://schemas.openxmlformats.org/presentationml/2006/main">
+  <p:tag name="KSO_WM_DIAGRAM_VIRTUALLY_FRAME" val="{&quot;height&quot;:231.8,&quot;left&quot;:122.7,&quot;top&quot;:44.1,&quot;width&quot;:540.85}"/>
+</p:tagLst>
+</file>
+
+<file path=ppt/tags/tag77.xml><?xml version="1.0" encoding="utf-8"?>
+<p:tagLst xmlns:p="http://schemas.openxmlformats.org/presentationml/2006/main">
+  <p:tag name="KSO_WM_DIAGRAM_VIRTUALLY_FRAME" val="{&quot;height&quot;:231.8,&quot;left&quot;:322.35,&quot;top&quot;:44.1,&quot;width&quot;:181.85}"/>
+</p:tagLst>
+</file>
+
+<file path=ppt/tags/tag78.xml><?xml version="1.0" encoding="utf-8"?>
+<p:tagLst xmlns:p="http://schemas.openxmlformats.org/presentationml/2006/main">
+  <p:tag name="KSO_WM_DIAGRAM_VIRTUALLY_FRAME" val="{&quot;height&quot;:231.8,&quot;left&quot;:322.35,&quot;top&quot;:44.1,&quot;width&quot;:181.85}"/>
+</p:tagLst>
+</file>
+
+<file path=ppt/tags/tag79.xml><?xml version="1.0" encoding="utf-8"?>
 <p:tagLst xmlns:p="http://schemas.openxmlformats.org/presentationml/2006/main">
   <p:tag name="KSO_WM_DIAGRAM_VIRTUALLY_FRAME" val="{&quot;height&quot;:231.8,&quot;left&quot;:322.35,&quot;top&quot;:44.1,&quot;width&quot;:181.85}"/>
 </p:tagLst>
@@ -6007,9 +14041,93 @@
 </p:tagLst>
 </file>
 
+<file path=ppt/tags/tag80.xml><?xml version="1.0" encoding="utf-8"?>
+<p:tagLst xmlns:p="http://schemas.openxmlformats.org/presentationml/2006/main">
+  <p:tag name="KSO_WM_DIAGRAM_VIRTUALLY_FRAME" val="{&quot;height&quot;:231.8,&quot;left&quot;:322.35,&quot;top&quot;:44.1,&quot;width&quot;:181.85}"/>
+</p:tagLst>
+</file>
+
+<file path=ppt/tags/tag81.xml><?xml version="1.0" encoding="utf-8"?>
+<p:tagLst xmlns:p="http://schemas.openxmlformats.org/presentationml/2006/main">
+  <p:tag name="KSO_WM_DIAGRAM_VIRTUALLY_FRAME" val="{&quot;height&quot;:231.8,&quot;left&quot;:322.35,&quot;top&quot;:44.1,&quot;width&quot;:181.85}"/>
+</p:tagLst>
+</file>
+
+<file path=ppt/tags/tag82.xml><?xml version="1.0" encoding="utf-8"?>
+<p:tagLst xmlns:p="http://schemas.openxmlformats.org/presentationml/2006/main">
+  <p:tag name="KSO_WM_DIAGRAM_VIRTUALLY_FRAME" val="{&quot;height&quot;:231.8,&quot;left&quot;:122.7,&quot;top&quot;:44.1,&quot;width&quot;:540.85}"/>
+</p:tagLst>
+</file>
+
+<file path=ppt/tags/tag83.xml><?xml version="1.0" encoding="utf-8"?>
+<p:tagLst xmlns:p="http://schemas.openxmlformats.org/presentationml/2006/main">
+  <p:tag name="KSO_WM_DIAGRAM_VIRTUALLY_FRAME" val="{&quot;height&quot;:231.8,&quot;left&quot;:122.7,&quot;top&quot;:44.1,&quot;width&quot;:540.85}"/>
+</p:tagLst>
+</file>
+
+<file path=ppt/tags/tag84.xml><?xml version="1.0" encoding="utf-8"?>
+<p:tagLst xmlns:p="http://schemas.openxmlformats.org/presentationml/2006/main">
+  <p:tag name="KSO_WM_DIAGRAM_VIRTUALLY_FRAME" val="{&quot;height&quot;:231.8,&quot;left&quot;:122.7,&quot;top&quot;:44.1,&quot;width&quot;:540.85}"/>
+</p:tagLst>
+</file>
+
+<file path=ppt/tags/tag85.xml><?xml version="1.0" encoding="utf-8"?>
+<p:tagLst xmlns:p="http://schemas.openxmlformats.org/presentationml/2006/main">
+  <p:tag name="KSO_WM_DIAGRAM_VIRTUALLY_FRAME" val="{&quot;height&quot;:281.35,&quot;left&quot;:100.35,&quot;top&quot;:46.3,&quot;width&quot;:697.85}"/>
+</p:tagLst>
+</file>
+
+<file path=ppt/tags/tag86.xml><?xml version="1.0" encoding="utf-8"?>
+<p:tagLst xmlns:p="http://schemas.openxmlformats.org/presentationml/2006/main">
+  <p:tag name="KSO_WM_DIAGRAM_VIRTUALLY_FRAME" val="{&quot;height&quot;:281.35,&quot;left&quot;:100.35,&quot;top&quot;:46.3,&quot;width&quot;:697.85}"/>
+</p:tagLst>
+</file>
+
+<file path=ppt/tags/tag87.xml><?xml version="1.0" encoding="utf-8"?>
+<p:tagLst xmlns:p="http://schemas.openxmlformats.org/presentationml/2006/main">
+  <p:tag name="KSO_WM_DIAGRAM_VIRTUALLY_FRAME" val="{&quot;height&quot;:281.35,&quot;left&quot;:100.35,&quot;top&quot;:46.3,&quot;width&quot;:697.85}"/>
+</p:tagLst>
+</file>
+
+<file path=ppt/tags/tag88.xml><?xml version="1.0" encoding="utf-8"?>
+<p:tagLst xmlns:p="http://schemas.openxmlformats.org/presentationml/2006/main">
+  <p:tag name="KSO_WM_DIAGRAM_VIRTUALLY_FRAME" val="{&quot;height&quot;:281.35,&quot;left&quot;:100.35,&quot;top&quot;:46.3,&quot;width&quot;:697.85}"/>
+</p:tagLst>
+</file>
+
+<file path=ppt/tags/tag89.xml><?xml version="1.0" encoding="utf-8"?>
+<p:tagLst xmlns:p="http://schemas.openxmlformats.org/presentationml/2006/main">
+  <p:tag name="KSO_WM_DIAGRAM_VIRTUALLY_FRAME" val="{&quot;height&quot;:281.35,&quot;left&quot;:100.35,&quot;top&quot;:46.3,&quot;width&quot;:697.85}"/>
+</p:tagLst>
+</file>
+
 <file path=ppt/tags/tag9.xml><?xml version="1.0" encoding="utf-8"?>
 <p:tagLst xmlns:p="http://schemas.openxmlformats.org/presentationml/2006/main">
   <p:tag name="KSO_WM_DIAGRAM_VIRTUALLY_FRAME" val="{&quot;height&quot;:231.8,&quot;left&quot;:322.35,&quot;top&quot;:44.1,&quot;width&quot;:181.85}"/>
+</p:tagLst>
+</file>
+
+<file path=ppt/tags/tag90.xml><?xml version="1.0" encoding="utf-8"?>
+<p:tagLst xmlns:p="http://schemas.openxmlformats.org/presentationml/2006/main">
+  <p:tag name="KSO_WM_DIAGRAM_VIRTUALLY_FRAME" val="{&quot;height&quot;:281.35,&quot;left&quot;:100.35,&quot;top&quot;:46.3,&quot;width&quot;:697.85}"/>
+</p:tagLst>
+</file>
+
+<file path=ppt/tags/tag91.xml><?xml version="1.0" encoding="utf-8"?>
+<p:tagLst xmlns:p="http://schemas.openxmlformats.org/presentationml/2006/main">
+  <p:tag name="KSO_WM_DIAGRAM_VIRTUALLY_FRAME" val="{&quot;height&quot;:281.35,&quot;left&quot;:100.35,&quot;top&quot;:46.3,&quot;width&quot;:697.85}"/>
+</p:tagLst>
+</file>
+
+<file path=ppt/tags/tag92.xml><?xml version="1.0" encoding="utf-8"?>
+<p:tagLst xmlns:p="http://schemas.openxmlformats.org/presentationml/2006/main">
+  <p:tag name="KSO_WM_DIAGRAM_VIRTUALLY_FRAME" val="{&quot;height&quot;:281.35,&quot;left&quot;:100.35,&quot;top&quot;:46.3,&quot;width&quot;:697.85}"/>
+</p:tagLst>
+</file>
+
+<file path=ppt/tags/tag93.xml><?xml version="1.0" encoding="utf-8"?>
+<p:tagLst xmlns:p="http://schemas.openxmlformats.org/presentationml/2006/main">
+  <p:tag name="KSO_WM_DIAGRAM_VIRTUALLY_FRAME" val="{&quot;height&quot;:281.35,&quot;left&quot;:100.35,&quot;top&quot;:46.3,&quot;width&quot;:697.85}"/>
 </p:tagLst>
 </file>
 
